--- a/presentation/Smart-Study-Rooms.pptx
+++ b/presentation/Smart-Study-Rooms.pptx
@@ -9,14 +9,14 @@
   </p:notesMasterIdLst>
   <p:sldIdLst>
     <p:sldId id="256" r:id="rId2"/>
-    <p:sldId id="257" r:id="rId3"/>
-    <p:sldId id="258" r:id="rId4"/>
+    <p:sldId id="258" r:id="rId3"/>
+    <p:sldId id="257" r:id="rId4"/>
     <p:sldId id="259" r:id="rId5"/>
-    <p:sldId id="260" r:id="rId6"/>
-    <p:sldId id="261" r:id="rId7"/>
+    <p:sldId id="264" r:id="rId6"/>
+    <p:sldId id="260" r:id="rId7"/>
     <p:sldId id="262" r:id="rId8"/>
-    <p:sldId id="263" r:id="rId9"/>
-    <p:sldId id="264" r:id="rId10"/>
+    <p:sldId id="261" r:id="rId9"/>
+    <p:sldId id="263" r:id="rId10"/>
   </p:sldIdLst>
   <p:sldSz cx="12192000" cy="6858000"/>
   <p:notesSz cx="6858000" cy="12192000"/>
@@ -2012,728 +2012,6 @@
 
 <file path=ppt/slides/slide2.xml><?xml version="1.0" encoding="utf-8"?>
 <p:sld xmlns:a="http://schemas.openxmlformats.org/drawingml/2006/main" xmlns:r="http://schemas.openxmlformats.org/officeDocument/2006/relationships" xmlns:p="http://schemas.openxmlformats.org/presentationml/2006/main">
-  <p:cSld name="Slide 2">
-    <p:spTree>
-      <p:nvGrpSpPr>
-        <p:cNvPr id="1" name=""/>
-        <p:cNvGrpSpPr/>
-        <p:nvPr/>
-      </p:nvGrpSpPr>
-      <p:grpSpPr>
-        <a:xfrm>
-          <a:off x="0" y="0"/>
-          <a:ext cx="0" cy="0"/>
-          <a:chOff x="0" y="0"/>
-          <a:chExt cx="0" cy="0"/>
-        </a:xfrm>
-      </p:grpSpPr>
-      <p:sp>
-        <p:nvSpPr>
-          <p:cNvPr id="19" name="Rettangolo 18">
-            <a:extLst>
-              <a:ext uri="{FF2B5EF4-FFF2-40B4-BE49-F238E27FC236}">
-                <a16:creationId xmlns:a16="http://schemas.microsoft.com/office/drawing/2014/main" id="{5D9E0580-5A25-1B80-A47A-D7D6D0331EE0}"/>
-              </a:ext>
-            </a:extLst>
-          </p:cNvPr>
-          <p:cNvSpPr/>
-          <p:nvPr/>
-        </p:nvSpPr>
-        <p:spPr>
-          <a:xfrm>
-            <a:off x="10961052" y="6559422"/>
-            <a:ext cx="1138335" cy="223934"/>
-          </a:xfrm>
-          <a:prstGeom prst="rect">
-            <a:avLst/>
-          </a:prstGeom>
-          <a:solidFill>
-            <a:srgbClr val="FFF8F0"/>
-          </a:solidFill>
-          <a:ln>
-            <a:solidFill>
-              <a:srgbClr val="FFF8F0"/>
-            </a:solidFill>
-          </a:ln>
-        </p:spPr>
-        <p:style>
-          <a:lnRef idx="2">
-            <a:schemeClr val="accent1">
-              <a:shade val="15000"/>
-            </a:schemeClr>
-          </a:lnRef>
-          <a:fillRef idx="1">
-            <a:schemeClr val="accent1"/>
-          </a:fillRef>
-          <a:effectRef idx="0">
-            <a:schemeClr val="accent1"/>
-          </a:effectRef>
-          <a:fontRef idx="minor">
-            <a:schemeClr val="lt1"/>
-          </a:fontRef>
-        </p:style>
-        <p:txBody>
-          <a:bodyPr rtlCol="0" anchor="ctr"/>
-          <a:lstStyle/>
-          <a:p>
-            <a:pPr algn="ctr"/>
-            <a:endParaRPr lang="it-IT"/>
-          </a:p>
-        </p:txBody>
-      </p:sp>
-      <p:pic>
-        <p:nvPicPr>
-          <p:cNvPr id="2" name="Image 0" descr="preencoded.png"/>
-          <p:cNvPicPr>
-            <a:picLocks noChangeAspect="1"/>
-          </p:cNvPicPr>
-          <p:nvPr/>
-        </p:nvPicPr>
-        <p:blipFill>
-          <a:blip r:embed="rId3"/>
-          <a:stretch>
-            <a:fillRect/>
-          </a:stretch>
-        </p:blipFill>
-        <p:spPr>
-          <a:xfrm>
-            <a:off x="7620114" y="0"/>
-            <a:ext cx="4571886" cy="6858000"/>
-          </a:xfrm>
-          <a:prstGeom prst="rect">
-            <a:avLst/>
-          </a:prstGeom>
-        </p:spPr>
-      </p:pic>
-      <p:sp>
-        <p:nvSpPr>
-          <p:cNvPr id="3" name="Text 0"/>
-          <p:cNvSpPr/>
-          <p:nvPr/>
-        </p:nvSpPr>
-        <p:spPr>
-          <a:xfrm>
-            <a:off x="661475" y="461200"/>
-            <a:ext cx="6296860" cy="387648"/>
-          </a:xfrm>
-          <a:prstGeom prst="rect">
-            <a:avLst/>
-          </a:prstGeom>
-          <a:noFill/>
-          <a:ln/>
-        </p:spPr>
-        <p:txBody>
-          <a:bodyPr wrap="none" lIns="0" tIns="0" rIns="0" bIns="0" rtlCol="0" anchor="t"/>
-          <a:lstStyle/>
-          <a:p>
-            <a:pPr marL="0" indent="0" algn="l">
-              <a:lnSpc>
-                <a:spcPct val="104000"/>
-              </a:lnSpc>
-              <a:buNone/>
-            </a:pPr>
-            <a:r>
-              <a:rPr lang="en-US" sz="2400" kern="0" spc="-73" dirty="0">
-                <a:solidFill>
-                  <a:srgbClr val="2C3F42"/>
-                </a:solidFill>
-                <a:latin typeface="Bitter Medium" pitchFamily="34" charset="0"/>
-                <a:ea typeface="Bitter Medium" pitchFamily="34" charset="-122"/>
-                <a:cs typeface="Bitter Medium" pitchFamily="34" charset="-120"/>
-              </a:rPr>
-              <a:t>Un Digital Twin per Ogni Aula</a:t>
-            </a:r>
-            <a:endParaRPr lang="en-US" sz="2400" dirty="0"/>
-          </a:p>
-        </p:txBody>
-      </p:sp>
-      <p:sp>
-        <p:nvSpPr>
-          <p:cNvPr id="4" name="Text 1"/>
-          <p:cNvSpPr/>
-          <p:nvPr/>
-        </p:nvSpPr>
-        <p:spPr>
-          <a:xfrm>
-            <a:off x="847505" y="1037943"/>
-            <a:ext cx="6110830" cy="573782"/>
-          </a:xfrm>
-          <a:prstGeom prst="rect">
-            <a:avLst/>
-          </a:prstGeom>
-          <a:noFill/>
-          <a:ln/>
-        </p:spPr>
-        <p:txBody>
-          <a:bodyPr wrap="square" lIns="0" tIns="0" rIns="0" bIns="0" rtlCol="0" anchor="t">
-            <a:noAutofit/>
-          </a:bodyPr>
-          <a:lstStyle/>
-          <a:p>
-            <a:pPr marL="0" indent="0" algn="l">
-              <a:lnSpc>
-                <a:spcPct val="110000"/>
-              </a:lnSpc>
-              <a:buNone/>
-            </a:pPr>
-            <a:r>
-              <a:rPr lang="en-US" sz="1200" kern="0" spc="-20" dirty="0">
-                <a:solidFill>
-                  <a:srgbClr val="2B2E3C"/>
-                </a:solidFill>
-                <a:latin typeface="Open Sans" pitchFamily="34" charset="0"/>
-                <a:ea typeface="Open Sans" pitchFamily="34" charset="-122"/>
-                <a:cs typeface="Open Sans" pitchFamily="34" charset="-120"/>
-              </a:rPr>
-              <a:t>Smart Study Rooms crea un gemello digitale di ogni aula studio: i nodi IoT raccolgono dati ambientali, il bridge li valida e sincronizza su Firebase, mentre l'app Android mostra lo stato realtime e suggerisce l'aula più adatta.</a:t>
-            </a:r>
-            <a:endParaRPr lang="en-US" sz="1200" dirty="0"/>
-          </a:p>
-        </p:txBody>
-      </p:sp>
-      <p:sp>
-        <p:nvSpPr>
-          <p:cNvPr id="5" name="Shape 2"/>
-          <p:cNvSpPr/>
-          <p:nvPr/>
-        </p:nvSpPr>
-        <p:spPr>
-          <a:xfrm>
-            <a:off x="661475" y="1068949"/>
-            <a:ext cx="12700" cy="511770"/>
-          </a:xfrm>
-          <a:prstGeom prst="roundRect">
-            <a:avLst>
-              <a:gd name="adj" fmla="val 49999"/>
-            </a:avLst>
-          </a:prstGeom>
-          <a:solidFill>
-            <a:srgbClr val="D2600F"/>
-          </a:solidFill>
-          <a:ln/>
-        </p:spPr>
-        <p:txBody>
-          <a:bodyPr/>
-          <a:lstStyle/>
-          <a:p>
-            <a:endParaRPr lang="it-IT"/>
-          </a:p>
-        </p:txBody>
-      </p:sp>
-      <p:sp>
-        <p:nvSpPr>
-          <p:cNvPr id="6" name="Text 3"/>
-          <p:cNvSpPr/>
-          <p:nvPr/>
-        </p:nvSpPr>
-        <p:spPr>
-          <a:xfrm>
-            <a:off x="661475" y="1800820"/>
-            <a:ext cx="6296860" cy="409377"/>
-          </a:xfrm>
-          <a:prstGeom prst="rect">
-            <a:avLst/>
-          </a:prstGeom>
-          <a:noFill/>
-          <a:ln/>
-        </p:spPr>
-        <p:txBody>
-          <a:bodyPr wrap="none" lIns="0" tIns="0" rIns="0" bIns="0" rtlCol="0" anchor="t"/>
-          <a:lstStyle/>
-          <a:p>
-            <a:pPr marL="0" indent="0" algn="ctr">
-              <a:lnSpc>
-                <a:spcPct val="83000"/>
-              </a:lnSpc>
-              <a:buNone/>
-            </a:pPr>
-            <a:r>
-              <a:rPr lang="en-US" sz="3200" kern="0" spc="-97" dirty="0">
-                <a:solidFill>
-                  <a:srgbClr val="2B2E3C"/>
-                </a:solidFill>
-                <a:latin typeface="Bitter Medium" pitchFamily="34" charset="0"/>
-                <a:ea typeface="Bitter Medium" pitchFamily="34" charset="-122"/>
-                <a:cs typeface="Bitter Medium" pitchFamily="34" charset="-120"/>
-              </a:rPr>
-              <a:t>2</a:t>
-            </a:r>
-            <a:endParaRPr lang="en-US" sz="3200" dirty="0"/>
-          </a:p>
-        </p:txBody>
-      </p:sp>
-      <p:sp>
-        <p:nvSpPr>
-          <p:cNvPr id="7" name="Text 4"/>
-          <p:cNvSpPr/>
-          <p:nvPr/>
-        </p:nvSpPr>
-        <p:spPr>
-          <a:xfrm>
-            <a:off x="661475" y="2333228"/>
-            <a:ext cx="6296860" cy="193774"/>
-          </a:xfrm>
-          <a:prstGeom prst="rect">
-            <a:avLst/>
-          </a:prstGeom>
-          <a:noFill/>
-          <a:ln/>
-        </p:spPr>
-        <p:txBody>
-          <a:bodyPr wrap="none" lIns="0" tIns="0" rIns="0" bIns="0" rtlCol="0" anchor="t"/>
-          <a:lstStyle/>
-          <a:p>
-            <a:pPr marL="0" indent="0" algn="ctr">
-              <a:lnSpc>
-                <a:spcPct val="104000"/>
-              </a:lnSpc>
-              <a:buNone/>
-            </a:pPr>
-            <a:r>
-              <a:rPr lang="en-US" sz="1200" kern="0" spc="-37" dirty="0">
-                <a:solidFill>
-                  <a:srgbClr val="2B2E3C"/>
-                </a:solidFill>
-                <a:latin typeface="Bitter Medium" pitchFamily="34" charset="0"/>
-                <a:ea typeface="Bitter Medium" pitchFamily="34" charset="-122"/>
-                <a:cs typeface="Bitter Medium" pitchFamily="34" charset="-120"/>
-              </a:rPr>
-              <a:t>Aule monitorate</a:t>
-            </a:r>
-            <a:endParaRPr lang="en-US" sz="1200" dirty="0"/>
-          </a:p>
-        </p:txBody>
-      </p:sp>
-      <p:sp>
-        <p:nvSpPr>
-          <p:cNvPr id="8" name="Text 5"/>
-          <p:cNvSpPr/>
-          <p:nvPr/>
-        </p:nvSpPr>
-        <p:spPr>
-          <a:xfrm>
-            <a:off x="661475" y="2575818"/>
-            <a:ext cx="6296860" cy="164306"/>
-          </a:xfrm>
-          <a:prstGeom prst="rect">
-            <a:avLst/>
-          </a:prstGeom>
-          <a:noFill/>
-          <a:ln/>
-        </p:spPr>
-        <p:txBody>
-          <a:bodyPr wrap="none" lIns="0" tIns="0" rIns="0" bIns="0" rtlCol="0" anchor="t"/>
-          <a:lstStyle/>
-          <a:p>
-            <a:pPr marL="0" indent="0" algn="ctr">
-              <a:lnSpc>
-                <a:spcPct val="110000"/>
-              </a:lnSpc>
-              <a:buNone/>
-            </a:pPr>
-            <a:r>
-              <a:rPr lang="en-US" sz="950" kern="0" spc="-20" dirty="0">
-                <a:solidFill>
-                  <a:srgbClr val="2B2E3C"/>
-                </a:solidFill>
-                <a:latin typeface="Open Sans" pitchFamily="34" charset="0"/>
-                <a:ea typeface="Open Sans" pitchFamily="34" charset="-122"/>
-                <a:cs typeface="Open Sans" pitchFamily="34" charset="-120"/>
-              </a:rPr>
-              <a:t>In tempo reale, con espandibilità dinamica</a:t>
-            </a:r>
-            <a:endParaRPr lang="en-US" sz="950" dirty="0"/>
-          </a:p>
-        </p:txBody>
-      </p:sp>
-      <p:sp>
-        <p:nvSpPr>
-          <p:cNvPr id="9" name="Text 6"/>
-          <p:cNvSpPr/>
-          <p:nvPr/>
-        </p:nvSpPr>
-        <p:spPr>
-          <a:xfrm>
-            <a:off x="661475" y="2964855"/>
-            <a:ext cx="6296860" cy="409377"/>
-          </a:xfrm>
-          <a:prstGeom prst="rect">
-            <a:avLst/>
-          </a:prstGeom>
-          <a:noFill/>
-          <a:ln/>
-        </p:spPr>
-        <p:txBody>
-          <a:bodyPr wrap="none" lIns="0" tIns="0" rIns="0" bIns="0" rtlCol="0" anchor="t"/>
-          <a:lstStyle/>
-          <a:p>
-            <a:pPr marL="0" indent="0" algn="ctr">
-              <a:lnSpc>
-                <a:spcPct val="83000"/>
-              </a:lnSpc>
-              <a:buNone/>
-            </a:pPr>
-            <a:r>
-              <a:rPr lang="en-US" sz="3200" kern="0" spc="-97" dirty="0">
-                <a:solidFill>
-                  <a:srgbClr val="2B2E3C"/>
-                </a:solidFill>
-                <a:latin typeface="Bitter Medium" pitchFamily="34" charset="0"/>
-                <a:ea typeface="Bitter Medium" pitchFamily="34" charset="-122"/>
-                <a:cs typeface="Bitter Medium" pitchFamily="34" charset="-120"/>
-              </a:rPr>
-              <a:t>3</a:t>
-            </a:r>
-            <a:endParaRPr lang="en-US" sz="3200" dirty="0"/>
-          </a:p>
-        </p:txBody>
-      </p:sp>
-      <p:sp>
-        <p:nvSpPr>
-          <p:cNvPr id="10" name="Text 7"/>
-          <p:cNvSpPr/>
-          <p:nvPr/>
-        </p:nvSpPr>
-        <p:spPr>
-          <a:xfrm>
-            <a:off x="661475" y="3497263"/>
-            <a:ext cx="6296860" cy="193774"/>
-          </a:xfrm>
-          <a:prstGeom prst="rect">
-            <a:avLst/>
-          </a:prstGeom>
-          <a:noFill/>
-          <a:ln/>
-        </p:spPr>
-        <p:txBody>
-          <a:bodyPr wrap="none" lIns="0" tIns="0" rIns="0" bIns="0" rtlCol="0" anchor="t"/>
-          <a:lstStyle/>
-          <a:p>
-            <a:pPr marL="0" indent="0" algn="ctr">
-              <a:lnSpc>
-                <a:spcPct val="104000"/>
-              </a:lnSpc>
-              <a:buNone/>
-            </a:pPr>
-            <a:r>
-              <a:rPr lang="en-US" sz="1200" kern="0" spc="-37" dirty="0">
-                <a:solidFill>
-                  <a:srgbClr val="2B2E3C"/>
-                </a:solidFill>
-                <a:latin typeface="Bitter Medium" pitchFamily="34" charset="0"/>
-                <a:ea typeface="Bitter Medium" pitchFamily="34" charset="-122"/>
-                <a:cs typeface="Bitter Medium" pitchFamily="34" charset="-120"/>
-              </a:rPr>
-              <a:t>Parametri fisici</a:t>
-            </a:r>
-            <a:endParaRPr lang="en-US" sz="1200" dirty="0"/>
-          </a:p>
-        </p:txBody>
-      </p:sp>
-      <p:sp>
-        <p:nvSpPr>
-          <p:cNvPr id="11" name="Text 8"/>
-          <p:cNvSpPr/>
-          <p:nvPr/>
-        </p:nvSpPr>
-        <p:spPr>
-          <a:xfrm>
-            <a:off x="661475" y="3739852"/>
-            <a:ext cx="6296860" cy="164306"/>
-          </a:xfrm>
-          <a:prstGeom prst="rect">
-            <a:avLst/>
-          </a:prstGeom>
-          <a:noFill/>
-          <a:ln/>
-        </p:spPr>
-        <p:txBody>
-          <a:bodyPr wrap="none" lIns="0" tIns="0" rIns="0" bIns="0" rtlCol="0" anchor="t"/>
-          <a:lstStyle/>
-          <a:p>
-            <a:pPr marL="0" indent="0" algn="ctr">
-              <a:lnSpc>
-                <a:spcPct val="110000"/>
-              </a:lnSpc>
-              <a:buNone/>
-            </a:pPr>
-            <a:r>
-              <a:rPr lang="en-US" sz="950" kern="0" spc="-20" dirty="0">
-                <a:solidFill>
-                  <a:srgbClr val="2B2E3C"/>
-                </a:solidFill>
-                <a:latin typeface="Open Sans" pitchFamily="34" charset="0"/>
-                <a:ea typeface="Open Sans" pitchFamily="34" charset="-122"/>
-                <a:cs typeface="Open Sans" pitchFamily="34" charset="-120"/>
-              </a:rPr>
-              <a:t>Temperatura, umidità e rumore integrati</a:t>
-            </a:r>
-            <a:endParaRPr lang="en-US" sz="950" dirty="0"/>
-          </a:p>
-        </p:txBody>
-      </p:sp>
-      <p:sp>
-        <p:nvSpPr>
-          <p:cNvPr id="12" name="Text 9"/>
-          <p:cNvSpPr/>
-          <p:nvPr/>
-        </p:nvSpPr>
-        <p:spPr>
-          <a:xfrm>
-            <a:off x="661475" y="4128889"/>
-            <a:ext cx="6296860" cy="409377"/>
-          </a:xfrm>
-          <a:prstGeom prst="rect">
-            <a:avLst/>
-          </a:prstGeom>
-          <a:noFill/>
-          <a:ln/>
-        </p:spPr>
-        <p:txBody>
-          <a:bodyPr wrap="none" lIns="0" tIns="0" rIns="0" bIns="0" rtlCol="0" anchor="t"/>
-          <a:lstStyle/>
-          <a:p>
-            <a:pPr marL="0" indent="0" algn="ctr">
-              <a:lnSpc>
-                <a:spcPct val="83000"/>
-              </a:lnSpc>
-              <a:buNone/>
-            </a:pPr>
-            <a:r>
-              <a:rPr lang="en-US" sz="3200" kern="0" spc="-97" dirty="0">
-                <a:solidFill>
-                  <a:srgbClr val="2B2E3C"/>
-                </a:solidFill>
-                <a:latin typeface="Bitter Medium" pitchFamily="34" charset="0"/>
-                <a:ea typeface="Bitter Medium" pitchFamily="34" charset="-122"/>
-                <a:cs typeface="Bitter Medium" pitchFamily="34" charset="-120"/>
-              </a:rPr>
-              <a:t>15</a:t>
-            </a:r>
-            <a:endParaRPr lang="en-US" sz="3200" dirty="0"/>
-          </a:p>
-        </p:txBody>
-      </p:sp>
-      <p:sp>
-        <p:nvSpPr>
-          <p:cNvPr id="13" name="Text 10"/>
-          <p:cNvSpPr/>
-          <p:nvPr/>
-        </p:nvSpPr>
-        <p:spPr>
-          <a:xfrm>
-            <a:off x="661475" y="4661297"/>
-            <a:ext cx="6296860" cy="193774"/>
-          </a:xfrm>
-          <a:prstGeom prst="rect">
-            <a:avLst/>
-          </a:prstGeom>
-          <a:noFill/>
-          <a:ln/>
-        </p:spPr>
-        <p:txBody>
-          <a:bodyPr wrap="none" lIns="0" tIns="0" rIns="0" bIns="0" rtlCol="0" anchor="t"/>
-          <a:lstStyle/>
-          <a:p>
-            <a:pPr marL="0" indent="0" algn="ctr">
-              <a:lnSpc>
-                <a:spcPct val="104000"/>
-              </a:lnSpc>
-              <a:buNone/>
-            </a:pPr>
-            <a:r>
-              <a:rPr lang="en-US" sz="1200" kern="0" spc="-37" dirty="0">
-                <a:solidFill>
-                  <a:srgbClr val="2B2E3C"/>
-                </a:solidFill>
-                <a:latin typeface="Bitter Medium" pitchFamily="34" charset="0"/>
-                <a:ea typeface="Bitter Medium" pitchFamily="34" charset="-122"/>
-                <a:cs typeface="Bitter Medium" pitchFamily="34" charset="-120"/>
-              </a:rPr>
-              <a:t>Minuti di anticipo</a:t>
-            </a:r>
-            <a:endParaRPr lang="en-US" sz="1200" dirty="0"/>
-          </a:p>
-        </p:txBody>
-      </p:sp>
-      <p:sp>
-        <p:nvSpPr>
-          <p:cNvPr id="14" name="Text 11"/>
-          <p:cNvSpPr/>
-          <p:nvPr/>
-        </p:nvSpPr>
-        <p:spPr>
-          <a:xfrm>
-            <a:off x="661475" y="4903887"/>
-            <a:ext cx="6296860" cy="164306"/>
-          </a:xfrm>
-          <a:prstGeom prst="rect">
-            <a:avLst/>
-          </a:prstGeom>
-          <a:noFill/>
-          <a:ln/>
-        </p:spPr>
-        <p:txBody>
-          <a:bodyPr wrap="none" lIns="0" tIns="0" rIns="0" bIns="0" rtlCol="0" anchor="t"/>
-          <a:lstStyle/>
-          <a:p>
-            <a:pPr marL="0" indent="0" algn="ctr">
-              <a:lnSpc>
-                <a:spcPct val="110000"/>
-              </a:lnSpc>
-              <a:buNone/>
-            </a:pPr>
-            <a:r>
-              <a:rPr lang="en-US" sz="950" kern="0" spc="-20" dirty="0">
-                <a:solidFill>
-                  <a:srgbClr val="2B2E3C"/>
-                </a:solidFill>
-                <a:latin typeface="Open Sans" pitchFamily="34" charset="0"/>
-                <a:ea typeface="Open Sans" pitchFamily="34" charset="-122"/>
-                <a:cs typeface="Open Sans" pitchFamily="34" charset="-120"/>
-              </a:rPr>
-              <a:t>Il modello ML predice lo score futuro</a:t>
-            </a:r>
-            <a:endParaRPr lang="en-US" sz="950" dirty="0"/>
-          </a:p>
-        </p:txBody>
-      </p:sp>
-      <p:sp>
-        <p:nvSpPr>
-          <p:cNvPr id="15" name="Text 12"/>
-          <p:cNvSpPr/>
-          <p:nvPr/>
-        </p:nvSpPr>
-        <p:spPr>
-          <a:xfrm>
-            <a:off x="661475" y="5292923"/>
-            <a:ext cx="6296860" cy="409377"/>
-          </a:xfrm>
-          <a:prstGeom prst="rect">
-            <a:avLst/>
-          </a:prstGeom>
-          <a:noFill/>
-          <a:ln/>
-        </p:spPr>
-        <p:txBody>
-          <a:bodyPr wrap="none" lIns="0" tIns="0" rIns="0" bIns="0" rtlCol="0" anchor="t"/>
-          <a:lstStyle/>
-          <a:p>
-            <a:pPr marL="0" indent="0" algn="ctr">
-              <a:lnSpc>
-                <a:spcPct val="83000"/>
-              </a:lnSpc>
-              <a:buNone/>
-            </a:pPr>
-            <a:r>
-              <a:rPr lang="en-US" sz="3200" kern="0" spc="-97" dirty="0">
-                <a:solidFill>
-                  <a:srgbClr val="2B2E3C"/>
-                </a:solidFill>
-                <a:latin typeface="Bitter Medium" pitchFamily="34" charset="0"/>
-                <a:ea typeface="Bitter Medium" pitchFamily="34" charset="-122"/>
-                <a:cs typeface="Bitter Medium" pitchFamily="34" charset="-120"/>
-              </a:rPr>
-              <a:t>4</a:t>
-            </a:r>
-            <a:endParaRPr lang="en-US" sz="3200" dirty="0"/>
-          </a:p>
-        </p:txBody>
-      </p:sp>
-      <p:sp>
-        <p:nvSpPr>
-          <p:cNvPr id="16" name="Text 13"/>
-          <p:cNvSpPr/>
-          <p:nvPr/>
-        </p:nvSpPr>
-        <p:spPr>
-          <a:xfrm>
-            <a:off x="661475" y="5825331"/>
-            <a:ext cx="6296860" cy="193774"/>
-          </a:xfrm>
-          <a:prstGeom prst="rect">
-            <a:avLst/>
-          </a:prstGeom>
-          <a:noFill/>
-          <a:ln/>
-        </p:spPr>
-        <p:txBody>
-          <a:bodyPr wrap="none" lIns="0" tIns="0" rIns="0" bIns="0" rtlCol="0" anchor="t"/>
-          <a:lstStyle/>
-          <a:p>
-            <a:pPr marL="0" indent="0" algn="ctr">
-              <a:lnSpc>
-                <a:spcPct val="104000"/>
-              </a:lnSpc>
-              <a:buNone/>
-            </a:pPr>
-            <a:r>
-              <a:rPr lang="en-US" sz="1200" kern="0" spc="-37" dirty="0">
-                <a:solidFill>
-                  <a:srgbClr val="2B2E3C"/>
-                </a:solidFill>
-                <a:latin typeface="Bitter Medium" pitchFamily="34" charset="0"/>
-                <a:ea typeface="Bitter Medium" pitchFamily="34" charset="-122"/>
-                <a:cs typeface="Bitter Medium" pitchFamily="34" charset="-120"/>
-              </a:rPr>
-              <a:t>Classi di score</a:t>
-            </a:r>
-            <a:endParaRPr lang="en-US" sz="1200" dirty="0"/>
-          </a:p>
-        </p:txBody>
-      </p:sp>
-      <p:sp>
-        <p:nvSpPr>
-          <p:cNvPr id="17" name="Text 14"/>
-          <p:cNvSpPr/>
-          <p:nvPr/>
-        </p:nvSpPr>
-        <p:spPr>
-          <a:xfrm>
-            <a:off x="661475" y="6067921"/>
-            <a:ext cx="6296860" cy="164306"/>
-          </a:xfrm>
-          <a:prstGeom prst="rect">
-            <a:avLst/>
-          </a:prstGeom>
-          <a:noFill/>
-          <a:ln/>
-        </p:spPr>
-        <p:txBody>
-          <a:bodyPr wrap="none" lIns="0" tIns="0" rIns="0" bIns="0" rtlCol="0" anchor="t"/>
-          <a:lstStyle/>
-          <a:p>
-            <a:pPr marL="0" indent="0" algn="ctr">
-              <a:lnSpc>
-                <a:spcPct val="110000"/>
-              </a:lnSpc>
-              <a:buNone/>
-            </a:pPr>
-            <a:r>
-              <a:rPr lang="en-US" sz="950" kern="0" spc="-20" dirty="0">
-                <a:solidFill>
-                  <a:srgbClr val="2B2E3C"/>
-                </a:solidFill>
-                <a:latin typeface="Open Sans" pitchFamily="34" charset="0"/>
-                <a:ea typeface="Open Sans" pitchFamily="34" charset="-122"/>
-                <a:cs typeface="Open Sans" pitchFamily="34" charset="-120"/>
-              </a:rPr>
-              <a:t>Da "Consigliata" a "Sconsigliata"</a:t>
-            </a:r>
-            <a:endParaRPr lang="en-US" sz="950" dirty="0"/>
-          </a:p>
-        </p:txBody>
-      </p:sp>
-    </p:spTree>
-  </p:cSld>
-  <p:clrMapOvr>
-    <a:masterClrMapping/>
-  </p:clrMapOvr>
-</p:sld>
-</file>
-
-<file path=ppt/slides/slide3.xml><?xml version="1.0" encoding="utf-8"?>
-<p:sld xmlns:a="http://schemas.openxmlformats.org/drawingml/2006/main" xmlns:r="http://schemas.openxmlformats.org/officeDocument/2006/relationships" xmlns:p="http://schemas.openxmlformats.org/presentationml/2006/main">
   <p:cSld name="Slide 3">
     <p:spTree>
       <p:nvGrpSpPr>
@@ -3448,6 +2726,728 @@
           <a:p>
             <a:pPr algn="ctr"/>
             <a:endParaRPr lang="it-IT"/>
+          </a:p>
+        </p:txBody>
+      </p:sp>
+    </p:spTree>
+  </p:cSld>
+  <p:clrMapOvr>
+    <a:masterClrMapping/>
+  </p:clrMapOvr>
+</p:sld>
+</file>
+
+<file path=ppt/slides/slide3.xml><?xml version="1.0" encoding="utf-8"?>
+<p:sld xmlns:a="http://schemas.openxmlformats.org/drawingml/2006/main" xmlns:r="http://schemas.openxmlformats.org/officeDocument/2006/relationships" xmlns:p="http://schemas.openxmlformats.org/presentationml/2006/main">
+  <p:cSld name="Slide 2">
+    <p:spTree>
+      <p:nvGrpSpPr>
+        <p:cNvPr id="1" name=""/>
+        <p:cNvGrpSpPr/>
+        <p:nvPr/>
+      </p:nvGrpSpPr>
+      <p:grpSpPr>
+        <a:xfrm>
+          <a:off x="0" y="0"/>
+          <a:ext cx="0" cy="0"/>
+          <a:chOff x="0" y="0"/>
+          <a:chExt cx="0" cy="0"/>
+        </a:xfrm>
+      </p:grpSpPr>
+      <p:sp>
+        <p:nvSpPr>
+          <p:cNvPr id="19" name="Rettangolo 18">
+            <a:extLst>
+              <a:ext uri="{FF2B5EF4-FFF2-40B4-BE49-F238E27FC236}">
+                <a16:creationId xmlns:a16="http://schemas.microsoft.com/office/drawing/2014/main" id="{5D9E0580-5A25-1B80-A47A-D7D6D0331EE0}"/>
+              </a:ext>
+            </a:extLst>
+          </p:cNvPr>
+          <p:cNvSpPr/>
+          <p:nvPr/>
+        </p:nvSpPr>
+        <p:spPr>
+          <a:xfrm>
+            <a:off x="10961052" y="6559422"/>
+            <a:ext cx="1138335" cy="223934"/>
+          </a:xfrm>
+          <a:prstGeom prst="rect">
+            <a:avLst/>
+          </a:prstGeom>
+          <a:solidFill>
+            <a:srgbClr val="FFF8F0"/>
+          </a:solidFill>
+          <a:ln>
+            <a:solidFill>
+              <a:srgbClr val="FFF8F0"/>
+            </a:solidFill>
+          </a:ln>
+        </p:spPr>
+        <p:style>
+          <a:lnRef idx="2">
+            <a:schemeClr val="accent1">
+              <a:shade val="15000"/>
+            </a:schemeClr>
+          </a:lnRef>
+          <a:fillRef idx="1">
+            <a:schemeClr val="accent1"/>
+          </a:fillRef>
+          <a:effectRef idx="0">
+            <a:schemeClr val="accent1"/>
+          </a:effectRef>
+          <a:fontRef idx="minor">
+            <a:schemeClr val="lt1"/>
+          </a:fontRef>
+        </p:style>
+        <p:txBody>
+          <a:bodyPr rtlCol="0" anchor="ctr"/>
+          <a:lstStyle/>
+          <a:p>
+            <a:pPr algn="ctr"/>
+            <a:endParaRPr lang="it-IT"/>
+          </a:p>
+        </p:txBody>
+      </p:sp>
+      <p:pic>
+        <p:nvPicPr>
+          <p:cNvPr id="2" name="Image 0" descr="preencoded.png"/>
+          <p:cNvPicPr>
+            <a:picLocks noChangeAspect="1"/>
+          </p:cNvPicPr>
+          <p:nvPr/>
+        </p:nvPicPr>
+        <p:blipFill>
+          <a:blip r:embed="rId3"/>
+          <a:stretch>
+            <a:fillRect/>
+          </a:stretch>
+        </p:blipFill>
+        <p:spPr>
+          <a:xfrm>
+            <a:off x="7620114" y="0"/>
+            <a:ext cx="4571886" cy="6858000"/>
+          </a:xfrm>
+          <a:prstGeom prst="rect">
+            <a:avLst/>
+          </a:prstGeom>
+        </p:spPr>
+      </p:pic>
+      <p:sp>
+        <p:nvSpPr>
+          <p:cNvPr id="3" name="Text 0"/>
+          <p:cNvSpPr/>
+          <p:nvPr/>
+        </p:nvSpPr>
+        <p:spPr>
+          <a:xfrm>
+            <a:off x="661475" y="461200"/>
+            <a:ext cx="6296860" cy="387648"/>
+          </a:xfrm>
+          <a:prstGeom prst="rect">
+            <a:avLst/>
+          </a:prstGeom>
+          <a:noFill/>
+          <a:ln/>
+        </p:spPr>
+        <p:txBody>
+          <a:bodyPr wrap="none" lIns="0" tIns="0" rIns="0" bIns="0" rtlCol="0" anchor="t"/>
+          <a:lstStyle/>
+          <a:p>
+            <a:pPr marL="0" indent="0" algn="l">
+              <a:lnSpc>
+                <a:spcPct val="104000"/>
+              </a:lnSpc>
+              <a:buNone/>
+            </a:pPr>
+            <a:r>
+              <a:rPr lang="en-US" sz="2400" kern="0" spc="-73" dirty="0">
+                <a:solidFill>
+                  <a:srgbClr val="2C3F42"/>
+                </a:solidFill>
+                <a:latin typeface="Bitter Medium" pitchFamily="34" charset="0"/>
+                <a:ea typeface="Bitter Medium" pitchFamily="34" charset="-122"/>
+                <a:cs typeface="Bitter Medium" pitchFamily="34" charset="-120"/>
+              </a:rPr>
+              <a:t>Un Digital Twin per Ogni Aula</a:t>
+            </a:r>
+            <a:endParaRPr lang="en-US" sz="2400" dirty="0"/>
+          </a:p>
+        </p:txBody>
+      </p:sp>
+      <p:sp>
+        <p:nvSpPr>
+          <p:cNvPr id="4" name="Text 1"/>
+          <p:cNvSpPr/>
+          <p:nvPr/>
+        </p:nvSpPr>
+        <p:spPr>
+          <a:xfrm>
+            <a:off x="847505" y="1037943"/>
+            <a:ext cx="6110830" cy="573782"/>
+          </a:xfrm>
+          <a:prstGeom prst="rect">
+            <a:avLst/>
+          </a:prstGeom>
+          <a:noFill/>
+          <a:ln/>
+        </p:spPr>
+        <p:txBody>
+          <a:bodyPr wrap="square" lIns="0" tIns="0" rIns="0" bIns="0" rtlCol="0" anchor="t">
+            <a:noAutofit/>
+          </a:bodyPr>
+          <a:lstStyle/>
+          <a:p>
+            <a:pPr marL="0" indent="0" algn="l">
+              <a:lnSpc>
+                <a:spcPct val="110000"/>
+              </a:lnSpc>
+              <a:buNone/>
+            </a:pPr>
+            <a:r>
+              <a:rPr lang="en-US" sz="1200" kern="0" spc="-20" dirty="0">
+                <a:solidFill>
+                  <a:srgbClr val="2B2E3C"/>
+                </a:solidFill>
+                <a:latin typeface="Open Sans" pitchFamily="34" charset="0"/>
+                <a:ea typeface="Open Sans" pitchFamily="34" charset="-122"/>
+                <a:cs typeface="Open Sans" pitchFamily="34" charset="-120"/>
+              </a:rPr>
+              <a:t>Smart Study Rooms crea un gemello digitale di ogni aula studio: i nodi IoT raccolgono dati ambientali, il bridge li valida e sincronizza su Firebase, mentre l'app Android mostra lo stato realtime e suggerisce l'aula più adatta.</a:t>
+            </a:r>
+            <a:endParaRPr lang="en-US" sz="1200" dirty="0"/>
+          </a:p>
+        </p:txBody>
+      </p:sp>
+      <p:sp>
+        <p:nvSpPr>
+          <p:cNvPr id="5" name="Shape 2"/>
+          <p:cNvSpPr/>
+          <p:nvPr/>
+        </p:nvSpPr>
+        <p:spPr>
+          <a:xfrm>
+            <a:off x="661475" y="1068949"/>
+            <a:ext cx="12700" cy="511770"/>
+          </a:xfrm>
+          <a:prstGeom prst="roundRect">
+            <a:avLst>
+              <a:gd name="adj" fmla="val 49999"/>
+            </a:avLst>
+          </a:prstGeom>
+          <a:solidFill>
+            <a:srgbClr val="D2600F"/>
+          </a:solidFill>
+          <a:ln/>
+        </p:spPr>
+        <p:txBody>
+          <a:bodyPr/>
+          <a:lstStyle/>
+          <a:p>
+            <a:endParaRPr lang="it-IT"/>
+          </a:p>
+        </p:txBody>
+      </p:sp>
+      <p:sp>
+        <p:nvSpPr>
+          <p:cNvPr id="6" name="Text 3"/>
+          <p:cNvSpPr/>
+          <p:nvPr/>
+        </p:nvSpPr>
+        <p:spPr>
+          <a:xfrm>
+            <a:off x="661475" y="1800820"/>
+            <a:ext cx="6296860" cy="409377"/>
+          </a:xfrm>
+          <a:prstGeom prst="rect">
+            <a:avLst/>
+          </a:prstGeom>
+          <a:noFill/>
+          <a:ln/>
+        </p:spPr>
+        <p:txBody>
+          <a:bodyPr wrap="none" lIns="0" tIns="0" rIns="0" bIns="0" rtlCol="0" anchor="t"/>
+          <a:lstStyle/>
+          <a:p>
+            <a:pPr marL="0" indent="0" algn="ctr">
+              <a:lnSpc>
+                <a:spcPct val="83000"/>
+              </a:lnSpc>
+              <a:buNone/>
+            </a:pPr>
+            <a:r>
+              <a:rPr lang="en-US" sz="3200" kern="0" spc="-97" dirty="0">
+                <a:solidFill>
+                  <a:srgbClr val="2B2E3C"/>
+                </a:solidFill>
+                <a:latin typeface="Bitter Medium" pitchFamily="34" charset="0"/>
+                <a:ea typeface="Bitter Medium" pitchFamily="34" charset="-122"/>
+                <a:cs typeface="Bitter Medium" pitchFamily="34" charset="-120"/>
+              </a:rPr>
+              <a:t>2</a:t>
+            </a:r>
+            <a:endParaRPr lang="en-US" sz="3200" dirty="0"/>
+          </a:p>
+        </p:txBody>
+      </p:sp>
+      <p:sp>
+        <p:nvSpPr>
+          <p:cNvPr id="7" name="Text 4"/>
+          <p:cNvSpPr/>
+          <p:nvPr/>
+        </p:nvSpPr>
+        <p:spPr>
+          <a:xfrm>
+            <a:off x="661475" y="2333228"/>
+            <a:ext cx="6296860" cy="193774"/>
+          </a:xfrm>
+          <a:prstGeom prst="rect">
+            <a:avLst/>
+          </a:prstGeom>
+          <a:noFill/>
+          <a:ln/>
+        </p:spPr>
+        <p:txBody>
+          <a:bodyPr wrap="none" lIns="0" tIns="0" rIns="0" bIns="0" rtlCol="0" anchor="t"/>
+          <a:lstStyle/>
+          <a:p>
+            <a:pPr marL="0" indent="0" algn="ctr">
+              <a:lnSpc>
+                <a:spcPct val="104000"/>
+              </a:lnSpc>
+              <a:buNone/>
+            </a:pPr>
+            <a:r>
+              <a:rPr lang="en-US" sz="1200" kern="0" spc="-37" dirty="0">
+                <a:solidFill>
+                  <a:srgbClr val="2B2E3C"/>
+                </a:solidFill>
+                <a:latin typeface="Bitter Medium" pitchFamily="34" charset="0"/>
+                <a:ea typeface="Bitter Medium" pitchFamily="34" charset="-122"/>
+                <a:cs typeface="Bitter Medium" pitchFamily="34" charset="-120"/>
+              </a:rPr>
+              <a:t>Aule monitorate</a:t>
+            </a:r>
+            <a:endParaRPr lang="en-US" sz="1200" dirty="0"/>
+          </a:p>
+        </p:txBody>
+      </p:sp>
+      <p:sp>
+        <p:nvSpPr>
+          <p:cNvPr id="8" name="Text 5"/>
+          <p:cNvSpPr/>
+          <p:nvPr/>
+        </p:nvSpPr>
+        <p:spPr>
+          <a:xfrm>
+            <a:off x="661475" y="2575818"/>
+            <a:ext cx="6296860" cy="164306"/>
+          </a:xfrm>
+          <a:prstGeom prst="rect">
+            <a:avLst/>
+          </a:prstGeom>
+          <a:noFill/>
+          <a:ln/>
+        </p:spPr>
+        <p:txBody>
+          <a:bodyPr wrap="none" lIns="0" tIns="0" rIns="0" bIns="0" rtlCol="0" anchor="t"/>
+          <a:lstStyle/>
+          <a:p>
+            <a:pPr marL="0" indent="0" algn="ctr">
+              <a:lnSpc>
+                <a:spcPct val="110000"/>
+              </a:lnSpc>
+              <a:buNone/>
+            </a:pPr>
+            <a:r>
+              <a:rPr lang="en-US" sz="950" kern="0" spc="-20" dirty="0">
+                <a:solidFill>
+                  <a:srgbClr val="2B2E3C"/>
+                </a:solidFill>
+                <a:latin typeface="Open Sans" pitchFamily="34" charset="0"/>
+                <a:ea typeface="Open Sans" pitchFamily="34" charset="-122"/>
+                <a:cs typeface="Open Sans" pitchFamily="34" charset="-120"/>
+              </a:rPr>
+              <a:t>In tempo reale, con espandibilità dinamica</a:t>
+            </a:r>
+            <a:endParaRPr lang="en-US" sz="950" dirty="0"/>
+          </a:p>
+        </p:txBody>
+      </p:sp>
+      <p:sp>
+        <p:nvSpPr>
+          <p:cNvPr id="9" name="Text 6"/>
+          <p:cNvSpPr/>
+          <p:nvPr/>
+        </p:nvSpPr>
+        <p:spPr>
+          <a:xfrm>
+            <a:off x="661475" y="2964855"/>
+            <a:ext cx="6296860" cy="409377"/>
+          </a:xfrm>
+          <a:prstGeom prst="rect">
+            <a:avLst/>
+          </a:prstGeom>
+          <a:noFill/>
+          <a:ln/>
+        </p:spPr>
+        <p:txBody>
+          <a:bodyPr wrap="none" lIns="0" tIns="0" rIns="0" bIns="0" rtlCol="0" anchor="t"/>
+          <a:lstStyle/>
+          <a:p>
+            <a:pPr marL="0" indent="0" algn="ctr">
+              <a:lnSpc>
+                <a:spcPct val="83000"/>
+              </a:lnSpc>
+              <a:buNone/>
+            </a:pPr>
+            <a:r>
+              <a:rPr lang="en-US" sz="3200" kern="0" spc="-97" dirty="0">
+                <a:solidFill>
+                  <a:srgbClr val="2B2E3C"/>
+                </a:solidFill>
+                <a:latin typeface="Bitter Medium" pitchFamily="34" charset="0"/>
+                <a:ea typeface="Bitter Medium" pitchFamily="34" charset="-122"/>
+                <a:cs typeface="Bitter Medium" pitchFamily="34" charset="-120"/>
+              </a:rPr>
+              <a:t>3</a:t>
+            </a:r>
+            <a:endParaRPr lang="en-US" sz="3200" dirty="0"/>
+          </a:p>
+        </p:txBody>
+      </p:sp>
+      <p:sp>
+        <p:nvSpPr>
+          <p:cNvPr id="10" name="Text 7"/>
+          <p:cNvSpPr/>
+          <p:nvPr/>
+        </p:nvSpPr>
+        <p:spPr>
+          <a:xfrm>
+            <a:off x="661475" y="3497263"/>
+            <a:ext cx="6296860" cy="193774"/>
+          </a:xfrm>
+          <a:prstGeom prst="rect">
+            <a:avLst/>
+          </a:prstGeom>
+          <a:noFill/>
+          <a:ln/>
+        </p:spPr>
+        <p:txBody>
+          <a:bodyPr wrap="none" lIns="0" tIns="0" rIns="0" bIns="0" rtlCol="0" anchor="t"/>
+          <a:lstStyle/>
+          <a:p>
+            <a:pPr marL="0" indent="0" algn="ctr">
+              <a:lnSpc>
+                <a:spcPct val="104000"/>
+              </a:lnSpc>
+              <a:buNone/>
+            </a:pPr>
+            <a:r>
+              <a:rPr lang="en-US" sz="1200" kern="0" spc="-37" dirty="0">
+                <a:solidFill>
+                  <a:srgbClr val="2B2E3C"/>
+                </a:solidFill>
+                <a:latin typeface="Bitter Medium" pitchFamily="34" charset="0"/>
+                <a:ea typeface="Bitter Medium" pitchFamily="34" charset="-122"/>
+                <a:cs typeface="Bitter Medium" pitchFamily="34" charset="-120"/>
+              </a:rPr>
+              <a:t>Parametri fisici</a:t>
+            </a:r>
+            <a:endParaRPr lang="en-US" sz="1200" dirty="0"/>
+          </a:p>
+        </p:txBody>
+      </p:sp>
+      <p:sp>
+        <p:nvSpPr>
+          <p:cNvPr id="11" name="Text 8"/>
+          <p:cNvSpPr/>
+          <p:nvPr/>
+        </p:nvSpPr>
+        <p:spPr>
+          <a:xfrm>
+            <a:off x="661475" y="3739852"/>
+            <a:ext cx="6296860" cy="164306"/>
+          </a:xfrm>
+          <a:prstGeom prst="rect">
+            <a:avLst/>
+          </a:prstGeom>
+          <a:noFill/>
+          <a:ln/>
+        </p:spPr>
+        <p:txBody>
+          <a:bodyPr wrap="none" lIns="0" tIns="0" rIns="0" bIns="0" rtlCol="0" anchor="t"/>
+          <a:lstStyle/>
+          <a:p>
+            <a:pPr marL="0" indent="0" algn="ctr">
+              <a:lnSpc>
+                <a:spcPct val="110000"/>
+              </a:lnSpc>
+              <a:buNone/>
+            </a:pPr>
+            <a:r>
+              <a:rPr lang="en-US" sz="950" kern="0" spc="-20" dirty="0">
+                <a:solidFill>
+                  <a:srgbClr val="2B2E3C"/>
+                </a:solidFill>
+                <a:latin typeface="Open Sans" pitchFamily="34" charset="0"/>
+                <a:ea typeface="Open Sans" pitchFamily="34" charset="-122"/>
+                <a:cs typeface="Open Sans" pitchFamily="34" charset="-120"/>
+              </a:rPr>
+              <a:t>Temperatura, umidità e rumore integrati</a:t>
+            </a:r>
+            <a:endParaRPr lang="en-US" sz="950" dirty="0"/>
+          </a:p>
+        </p:txBody>
+      </p:sp>
+      <p:sp>
+        <p:nvSpPr>
+          <p:cNvPr id="12" name="Text 9"/>
+          <p:cNvSpPr/>
+          <p:nvPr/>
+        </p:nvSpPr>
+        <p:spPr>
+          <a:xfrm>
+            <a:off x="661475" y="4128889"/>
+            <a:ext cx="6296860" cy="409377"/>
+          </a:xfrm>
+          <a:prstGeom prst="rect">
+            <a:avLst/>
+          </a:prstGeom>
+          <a:noFill/>
+          <a:ln/>
+        </p:spPr>
+        <p:txBody>
+          <a:bodyPr wrap="none" lIns="0" tIns="0" rIns="0" bIns="0" rtlCol="0" anchor="t"/>
+          <a:lstStyle/>
+          <a:p>
+            <a:pPr marL="0" indent="0" algn="ctr">
+              <a:lnSpc>
+                <a:spcPct val="83000"/>
+              </a:lnSpc>
+              <a:buNone/>
+            </a:pPr>
+            <a:r>
+              <a:rPr lang="en-US" sz="3200" kern="0" spc="-97" dirty="0">
+                <a:solidFill>
+                  <a:srgbClr val="2B2E3C"/>
+                </a:solidFill>
+                <a:latin typeface="Bitter Medium" pitchFamily="34" charset="0"/>
+                <a:ea typeface="Bitter Medium" pitchFamily="34" charset="-122"/>
+                <a:cs typeface="Bitter Medium" pitchFamily="34" charset="-120"/>
+              </a:rPr>
+              <a:t>15</a:t>
+            </a:r>
+            <a:endParaRPr lang="en-US" sz="3200" dirty="0"/>
+          </a:p>
+        </p:txBody>
+      </p:sp>
+      <p:sp>
+        <p:nvSpPr>
+          <p:cNvPr id="13" name="Text 10"/>
+          <p:cNvSpPr/>
+          <p:nvPr/>
+        </p:nvSpPr>
+        <p:spPr>
+          <a:xfrm>
+            <a:off x="661475" y="4661297"/>
+            <a:ext cx="6296860" cy="193774"/>
+          </a:xfrm>
+          <a:prstGeom prst="rect">
+            <a:avLst/>
+          </a:prstGeom>
+          <a:noFill/>
+          <a:ln/>
+        </p:spPr>
+        <p:txBody>
+          <a:bodyPr wrap="none" lIns="0" tIns="0" rIns="0" bIns="0" rtlCol="0" anchor="t"/>
+          <a:lstStyle/>
+          <a:p>
+            <a:pPr marL="0" indent="0" algn="ctr">
+              <a:lnSpc>
+                <a:spcPct val="104000"/>
+              </a:lnSpc>
+              <a:buNone/>
+            </a:pPr>
+            <a:r>
+              <a:rPr lang="en-US" sz="1200" kern="0" spc="-37" dirty="0">
+                <a:solidFill>
+                  <a:srgbClr val="2B2E3C"/>
+                </a:solidFill>
+                <a:latin typeface="Bitter Medium" pitchFamily="34" charset="0"/>
+                <a:ea typeface="Bitter Medium" pitchFamily="34" charset="-122"/>
+                <a:cs typeface="Bitter Medium" pitchFamily="34" charset="-120"/>
+              </a:rPr>
+              <a:t>Minuti di anticipo</a:t>
+            </a:r>
+            <a:endParaRPr lang="en-US" sz="1200" dirty="0"/>
+          </a:p>
+        </p:txBody>
+      </p:sp>
+      <p:sp>
+        <p:nvSpPr>
+          <p:cNvPr id="14" name="Text 11"/>
+          <p:cNvSpPr/>
+          <p:nvPr/>
+        </p:nvSpPr>
+        <p:spPr>
+          <a:xfrm>
+            <a:off x="661475" y="4903887"/>
+            <a:ext cx="6296860" cy="164306"/>
+          </a:xfrm>
+          <a:prstGeom prst="rect">
+            <a:avLst/>
+          </a:prstGeom>
+          <a:noFill/>
+          <a:ln/>
+        </p:spPr>
+        <p:txBody>
+          <a:bodyPr wrap="none" lIns="0" tIns="0" rIns="0" bIns="0" rtlCol="0" anchor="t"/>
+          <a:lstStyle/>
+          <a:p>
+            <a:pPr marL="0" indent="0" algn="ctr">
+              <a:lnSpc>
+                <a:spcPct val="110000"/>
+              </a:lnSpc>
+              <a:buNone/>
+            </a:pPr>
+            <a:r>
+              <a:rPr lang="en-US" sz="950" kern="0" spc="-20" dirty="0">
+                <a:solidFill>
+                  <a:srgbClr val="2B2E3C"/>
+                </a:solidFill>
+                <a:latin typeface="Open Sans" pitchFamily="34" charset="0"/>
+                <a:ea typeface="Open Sans" pitchFamily="34" charset="-122"/>
+                <a:cs typeface="Open Sans" pitchFamily="34" charset="-120"/>
+              </a:rPr>
+              <a:t>Il modello ML predice lo score futuro</a:t>
+            </a:r>
+            <a:endParaRPr lang="en-US" sz="950" dirty="0"/>
+          </a:p>
+        </p:txBody>
+      </p:sp>
+      <p:sp>
+        <p:nvSpPr>
+          <p:cNvPr id="15" name="Text 12"/>
+          <p:cNvSpPr/>
+          <p:nvPr/>
+        </p:nvSpPr>
+        <p:spPr>
+          <a:xfrm>
+            <a:off x="661475" y="5292923"/>
+            <a:ext cx="6296860" cy="409377"/>
+          </a:xfrm>
+          <a:prstGeom prst="rect">
+            <a:avLst/>
+          </a:prstGeom>
+          <a:noFill/>
+          <a:ln/>
+        </p:spPr>
+        <p:txBody>
+          <a:bodyPr wrap="none" lIns="0" tIns="0" rIns="0" bIns="0" rtlCol="0" anchor="t"/>
+          <a:lstStyle/>
+          <a:p>
+            <a:pPr marL="0" indent="0" algn="ctr">
+              <a:lnSpc>
+                <a:spcPct val="83000"/>
+              </a:lnSpc>
+              <a:buNone/>
+            </a:pPr>
+            <a:r>
+              <a:rPr lang="en-US" sz="3200" kern="0" spc="-97" dirty="0">
+                <a:solidFill>
+                  <a:srgbClr val="2B2E3C"/>
+                </a:solidFill>
+                <a:latin typeface="Bitter Medium" pitchFamily="34" charset="0"/>
+                <a:ea typeface="Bitter Medium" pitchFamily="34" charset="-122"/>
+                <a:cs typeface="Bitter Medium" pitchFamily="34" charset="-120"/>
+              </a:rPr>
+              <a:t>4</a:t>
+            </a:r>
+            <a:endParaRPr lang="en-US" sz="3200" dirty="0"/>
+          </a:p>
+        </p:txBody>
+      </p:sp>
+      <p:sp>
+        <p:nvSpPr>
+          <p:cNvPr id="16" name="Text 13"/>
+          <p:cNvSpPr/>
+          <p:nvPr/>
+        </p:nvSpPr>
+        <p:spPr>
+          <a:xfrm>
+            <a:off x="661475" y="5825331"/>
+            <a:ext cx="6296860" cy="193774"/>
+          </a:xfrm>
+          <a:prstGeom prst="rect">
+            <a:avLst/>
+          </a:prstGeom>
+          <a:noFill/>
+          <a:ln/>
+        </p:spPr>
+        <p:txBody>
+          <a:bodyPr wrap="none" lIns="0" tIns="0" rIns="0" bIns="0" rtlCol="0" anchor="t"/>
+          <a:lstStyle/>
+          <a:p>
+            <a:pPr marL="0" indent="0" algn="ctr">
+              <a:lnSpc>
+                <a:spcPct val="104000"/>
+              </a:lnSpc>
+              <a:buNone/>
+            </a:pPr>
+            <a:r>
+              <a:rPr lang="en-US" sz="1200" kern="0" spc="-37" dirty="0">
+                <a:solidFill>
+                  <a:srgbClr val="2B2E3C"/>
+                </a:solidFill>
+                <a:latin typeface="Bitter Medium" pitchFamily="34" charset="0"/>
+                <a:ea typeface="Bitter Medium" pitchFamily="34" charset="-122"/>
+                <a:cs typeface="Bitter Medium" pitchFamily="34" charset="-120"/>
+              </a:rPr>
+              <a:t>Classi di score</a:t>
+            </a:r>
+            <a:endParaRPr lang="en-US" sz="1200" dirty="0"/>
+          </a:p>
+        </p:txBody>
+      </p:sp>
+      <p:sp>
+        <p:nvSpPr>
+          <p:cNvPr id="17" name="Text 14"/>
+          <p:cNvSpPr/>
+          <p:nvPr/>
+        </p:nvSpPr>
+        <p:spPr>
+          <a:xfrm>
+            <a:off x="661475" y="6067921"/>
+            <a:ext cx="6296860" cy="164306"/>
+          </a:xfrm>
+          <a:prstGeom prst="rect">
+            <a:avLst/>
+          </a:prstGeom>
+          <a:noFill/>
+          <a:ln/>
+        </p:spPr>
+        <p:txBody>
+          <a:bodyPr wrap="none" lIns="0" tIns="0" rIns="0" bIns="0" rtlCol="0" anchor="t"/>
+          <a:lstStyle/>
+          <a:p>
+            <a:pPr marL="0" indent="0" algn="ctr">
+              <a:lnSpc>
+                <a:spcPct val="110000"/>
+              </a:lnSpc>
+              <a:buNone/>
+            </a:pPr>
+            <a:r>
+              <a:rPr lang="en-US" sz="950" kern="0" spc="-20" dirty="0">
+                <a:solidFill>
+                  <a:srgbClr val="2B2E3C"/>
+                </a:solidFill>
+                <a:latin typeface="Open Sans" pitchFamily="34" charset="0"/>
+                <a:ea typeface="Open Sans" pitchFamily="34" charset="-122"/>
+                <a:cs typeface="Open Sans" pitchFamily="34" charset="-120"/>
+              </a:rPr>
+              <a:t>Da "Consigliata" a "Sconsigliata"</a:t>
+            </a:r>
+            <a:endParaRPr lang="en-US" sz="950" dirty="0"/>
           </a:p>
         </p:txBody>
       </p:sp>
@@ -4040,6 +4040,614 @@
 
 <file path=ppt/slides/slide5.xml><?xml version="1.0" encoding="utf-8"?>
 <p:sld xmlns:a="http://schemas.openxmlformats.org/drawingml/2006/main" xmlns:r="http://schemas.openxmlformats.org/officeDocument/2006/relationships" xmlns:p="http://schemas.openxmlformats.org/presentationml/2006/main">
+  <p:cSld name="Slide 9">
+    <p:spTree>
+      <p:nvGrpSpPr>
+        <p:cNvPr id="1" name=""/>
+        <p:cNvGrpSpPr/>
+        <p:nvPr/>
+      </p:nvGrpSpPr>
+      <p:grpSpPr>
+        <a:xfrm>
+          <a:off x="0" y="0"/>
+          <a:ext cx="0" cy="0"/>
+          <a:chOff x="0" y="0"/>
+          <a:chExt cx="0" cy="0"/>
+        </a:xfrm>
+      </p:grpSpPr>
+      <p:sp>
+        <p:nvSpPr>
+          <p:cNvPr id="2" name="Text 0"/>
+          <p:cNvSpPr/>
+          <p:nvPr/>
+        </p:nvSpPr>
+        <p:spPr>
+          <a:xfrm>
+            <a:off x="661475" y="1213743"/>
+            <a:ext cx="10868745" cy="590649"/>
+          </a:xfrm>
+          <a:prstGeom prst="rect">
+            <a:avLst/>
+          </a:prstGeom>
+          <a:noFill/>
+          <a:ln/>
+        </p:spPr>
+        <p:txBody>
+          <a:bodyPr wrap="none" lIns="0" tIns="0" rIns="0" bIns="0" rtlCol="0" anchor="t"/>
+          <a:lstStyle/>
+          <a:p>
+            <a:pPr marL="0" indent="0" algn="l">
+              <a:lnSpc>
+                <a:spcPct val="104000"/>
+              </a:lnSpc>
+              <a:buNone/>
+            </a:pPr>
+            <a:r>
+              <a:rPr lang="en-US" sz="3700" kern="0" spc="-112" dirty="0">
+                <a:solidFill>
+                  <a:srgbClr val="2C3F42"/>
+                </a:solidFill>
+                <a:latin typeface="Bitter Medium" pitchFamily="34" charset="0"/>
+                <a:ea typeface="Bitter Medium" pitchFamily="34" charset="-122"/>
+                <a:cs typeface="Bitter Medium" pitchFamily="34" charset="-120"/>
+              </a:rPr>
+              <a:t>Roadmap: Cosa Viene Dopo</a:t>
+            </a:r>
+            <a:endParaRPr lang="en-US" sz="3700" dirty="0"/>
+          </a:p>
+        </p:txBody>
+      </p:sp>
+      <p:sp>
+        <p:nvSpPr>
+          <p:cNvPr id="3" name="Text 1"/>
+          <p:cNvSpPr/>
+          <p:nvPr/>
+        </p:nvSpPr>
+        <p:spPr>
+          <a:xfrm>
+            <a:off x="661475" y="1931987"/>
+            <a:ext cx="11478330" cy="302419"/>
+          </a:xfrm>
+          <a:prstGeom prst="rect">
+            <a:avLst/>
+          </a:prstGeom>
+          <a:noFill/>
+          <a:ln/>
+        </p:spPr>
+        <p:txBody>
+          <a:bodyPr wrap="none" lIns="0" tIns="0" rIns="0" bIns="0" rtlCol="0" anchor="t"/>
+          <a:lstStyle/>
+          <a:p>
+            <a:pPr marL="0" indent="0" algn="l">
+              <a:lnSpc>
+                <a:spcPct val="133000"/>
+              </a:lnSpc>
+              <a:buNone/>
+            </a:pPr>
+            <a:r>
+              <a:rPr lang="en-US" sz="1450" kern="0" spc="-30" dirty="0">
+                <a:solidFill>
+                  <a:srgbClr val="2B2E3C"/>
+                </a:solidFill>
+                <a:latin typeface="Open Sans" pitchFamily="34" charset="0"/>
+                <a:ea typeface="Open Sans" pitchFamily="34" charset="-122"/>
+                <a:cs typeface="Open Sans" pitchFamily="34" charset="-120"/>
+              </a:rPr>
+              <a:t>Smart Study Rooms è già un buon prototipo e ha tutte le carte in regola per diventare un prodotto completo.</a:t>
+            </a:r>
+            <a:endParaRPr lang="en-US" sz="1450" dirty="0"/>
+          </a:p>
+        </p:txBody>
+      </p:sp>
+      <p:pic>
+        <p:nvPicPr>
+          <p:cNvPr id="4" name="Image 0" descr="preencoded.png"/>
+          <p:cNvPicPr>
+            <a:picLocks noChangeAspect="1"/>
+          </p:cNvPicPr>
+          <p:nvPr/>
+        </p:nvPicPr>
+        <p:blipFill>
+          <a:blip r:embed="rId3"/>
+          <a:stretch>
+            <a:fillRect/>
+          </a:stretch>
+        </p:blipFill>
+        <p:spPr>
+          <a:xfrm>
+            <a:off x="661475" y="2697460"/>
+            <a:ext cx="1117572" cy="690662"/>
+          </a:xfrm>
+          <a:prstGeom prst="rect">
+            <a:avLst/>
+          </a:prstGeom>
+        </p:spPr>
+      </p:pic>
+      <p:sp>
+        <p:nvSpPr>
+          <p:cNvPr id="5" name="Text 2"/>
+          <p:cNvSpPr/>
+          <p:nvPr/>
+        </p:nvSpPr>
+        <p:spPr>
+          <a:xfrm>
+            <a:off x="661475" y="3624362"/>
+            <a:ext cx="2539936" cy="295275"/>
+          </a:xfrm>
+          <a:prstGeom prst="rect">
+            <a:avLst/>
+          </a:prstGeom>
+          <a:noFill/>
+          <a:ln/>
+        </p:spPr>
+        <p:txBody>
+          <a:bodyPr wrap="none" lIns="0" tIns="0" rIns="0" bIns="0" rtlCol="0" anchor="t"/>
+          <a:lstStyle/>
+          <a:p>
+            <a:pPr marL="0" indent="0" algn="l">
+              <a:lnSpc>
+                <a:spcPct val="104000"/>
+              </a:lnSpc>
+              <a:buNone/>
+            </a:pPr>
+            <a:r>
+              <a:rPr lang="en-US" sz="1850" kern="0" spc="-56" dirty="0">
+                <a:solidFill>
+                  <a:srgbClr val="2B2E3C"/>
+                </a:solidFill>
+                <a:latin typeface="Bitter Medium" pitchFamily="34" charset="0"/>
+                <a:ea typeface="Bitter Medium" pitchFamily="34" charset="-122"/>
+                <a:cs typeface="Bitter Medium" pitchFamily="34" charset="-120"/>
+              </a:rPr>
+              <a:t>Gateway Dedicato</a:t>
+            </a:r>
+            <a:endParaRPr lang="en-US" sz="1850" dirty="0"/>
+          </a:p>
+        </p:txBody>
+      </p:sp>
+      <p:sp>
+        <p:nvSpPr>
+          <p:cNvPr id="6" name="Text 3"/>
+          <p:cNvSpPr/>
+          <p:nvPr/>
+        </p:nvSpPr>
+        <p:spPr>
+          <a:xfrm>
+            <a:off x="661475" y="4033044"/>
+            <a:ext cx="2539936" cy="907256"/>
+          </a:xfrm>
+          <a:prstGeom prst="rect">
+            <a:avLst/>
+          </a:prstGeom>
+          <a:noFill/>
+          <a:ln/>
+        </p:spPr>
+        <p:txBody>
+          <a:bodyPr wrap="square" lIns="0" tIns="0" rIns="0" bIns="0" rtlCol="0" anchor="t">
+            <a:normAutofit/>
+          </a:bodyPr>
+          <a:lstStyle/>
+          <a:p>
+            <a:pPr marL="0" indent="0" algn="l">
+              <a:lnSpc>
+                <a:spcPct val="133000"/>
+              </a:lnSpc>
+              <a:buNone/>
+            </a:pPr>
+            <a:r>
+              <a:rPr lang="en-US" sz="1450" kern="0" spc="-30" dirty="0">
+                <a:solidFill>
+                  <a:srgbClr val="2B2E3C"/>
+                </a:solidFill>
+                <a:latin typeface="Open Sans" pitchFamily="34" charset="0"/>
+                <a:ea typeface="Open Sans" pitchFamily="34" charset="-122"/>
+                <a:cs typeface="Open Sans" pitchFamily="34" charset="-120"/>
+              </a:rPr>
+              <a:t>Bridge su Raspberry Pi sempre acceso, indipendente dal PC</a:t>
+            </a:r>
+            <a:endParaRPr lang="en-US" sz="1450" dirty="0"/>
+          </a:p>
+        </p:txBody>
+      </p:sp>
+      <p:pic>
+        <p:nvPicPr>
+          <p:cNvPr id="7" name="Image 1" descr="preencoded.png"/>
+          <p:cNvPicPr>
+            <a:picLocks noChangeAspect="1"/>
+          </p:cNvPicPr>
+          <p:nvPr/>
+        </p:nvPicPr>
+        <p:blipFill>
+          <a:blip r:embed="rId4"/>
+          <a:stretch>
+            <a:fillRect/>
+          </a:stretch>
+        </p:blipFill>
+        <p:spPr>
+          <a:xfrm>
+            <a:off x="3437645" y="2697460"/>
+            <a:ext cx="1117572" cy="690662"/>
+          </a:xfrm>
+          <a:prstGeom prst="rect">
+            <a:avLst/>
+          </a:prstGeom>
+        </p:spPr>
+      </p:pic>
+      <p:sp>
+        <p:nvSpPr>
+          <p:cNvPr id="8" name="Text 4"/>
+          <p:cNvSpPr/>
+          <p:nvPr/>
+        </p:nvSpPr>
+        <p:spPr>
+          <a:xfrm>
+            <a:off x="3437645" y="3624362"/>
+            <a:ext cx="2540036" cy="295275"/>
+          </a:xfrm>
+          <a:prstGeom prst="rect">
+            <a:avLst/>
+          </a:prstGeom>
+          <a:noFill/>
+          <a:ln/>
+        </p:spPr>
+        <p:txBody>
+          <a:bodyPr wrap="none" lIns="0" tIns="0" rIns="0" bIns="0" rtlCol="0" anchor="t"/>
+          <a:lstStyle/>
+          <a:p>
+            <a:pPr marL="0" indent="0" algn="l">
+              <a:lnSpc>
+                <a:spcPct val="104000"/>
+              </a:lnSpc>
+              <a:buNone/>
+            </a:pPr>
+            <a:r>
+              <a:rPr lang="en-US" sz="1850" kern="0" spc="-56" dirty="0">
+                <a:solidFill>
+                  <a:srgbClr val="2B2E3C"/>
+                </a:solidFill>
+                <a:latin typeface="Bitter Medium" pitchFamily="34" charset="0"/>
+                <a:ea typeface="Bitter Medium" pitchFamily="34" charset="-122"/>
+                <a:cs typeface="Bitter Medium" pitchFamily="34" charset="-120"/>
+              </a:rPr>
+              <a:t>Cloud &amp; FCM</a:t>
+            </a:r>
+            <a:endParaRPr lang="en-US" sz="1850" dirty="0"/>
+          </a:p>
+        </p:txBody>
+      </p:sp>
+      <p:sp>
+        <p:nvSpPr>
+          <p:cNvPr id="9" name="Text 5"/>
+          <p:cNvSpPr/>
+          <p:nvPr/>
+        </p:nvSpPr>
+        <p:spPr>
+          <a:xfrm>
+            <a:off x="3437645" y="4033044"/>
+            <a:ext cx="2540036" cy="907256"/>
+          </a:xfrm>
+          <a:prstGeom prst="rect">
+            <a:avLst/>
+          </a:prstGeom>
+          <a:noFill/>
+          <a:ln/>
+        </p:spPr>
+        <p:txBody>
+          <a:bodyPr wrap="square" lIns="0" tIns="0" rIns="0" bIns="0" rtlCol="0" anchor="t">
+            <a:normAutofit/>
+          </a:bodyPr>
+          <a:lstStyle/>
+          <a:p>
+            <a:pPr marL="0" indent="0" algn="l">
+              <a:lnSpc>
+                <a:spcPct val="133000"/>
+              </a:lnSpc>
+              <a:buNone/>
+            </a:pPr>
+            <a:r>
+              <a:rPr lang="en-US" sz="1450" kern="0" spc="-30" dirty="0">
+                <a:solidFill>
+                  <a:srgbClr val="2B2E3C"/>
+                </a:solidFill>
+                <a:latin typeface="Open Sans" pitchFamily="34" charset="0"/>
+                <a:ea typeface="Open Sans" pitchFamily="34" charset="-122"/>
+                <a:cs typeface="Open Sans" pitchFamily="34" charset="-120"/>
+              </a:rPr>
+              <a:t>Bridge cloud per accesso remoto e notifiche push via Firebase Cloud Messaging</a:t>
+            </a:r>
+            <a:endParaRPr lang="en-US" sz="1450" dirty="0"/>
+          </a:p>
+        </p:txBody>
+      </p:sp>
+      <p:pic>
+        <p:nvPicPr>
+          <p:cNvPr id="10" name="Image 2" descr="preencoded.png"/>
+          <p:cNvPicPr>
+            <a:picLocks noChangeAspect="1"/>
+          </p:cNvPicPr>
+          <p:nvPr/>
+        </p:nvPicPr>
+        <p:blipFill>
+          <a:blip r:embed="rId5"/>
+          <a:stretch>
+            <a:fillRect/>
+          </a:stretch>
+        </p:blipFill>
+        <p:spPr>
+          <a:xfrm>
+            <a:off x="6213915" y="2697460"/>
+            <a:ext cx="1117572" cy="690662"/>
+          </a:xfrm>
+          <a:prstGeom prst="rect">
+            <a:avLst/>
+          </a:prstGeom>
+        </p:spPr>
+      </p:pic>
+      <p:sp>
+        <p:nvSpPr>
+          <p:cNvPr id="11" name="Text 6"/>
+          <p:cNvSpPr/>
+          <p:nvPr/>
+        </p:nvSpPr>
+        <p:spPr>
+          <a:xfrm>
+            <a:off x="6213915" y="3624362"/>
+            <a:ext cx="2540036" cy="885825"/>
+          </a:xfrm>
+          <a:prstGeom prst="rect">
+            <a:avLst/>
+          </a:prstGeom>
+          <a:noFill/>
+          <a:ln/>
+        </p:spPr>
+        <p:txBody>
+          <a:bodyPr wrap="square" lIns="0" tIns="0" rIns="0" bIns="0" rtlCol="0" anchor="t">
+            <a:normAutofit/>
+          </a:bodyPr>
+          <a:lstStyle/>
+          <a:p>
+            <a:pPr marL="0" indent="0" algn="l">
+              <a:lnSpc>
+                <a:spcPct val="104000"/>
+              </a:lnSpc>
+              <a:buNone/>
+            </a:pPr>
+            <a:r>
+              <a:rPr lang="en-US" sz="1850" kern="0" spc="-56" dirty="0">
+                <a:solidFill>
+                  <a:srgbClr val="2B2E3C"/>
+                </a:solidFill>
+                <a:latin typeface="Bitter Medium" pitchFamily="34" charset="0"/>
+                <a:ea typeface="Bitter Medium" pitchFamily="34" charset="-122"/>
+                <a:cs typeface="Bitter Medium" pitchFamily="34" charset="-120"/>
+              </a:rPr>
+              <a:t>Meccanismo di Raffreddamento e Riscaldamento</a:t>
+            </a:r>
+            <a:endParaRPr lang="en-US" sz="1850" dirty="0"/>
+          </a:p>
+        </p:txBody>
+      </p:sp>
+      <p:sp>
+        <p:nvSpPr>
+          <p:cNvPr id="12" name="Text 7"/>
+          <p:cNvSpPr/>
+          <p:nvPr/>
+        </p:nvSpPr>
+        <p:spPr>
+          <a:xfrm>
+            <a:off x="6213915" y="4623594"/>
+            <a:ext cx="2540036" cy="1020663"/>
+          </a:xfrm>
+          <a:prstGeom prst="rect">
+            <a:avLst/>
+          </a:prstGeom>
+          <a:noFill/>
+          <a:ln/>
+        </p:spPr>
+        <p:txBody>
+          <a:bodyPr wrap="square" lIns="0" tIns="0" rIns="0" bIns="0" rtlCol="0" anchor="t">
+            <a:normAutofit/>
+          </a:bodyPr>
+          <a:lstStyle/>
+          <a:p>
+            <a:pPr marL="0" indent="0" algn="l">
+              <a:lnSpc>
+                <a:spcPct val="133000"/>
+              </a:lnSpc>
+              <a:spcAft>
+                <a:spcPts val="850"/>
+              </a:spcAft>
+              <a:buNone/>
+            </a:pPr>
+            <a:r>
+              <a:rPr lang="en-US" sz="1450" kern="0" spc="-30" dirty="0">
+                <a:solidFill>
+                  <a:srgbClr val="2B2E3C"/>
+                </a:solidFill>
+                <a:latin typeface="Open Sans" pitchFamily="34" charset="0"/>
+                <a:ea typeface="Open Sans" pitchFamily="34" charset="-122"/>
+                <a:cs typeface="Open Sans" pitchFamily="34" charset="-120"/>
+              </a:rPr>
+              <a:t>Sostituzione dei led utilizzati con condizionatori reali</a:t>
+            </a:r>
+            <a:endParaRPr lang="en-US" sz="1450" dirty="0"/>
+          </a:p>
+        </p:txBody>
+      </p:sp>
+      <p:pic>
+        <p:nvPicPr>
+          <p:cNvPr id="13" name="Image 3" descr="preencoded.png"/>
+          <p:cNvPicPr>
+            <a:picLocks noChangeAspect="1"/>
+          </p:cNvPicPr>
+          <p:nvPr/>
+        </p:nvPicPr>
+        <p:blipFill>
+          <a:blip r:embed="rId6"/>
+          <a:stretch>
+            <a:fillRect/>
+          </a:stretch>
+        </p:blipFill>
+        <p:spPr>
+          <a:xfrm>
+            <a:off x="8990184" y="2697460"/>
+            <a:ext cx="1117572" cy="690662"/>
+          </a:xfrm>
+          <a:prstGeom prst="rect">
+            <a:avLst/>
+          </a:prstGeom>
+        </p:spPr>
+      </p:pic>
+      <p:sp>
+        <p:nvSpPr>
+          <p:cNvPr id="14" name="Text 8"/>
+          <p:cNvSpPr/>
+          <p:nvPr/>
+        </p:nvSpPr>
+        <p:spPr>
+          <a:xfrm>
+            <a:off x="8990184" y="3624362"/>
+            <a:ext cx="2540036" cy="295275"/>
+          </a:xfrm>
+          <a:prstGeom prst="rect">
+            <a:avLst/>
+          </a:prstGeom>
+          <a:noFill/>
+          <a:ln/>
+        </p:spPr>
+        <p:txBody>
+          <a:bodyPr wrap="none" lIns="0" tIns="0" rIns="0" bIns="0" rtlCol="0" anchor="t"/>
+          <a:lstStyle/>
+          <a:p>
+            <a:pPr marL="0" indent="0" algn="l">
+              <a:lnSpc>
+                <a:spcPct val="104000"/>
+              </a:lnSpc>
+              <a:buNone/>
+            </a:pPr>
+            <a:r>
+              <a:rPr lang="en-US" sz="1850" kern="0" spc="-56" dirty="0">
+                <a:solidFill>
+                  <a:srgbClr val="2B2E3C"/>
+                </a:solidFill>
+                <a:latin typeface="Bitter Medium" pitchFamily="34" charset="0"/>
+                <a:ea typeface="Bitter Medium" pitchFamily="34" charset="-122"/>
+                <a:cs typeface="Bitter Medium" pitchFamily="34" charset="-120"/>
+              </a:rPr>
+              <a:t>AI Avanzata</a:t>
+            </a:r>
+            <a:endParaRPr lang="en-US" sz="1850" dirty="0"/>
+          </a:p>
+        </p:txBody>
+      </p:sp>
+      <p:sp>
+        <p:nvSpPr>
+          <p:cNvPr id="15" name="Text 9"/>
+          <p:cNvSpPr/>
+          <p:nvPr/>
+        </p:nvSpPr>
+        <p:spPr>
+          <a:xfrm>
+            <a:off x="8990184" y="4033044"/>
+            <a:ext cx="2540036" cy="907256"/>
+          </a:xfrm>
+          <a:prstGeom prst="rect">
+            <a:avLst/>
+          </a:prstGeom>
+          <a:noFill/>
+          <a:ln/>
+        </p:spPr>
+        <p:txBody>
+          <a:bodyPr wrap="square" lIns="0" tIns="0" rIns="0" bIns="0" rtlCol="0" anchor="t">
+            <a:normAutofit/>
+          </a:bodyPr>
+          <a:lstStyle/>
+          <a:p>
+            <a:pPr marL="0" indent="0" algn="l">
+              <a:lnSpc>
+                <a:spcPct val="133000"/>
+              </a:lnSpc>
+              <a:buNone/>
+            </a:pPr>
+            <a:r>
+              <a:rPr lang="en-US" sz="1450" kern="0" spc="-30" dirty="0">
+                <a:solidFill>
+                  <a:srgbClr val="2B2E3C"/>
+                </a:solidFill>
+                <a:latin typeface="Open Sans" pitchFamily="34" charset="0"/>
+                <a:ea typeface="Open Sans" pitchFamily="34" charset="-122"/>
+                <a:cs typeface="Open Sans" pitchFamily="34" charset="-120"/>
+              </a:rPr>
+              <a:t>Predizioni di occupazione, qualità dell'aria (CO2) e suggerimenti automatici</a:t>
+            </a:r>
+            <a:endParaRPr lang="en-US" sz="1450" dirty="0"/>
+          </a:p>
+        </p:txBody>
+      </p:sp>
+      <p:sp>
+        <p:nvSpPr>
+          <p:cNvPr id="17" name="Rettangolo 16">
+            <a:extLst>
+              <a:ext uri="{FF2B5EF4-FFF2-40B4-BE49-F238E27FC236}">
+                <a16:creationId xmlns:a16="http://schemas.microsoft.com/office/drawing/2014/main" id="{4C450058-7DEF-7A71-7A12-E1C2D5356F94}"/>
+              </a:ext>
+            </a:extLst>
+          </p:cNvPr>
+          <p:cNvSpPr/>
+          <p:nvPr/>
+        </p:nvSpPr>
+        <p:spPr>
+          <a:xfrm>
+            <a:off x="10961052" y="6559422"/>
+            <a:ext cx="1138335" cy="223934"/>
+          </a:xfrm>
+          <a:prstGeom prst="rect">
+            <a:avLst/>
+          </a:prstGeom>
+          <a:solidFill>
+            <a:srgbClr val="FFF8F0"/>
+          </a:solidFill>
+          <a:ln>
+            <a:solidFill>
+              <a:srgbClr val="FFF8F0"/>
+            </a:solidFill>
+          </a:ln>
+        </p:spPr>
+        <p:style>
+          <a:lnRef idx="2">
+            <a:schemeClr val="accent1">
+              <a:shade val="15000"/>
+            </a:schemeClr>
+          </a:lnRef>
+          <a:fillRef idx="1">
+            <a:schemeClr val="accent1"/>
+          </a:fillRef>
+          <a:effectRef idx="0">
+            <a:schemeClr val="accent1"/>
+          </a:effectRef>
+          <a:fontRef idx="minor">
+            <a:schemeClr val="lt1"/>
+          </a:fontRef>
+        </p:style>
+        <p:txBody>
+          <a:bodyPr rtlCol="0" anchor="ctr"/>
+          <a:lstStyle/>
+          <a:p>
+            <a:pPr algn="ctr"/>
+            <a:endParaRPr lang="it-IT"/>
+          </a:p>
+        </p:txBody>
+      </p:sp>
+    </p:spTree>
+  </p:cSld>
+  <p:clrMapOvr>
+    <a:masterClrMapping/>
+  </p:clrMapOvr>
+</p:sld>
+</file>
+
+<file path=ppt/slides/slide6.xml><?xml version="1.0" encoding="utf-8"?>
+<p:sld xmlns:a="http://schemas.openxmlformats.org/drawingml/2006/main" xmlns:r="http://schemas.openxmlformats.org/officeDocument/2006/relationships" xmlns:p="http://schemas.openxmlformats.org/presentationml/2006/main">
   <p:cSld name="Slide 5">
     <p:spTree>
       <p:nvGrpSpPr>
@@ -4775,917 +5383,6 @@
             <a:extLst>
               <a:ext uri="{FF2B5EF4-FFF2-40B4-BE49-F238E27FC236}">
                 <a16:creationId xmlns:a16="http://schemas.microsoft.com/office/drawing/2014/main" id="{251BF78C-2940-02B3-6200-64E64F7E52AB}"/>
-              </a:ext>
-            </a:extLst>
-          </p:cNvPr>
-          <p:cNvSpPr/>
-          <p:nvPr/>
-        </p:nvSpPr>
-        <p:spPr>
-          <a:xfrm>
-            <a:off x="10961052" y="6559422"/>
-            <a:ext cx="1138335" cy="223934"/>
-          </a:xfrm>
-          <a:prstGeom prst="rect">
-            <a:avLst/>
-          </a:prstGeom>
-          <a:solidFill>
-            <a:srgbClr val="FFF8F0"/>
-          </a:solidFill>
-          <a:ln>
-            <a:solidFill>
-              <a:srgbClr val="FFF8F0"/>
-            </a:solidFill>
-          </a:ln>
-        </p:spPr>
-        <p:style>
-          <a:lnRef idx="2">
-            <a:schemeClr val="accent1">
-              <a:shade val="15000"/>
-            </a:schemeClr>
-          </a:lnRef>
-          <a:fillRef idx="1">
-            <a:schemeClr val="accent1"/>
-          </a:fillRef>
-          <a:effectRef idx="0">
-            <a:schemeClr val="accent1"/>
-          </a:effectRef>
-          <a:fontRef idx="minor">
-            <a:schemeClr val="lt1"/>
-          </a:fontRef>
-        </p:style>
-        <p:txBody>
-          <a:bodyPr rtlCol="0" anchor="ctr"/>
-          <a:lstStyle/>
-          <a:p>
-            <a:pPr algn="ctr"/>
-            <a:endParaRPr lang="it-IT"/>
-          </a:p>
-        </p:txBody>
-      </p:sp>
-    </p:spTree>
-  </p:cSld>
-  <p:clrMapOvr>
-    <a:masterClrMapping/>
-  </p:clrMapOvr>
-</p:sld>
-</file>
-
-<file path=ppt/slides/slide6.xml><?xml version="1.0" encoding="utf-8"?>
-<p:sld xmlns:a="http://schemas.openxmlformats.org/drawingml/2006/main" xmlns:r="http://schemas.openxmlformats.org/officeDocument/2006/relationships" xmlns:p="http://schemas.openxmlformats.org/presentationml/2006/main">
-  <p:cSld name="Slide 6">
-    <p:spTree>
-      <p:nvGrpSpPr>
-        <p:cNvPr id="1" name=""/>
-        <p:cNvGrpSpPr/>
-        <p:nvPr/>
-      </p:nvGrpSpPr>
-      <p:grpSpPr>
-        <a:xfrm>
-          <a:off x="0" y="0"/>
-          <a:ext cx="0" cy="0"/>
-          <a:chOff x="0" y="0"/>
-          <a:chExt cx="0" cy="0"/>
-        </a:xfrm>
-      </p:grpSpPr>
-      <p:pic>
-        <p:nvPicPr>
-          <p:cNvPr id="2" name="Image 0" descr="preencoded.png"/>
-          <p:cNvPicPr>
-            <a:picLocks noChangeAspect="1"/>
-          </p:cNvPicPr>
-          <p:nvPr/>
-        </p:nvPicPr>
-        <p:blipFill>
-          <a:blip r:embed="rId3"/>
-          <a:stretch>
-            <a:fillRect/>
-          </a:stretch>
-        </p:blipFill>
-        <p:spPr>
-          <a:xfrm>
-            <a:off x="0" y="0"/>
-            <a:ext cx="4571886" cy="6858000"/>
-          </a:xfrm>
-          <a:prstGeom prst="rect">
-            <a:avLst/>
-          </a:prstGeom>
-        </p:spPr>
-      </p:pic>
-      <p:pic>
-        <p:nvPicPr>
-          <p:cNvPr id="3" name="Image 1" descr="preencoded.png"/>
-          <p:cNvPicPr>
-            <a:picLocks noChangeAspect="1"/>
-          </p:cNvPicPr>
-          <p:nvPr/>
-        </p:nvPicPr>
-        <p:blipFill>
-          <a:blip r:embed="rId4"/>
-          <a:stretch>
-            <a:fillRect/>
-          </a:stretch>
-        </p:blipFill>
-        <p:spPr>
-          <a:xfrm>
-            <a:off x="863578" y="552450"/>
-            <a:ext cx="2844729" cy="5753100"/>
-          </a:xfrm>
-          <a:prstGeom prst="rect">
-            <a:avLst/>
-          </a:prstGeom>
-        </p:spPr>
-      </p:pic>
-      <p:sp>
-        <p:nvSpPr>
-          <p:cNvPr id="4" name="Text 0"/>
-          <p:cNvSpPr/>
-          <p:nvPr/>
-        </p:nvSpPr>
-        <p:spPr>
-          <a:xfrm>
-            <a:off x="5233360" y="519906"/>
-            <a:ext cx="6296860" cy="406003"/>
-          </a:xfrm>
-          <a:prstGeom prst="rect">
-            <a:avLst/>
-          </a:prstGeom>
-          <a:noFill/>
-          <a:ln/>
-        </p:spPr>
-        <p:txBody>
-          <a:bodyPr wrap="none" lIns="0" tIns="0" rIns="0" bIns="0" rtlCol="0" anchor="t"/>
-          <a:lstStyle/>
-          <a:p>
-            <a:pPr marL="0" indent="0" algn="l">
-              <a:lnSpc>
-                <a:spcPct val="104000"/>
-              </a:lnSpc>
-              <a:buNone/>
-            </a:pPr>
-            <a:r>
-              <a:rPr lang="en-US" sz="2550" kern="0" spc="-77" dirty="0">
-                <a:solidFill>
-                  <a:srgbClr val="2C3F42"/>
-                </a:solidFill>
-                <a:latin typeface="Bitter Medium" pitchFamily="34" charset="0"/>
-                <a:ea typeface="Bitter Medium" pitchFamily="34" charset="-122"/>
-                <a:cs typeface="Bitter Medium" pitchFamily="34" charset="-120"/>
-              </a:rPr>
-              <a:t>L'App Android</a:t>
-            </a:r>
-            <a:endParaRPr lang="en-US" sz="2550" dirty="0"/>
-          </a:p>
-        </p:txBody>
-      </p:sp>
-      <p:sp>
-        <p:nvSpPr>
-          <p:cNvPr id="5" name="Text 1"/>
-          <p:cNvSpPr/>
-          <p:nvPr/>
-        </p:nvSpPr>
-        <p:spPr>
-          <a:xfrm>
-            <a:off x="5233360" y="1059855"/>
-            <a:ext cx="6906444" cy="175419"/>
-          </a:xfrm>
-          <a:prstGeom prst="rect">
-            <a:avLst/>
-          </a:prstGeom>
-          <a:noFill/>
-          <a:ln/>
-        </p:spPr>
-        <p:txBody>
-          <a:bodyPr wrap="none" lIns="0" tIns="0" rIns="0" bIns="0" rtlCol="0" anchor="t"/>
-          <a:lstStyle/>
-          <a:p>
-            <a:pPr marL="0" indent="0" algn="l">
-              <a:lnSpc>
-                <a:spcPct val="113000"/>
-              </a:lnSpc>
-              <a:buNone/>
-            </a:pPr>
-            <a:r>
-              <a:rPr lang="en-US" sz="1200" kern="0" spc="-20" dirty="0">
-                <a:solidFill>
-                  <a:srgbClr val="2B2E3C"/>
-                </a:solidFill>
-                <a:latin typeface="Open Sans" pitchFamily="34" charset="0"/>
-                <a:ea typeface="Open Sans" pitchFamily="34" charset="-122"/>
-                <a:cs typeface="Open Sans" pitchFamily="34" charset="-120"/>
-              </a:rPr>
-              <a:t>Un'app nativa in Java/XML che legge da Firebase e ti guida verso l'aula migliore.</a:t>
-            </a:r>
-            <a:endParaRPr lang="en-US" sz="1200" dirty="0"/>
-          </a:p>
-        </p:txBody>
-      </p:sp>
-      <p:sp>
-        <p:nvSpPr>
-          <p:cNvPr id="6" name="Shape 2"/>
-          <p:cNvSpPr/>
-          <p:nvPr/>
-        </p:nvSpPr>
-        <p:spPr>
-          <a:xfrm>
-            <a:off x="5233360" y="1335782"/>
-            <a:ext cx="6296860" cy="1183580"/>
-          </a:xfrm>
-          <a:prstGeom prst="roundRect">
-            <a:avLst>
-              <a:gd name="adj" fmla="val 4611"/>
-            </a:avLst>
-          </a:prstGeom>
-          <a:solidFill>
-            <a:srgbClr val="FCE2CF"/>
-          </a:solidFill>
-          <a:ln w="6350">
-            <a:solidFill>
-              <a:srgbClr val="E2C8B5"/>
-            </a:solidFill>
-            <a:prstDash val="solid"/>
-          </a:ln>
-        </p:spPr>
-        <p:txBody>
-          <a:bodyPr/>
-          <a:lstStyle/>
-          <a:p>
-            <a:endParaRPr lang="it-IT"/>
-          </a:p>
-        </p:txBody>
-      </p:sp>
-      <p:sp>
-        <p:nvSpPr>
-          <p:cNvPr id="7" name="Shape 3"/>
-          <p:cNvSpPr/>
-          <p:nvPr/>
-        </p:nvSpPr>
-        <p:spPr>
-          <a:xfrm>
-            <a:off x="5369584" y="1472009"/>
-            <a:ext cx="389821" cy="389830"/>
-          </a:xfrm>
-          <a:prstGeom prst="ellipse">
-            <a:avLst/>
-          </a:prstGeom>
-          <a:solidFill>
-            <a:srgbClr val="D2600F"/>
-          </a:solidFill>
-          <a:ln/>
-        </p:spPr>
-        <p:txBody>
-          <a:bodyPr/>
-          <a:lstStyle/>
-          <a:p>
-            <a:endParaRPr lang="it-IT"/>
-          </a:p>
-        </p:txBody>
-      </p:sp>
-      <p:pic>
-        <p:nvPicPr>
-          <p:cNvPr id="8" name="Image 2" descr="preencoded.png"/>
-          <p:cNvPicPr>
-            <a:picLocks noChangeAspect="1"/>
-          </p:cNvPicPr>
-          <p:nvPr/>
-        </p:nvPicPr>
-        <p:blipFill>
-          <a:blip>
-            <a:extLst>
-              <a:ext uri="{96DAC541-7B7A-43D3-8B79-37D633B846F1}">
-                <asvg:svgBlip xmlns:asvg="http://schemas.microsoft.com/office/drawing/2016/SVG/main" r:embed="rId5"/>
-              </a:ext>
-            </a:extLst>
-          </a:blip>
-          <a:stretch>
-            <a:fillRect/>
-          </a:stretch>
-        </p:blipFill>
-        <p:spPr>
-          <a:xfrm>
-            <a:off x="5476738" y="1579166"/>
-            <a:ext cx="175414" cy="175419"/>
-          </a:xfrm>
-          <a:prstGeom prst="rect">
-            <a:avLst/>
-          </a:prstGeom>
-        </p:spPr>
-      </p:pic>
-      <p:sp>
-        <p:nvSpPr>
-          <p:cNvPr id="9" name="Text 4"/>
-          <p:cNvSpPr/>
-          <p:nvPr/>
-        </p:nvSpPr>
-        <p:spPr>
-          <a:xfrm>
-            <a:off x="5369584" y="1951137"/>
-            <a:ext cx="6024412" cy="203002"/>
-          </a:xfrm>
-          <a:prstGeom prst="rect">
-            <a:avLst/>
-          </a:prstGeom>
-          <a:noFill/>
-          <a:ln/>
-        </p:spPr>
-        <p:txBody>
-          <a:bodyPr wrap="none" lIns="0" tIns="0" rIns="0" bIns="0" rtlCol="0" anchor="t"/>
-          <a:lstStyle/>
-          <a:p>
-            <a:pPr marL="0" indent="0" algn="l">
-              <a:lnSpc>
-                <a:spcPct val="104000"/>
-              </a:lnSpc>
-              <a:buNone/>
-            </a:pPr>
-            <a:r>
-              <a:rPr lang="en-US" sz="1250" kern="0" spc="-38" dirty="0">
-                <a:solidFill>
-                  <a:srgbClr val="2B2E3C"/>
-                </a:solidFill>
-                <a:latin typeface="Bitter Medium" pitchFamily="34" charset="0"/>
-                <a:ea typeface="Bitter Medium" pitchFamily="34" charset="-122"/>
-                <a:cs typeface="Bitter Medium" pitchFamily="34" charset="-120"/>
-              </a:rPr>
-              <a:t>Score in Tempo Reale</a:t>
-            </a:r>
-            <a:endParaRPr lang="en-US" sz="1250" dirty="0"/>
-          </a:p>
-        </p:txBody>
-      </p:sp>
-      <p:sp>
-        <p:nvSpPr>
-          <p:cNvPr id="10" name="Text 5"/>
-          <p:cNvSpPr/>
-          <p:nvPr/>
-        </p:nvSpPr>
-        <p:spPr>
-          <a:xfrm>
-            <a:off x="5369584" y="2207716"/>
-            <a:ext cx="6024412" cy="175419"/>
-          </a:xfrm>
-          <a:prstGeom prst="rect">
-            <a:avLst/>
-          </a:prstGeom>
-          <a:noFill/>
-          <a:ln/>
-        </p:spPr>
-        <p:txBody>
-          <a:bodyPr wrap="none" lIns="0" tIns="0" rIns="0" bIns="0" rtlCol="0" anchor="t"/>
-          <a:lstStyle/>
-          <a:p>
-            <a:pPr marL="0" indent="0" algn="l">
-              <a:lnSpc>
-                <a:spcPct val="113000"/>
-              </a:lnSpc>
-              <a:buNone/>
-            </a:pPr>
-            <a:r>
-              <a:rPr lang="en-US" sz="1000" kern="0" spc="-20" dirty="0">
-                <a:solidFill>
-                  <a:srgbClr val="2B2E3C"/>
-                </a:solidFill>
-                <a:latin typeface="Open Sans" pitchFamily="34" charset="0"/>
-                <a:ea typeface="Open Sans" pitchFamily="34" charset="-122"/>
-                <a:cs typeface="Open Sans" pitchFamily="34" charset="-120"/>
-              </a:rPr>
-              <a:t>Calcolato da temperatura, umidità e rumore con pesi personalizzabili</a:t>
-            </a:r>
-            <a:endParaRPr lang="en-US" sz="1000" dirty="0"/>
-          </a:p>
-        </p:txBody>
-      </p:sp>
-      <p:sp>
-        <p:nvSpPr>
-          <p:cNvPr id="11" name="Shape 6"/>
-          <p:cNvSpPr/>
-          <p:nvPr/>
-        </p:nvSpPr>
-        <p:spPr>
-          <a:xfrm>
-            <a:off x="5233360" y="2608659"/>
-            <a:ext cx="6296860" cy="1183580"/>
-          </a:xfrm>
-          <a:prstGeom prst="roundRect">
-            <a:avLst>
-              <a:gd name="adj" fmla="val 4611"/>
-            </a:avLst>
-          </a:prstGeom>
-          <a:solidFill>
-            <a:srgbClr val="FCE2CF"/>
-          </a:solidFill>
-          <a:ln w="6350">
-            <a:solidFill>
-              <a:srgbClr val="E2C8B5"/>
-            </a:solidFill>
-            <a:prstDash val="solid"/>
-          </a:ln>
-        </p:spPr>
-        <p:txBody>
-          <a:bodyPr/>
-          <a:lstStyle/>
-          <a:p>
-            <a:endParaRPr lang="it-IT"/>
-          </a:p>
-        </p:txBody>
-      </p:sp>
-      <p:sp>
-        <p:nvSpPr>
-          <p:cNvPr id="12" name="Shape 7"/>
-          <p:cNvSpPr/>
-          <p:nvPr/>
-        </p:nvSpPr>
-        <p:spPr>
-          <a:xfrm>
-            <a:off x="5369584" y="2744887"/>
-            <a:ext cx="389821" cy="389830"/>
-          </a:xfrm>
-          <a:prstGeom prst="ellipse">
-            <a:avLst/>
-          </a:prstGeom>
-          <a:solidFill>
-            <a:srgbClr val="D2600F"/>
-          </a:solidFill>
-          <a:ln/>
-        </p:spPr>
-        <p:txBody>
-          <a:bodyPr/>
-          <a:lstStyle/>
-          <a:p>
-            <a:endParaRPr lang="it-IT"/>
-          </a:p>
-        </p:txBody>
-      </p:sp>
-      <p:pic>
-        <p:nvPicPr>
-          <p:cNvPr id="13" name="Image 3" descr="preencoded.png"/>
-          <p:cNvPicPr>
-            <a:picLocks noChangeAspect="1"/>
-          </p:cNvPicPr>
-          <p:nvPr/>
-        </p:nvPicPr>
-        <p:blipFill>
-          <a:blip>
-            <a:extLst>
-              <a:ext uri="{96DAC541-7B7A-43D3-8B79-37D633B846F1}">
-                <asvg:svgBlip xmlns:asvg="http://schemas.microsoft.com/office/drawing/2016/SVG/main" r:embed="rId6"/>
-              </a:ext>
-            </a:extLst>
-          </a:blip>
-          <a:stretch>
-            <a:fillRect/>
-          </a:stretch>
-        </p:blipFill>
-        <p:spPr>
-          <a:xfrm>
-            <a:off x="5476738" y="2852043"/>
-            <a:ext cx="175414" cy="175419"/>
-          </a:xfrm>
-          <a:prstGeom prst="rect">
-            <a:avLst/>
-          </a:prstGeom>
-        </p:spPr>
-      </p:pic>
-      <p:sp>
-        <p:nvSpPr>
-          <p:cNvPr id="14" name="Text 8"/>
-          <p:cNvSpPr/>
-          <p:nvPr/>
-        </p:nvSpPr>
-        <p:spPr>
-          <a:xfrm>
-            <a:off x="5369584" y="3224014"/>
-            <a:ext cx="6024412" cy="203002"/>
-          </a:xfrm>
-          <a:prstGeom prst="rect">
-            <a:avLst/>
-          </a:prstGeom>
-          <a:noFill/>
-          <a:ln/>
-        </p:spPr>
-        <p:txBody>
-          <a:bodyPr wrap="none" lIns="0" tIns="0" rIns="0" bIns="0" rtlCol="0" anchor="t"/>
-          <a:lstStyle/>
-          <a:p>
-            <a:pPr marL="0" indent="0" algn="l">
-              <a:lnSpc>
-                <a:spcPct val="104000"/>
-              </a:lnSpc>
-              <a:buNone/>
-            </a:pPr>
-            <a:r>
-              <a:rPr lang="en-US" sz="1250" kern="0" spc="-38" dirty="0">
-                <a:solidFill>
-                  <a:srgbClr val="2B2E3C"/>
-                </a:solidFill>
-                <a:latin typeface="Bitter Medium" pitchFamily="34" charset="0"/>
-                <a:ea typeface="Bitter Medium" pitchFamily="34" charset="-122"/>
-                <a:cs typeface="Bitter Medium" pitchFamily="34" charset="-120"/>
-              </a:rPr>
-              <a:t>Notifiche Intelligenti</a:t>
-            </a:r>
-            <a:endParaRPr lang="en-US" sz="1250" dirty="0"/>
-          </a:p>
-        </p:txBody>
-      </p:sp>
-      <p:sp>
-        <p:nvSpPr>
-          <p:cNvPr id="15" name="Text 9"/>
-          <p:cNvSpPr/>
-          <p:nvPr/>
-        </p:nvSpPr>
-        <p:spPr>
-          <a:xfrm>
-            <a:off x="5369584" y="3480594"/>
-            <a:ext cx="6024412" cy="175419"/>
-          </a:xfrm>
-          <a:prstGeom prst="rect">
-            <a:avLst/>
-          </a:prstGeom>
-          <a:noFill/>
-          <a:ln/>
-        </p:spPr>
-        <p:txBody>
-          <a:bodyPr wrap="none" lIns="0" tIns="0" rIns="0" bIns="0" rtlCol="0" anchor="t"/>
-          <a:lstStyle/>
-          <a:p>
-            <a:pPr marL="0" indent="0" algn="l">
-              <a:lnSpc>
-                <a:spcPct val="113000"/>
-              </a:lnSpc>
-              <a:buNone/>
-            </a:pPr>
-            <a:r>
-              <a:rPr lang="en-US" sz="1000" kern="0" spc="-20" dirty="0">
-                <a:solidFill>
-                  <a:srgbClr val="2B2E3C"/>
-                </a:solidFill>
-                <a:latin typeface="Open Sans" pitchFamily="34" charset="0"/>
-                <a:ea typeface="Open Sans" pitchFamily="34" charset="-122"/>
-                <a:cs typeface="Open Sans" pitchFamily="34" charset="-120"/>
-              </a:rPr>
-              <a:t>Avviso quando il rumore supera 30 dB, silenziato automaticamente sotto 20 dB</a:t>
-            </a:r>
-            <a:endParaRPr lang="en-US" sz="1000" dirty="0"/>
-          </a:p>
-        </p:txBody>
-      </p:sp>
-      <p:sp>
-        <p:nvSpPr>
-          <p:cNvPr id="16" name="Shape 10"/>
-          <p:cNvSpPr/>
-          <p:nvPr/>
-        </p:nvSpPr>
-        <p:spPr>
-          <a:xfrm>
-            <a:off x="5233360" y="3881537"/>
-            <a:ext cx="6296860" cy="1183580"/>
-          </a:xfrm>
-          <a:prstGeom prst="roundRect">
-            <a:avLst>
-              <a:gd name="adj" fmla="val 4611"/>
-            </a:avLst>
-          </a:prstGeom>
-          <a:solidFill>
-            <a:srgbClr val="FCE2CF"/>
-          </a:solidFill>
-          <a:ln w="6350">
-            <a:solidFill>
-              <a:srgbClr val="E2C8B5"/>
-            </a:solidFill>
-            <a:prstDash val="solid"/>
-          </a:ln>
-        </p:spPr>
-        <p:txBody>
-          <a:bodyPr/>
-          <a:lstStyle/>
-          <a:p>
-            <a:endParaRPr lang="it-IT"/>
-          </a:p>
-        </p:txBody>
-      </p:sp>
-      <p:sp>
-        <p:nvSpPr>
-          <p:cNvPr id="17" name="Shape 11"/>
-          <p:cNvSpPr/>
-          <p:nvPr/>
-        </p:nvSpPr>
-        <p:spPr>
-          <a:xfrm>
-            <a:off x="5369584" y="4017764"/>
-            <a:ext cx="389821" cy="389830"/>
-          </a:xfrm>
-          <a:prstGeom prst="ellipse">
-            <a:avLst/>
-          </a:prstGeom>
-          <a:solidFill>
-            <a:srgbClr val="D2600F"/>
-          </a:solidFill>
-          <a:ln/>
-        </p:spPr>
-        <p:txBody>
-          <a:bodyPr/>
-          <a:lstStyle/>
-          <a:p>
-            <a:endParaRPr lang="it-IT"/>
-          </a:p>
-        </p:txBody>
-      </p:sp>
-      <p:pic>
-        <p:nvPicPr>
-          <p:cNvPr id="18" name="Image 4" descr="preencoded.png"/>
-          <p:cNvPicPr>
-            <a:picLocks noChangeAspect="1"/>
-          </p:cNvPicPr>
-          <p:nvPr/>
-        </p:nvPicPr>
-        <p:blipFill>
-          <a:blip>
-            <a:extLst>
-              <a:ext uri="{96DAC541-7B7A-43D3-8B79-37D633B846F1}">
-                <asvg:svgBlip xmlns:asvg="http://schemas.microsoft.com/office/drawing/2016/SVG/main" r:embed="rId7"/>
-              </a:ext>
-            </a:extLst>
-          </a:blip>
-          <a:stretch>
-            <a:fillRect/>
-          </a:stretch>
-        </p:blipFill>
-        <p:spPr>
-          <a:xfrm>
-            <a:off x="5476738" y="4124920"/>
-            <a:ext cx="175414" cy="175419"/>
-          </a:xfrm>
-          <a:prstGeom prst="rect">
-            <a:avLst/>
-          </a:prstGeom>
-        </p:spPr>
-      </p:pic>
-      <p:sp>
-        <p:nvSpPr>
-          <p:cNvPr id="19" name="Text 12"/>
-          <p:cNvSpPr/>
-          <p:nvPr/>
-        </p:nvSpPr>
-        <p:spPr>
-          <a:xfrm>
-            <a:off x="5369584" y="4496891"/>
-            <a:ext cx="6024412" cy="203002"/>
-          </a:xfrm>
-          <a:prstGeom prst="rect">
-            <a:avLst/>
-          </a:prstGeom>
-          <a:noFill/>
-          <a:ln/>
-        </p:spPr>
-        <p:txBody>
-          <a:bodyPr wrap="none" lIns="0" tIns="0" rIns="0" bIns="0" rtlCol="0" anchor="t"/>
-          <a:lstStyle/>
-          <a:p>
-            <a:pPr marL="0" indent="0" algn="l">
-              <a:lnSpc>
-                <a:spcPct val="104000"/>
-              </a:lnSpc>
-              <a:buNone/>
-            </a:pPr>
-            <a:r>
-              <a:rPr lang="en-US" sz="1250" kern="0" spc="-38" dirty="0">
-                <a:solidFill>
-                  <a:srgbClr val="2B2E3C"/>
-                </a:solidFill>
-                <a:latin typeface="Bitter Medium" pitchFamily="34" charset="0"/>
-                <a:ea typeface="Bitter Medium" pitchFamily="34" charset="-122"/>
-                <a:cs typeface="Bitter Medium" pitchFamily="34" charset="-120"/>
-              </a:rPr>
-              <a:t>Preferenze Utente</a:t>
-            </a:r>
-            <a:endParaRPr lang="en-US" sz="1250" dirty="0"/>
-          </a:p>
-        </p:txBody>
-      </p:sp>
-      <p:sp>
-        <p:nvSpPr>
-          <p:cNvPr id="20" name="Text 13"/>
-          <p:cNvSpPr/>
-          <p:nvPr/>
-        </p:nvSpPr>
-        <p:spPr>
-          <a:xfrm>
-            <a:off x="5369584" y="4753471"/>
-            <a:ext cx="6024412" cy="175419"/>
-          </a:xfrm>
-          <a:prstGeom prst="rect">
-            <a:avLst/>
-          </a:prstGeom>
-          <a:noFill/>
-          <a:ln/>
-        </p:spPr>
-        <p:txBody>
-          <a:bodyPr wrap="none" lIns="0" tIns="0" rIns="0" bIns="0" rtlCol="0" anchor="t"/>
-          <a:lstStyle/>
-          <a:p>
-            <a:pPr marL="0" indent="0" algn="l">
-              <a:lnSpc>
-                <a:spcPct val="113000"/>
-              </a:lnSpc>
-              <a:buNone/>
-            </a:pPr>
-            <a:r>
-              <a:rPr lang="en-US" sz="1000" kern="0" spc="-20" dirty="0">
-                <a:solidFill>
-                  <a:srgbClr val="2B2E3C"/>
-                </a:solidFill>
-                <a:latin typeface="Open Sans" pitchFamily="34" charset="0"/>
-                <a:ea typeface="Open Sans" pitchFamily="34" charset="-122"/>
-                <a:cs typeface="Open Sans" pitchFamily="34" charset="-120"/>
-              </a:rPr>
-              <a:t>Bilanciata, Priorità Silenzio o Priorità Comfort: i pesi dello score si adattano</a:t>
-            </a:r>
-            <a:endParaRPr lang="en-US" sz="1000" dirty="0"/>
-          </a:p>
-        </p:txBody>
-      </p:sp>
-      <p:sp>
-        <p:nvSpPr>
-          <p:cNvPr id="21" name="Shape 14"/>
-          <p:cNvSpPr/>
-          <p:nvPr/>
-        </p:nvSpPr>
-        <p:spPr>
-          <a:xfrm>
-            <a:off x="5233360" y="5154414"/>
-            <a:ext cx="6296860" cy="1183580"/>
-          </a:xfrm>
-          <a:prstGeom prst="roundRect">
-            <a:avLst>
-              <a:gd name="adj" fmla="val 4611"/>
-            </a:avLst>
-          </a:prstGeom>
-          <a:solidFill>
-            <a:srgbClr val="FCE2CF"/>
-          </a:solidFill>
-          <a:ln w="6350">
-            <a:solidFill>
-              <a:srgbClr val="E2C8B5"/>
-            </a:solidFill>
-            <a:prstDash val="solid"/>
-          </a:ln>
-        </p:spPr>
-        <p:txBody>
-          <a:bodyPr/>
-          <a:lstStyle/>
-          <a:p>
-            <a:endParaRPr lang="it-IT"/>
-          </a:p>
-        </p:txBody>
-      </p:sp>
-      <p:sp>
-        <p:nvSpPr>
-          <p:cNvPr id="22" name="Shape 15"/>
-          <p:cNvSpPr/>
-          <p:nvPr/>
-        </p:nvSpPr>
-        <p:spPr>
-          <a:xfrm>
-            <a:off x="5369584" y="5290641"/>
-            <a:ext cx="389821" cy="389830"/>
-          </a:xfrm>
-          <a:prstGeom prst="ellipse">
-            <a:avLst/>
-          </a:prstGeom>
-          <a:solidFill>
-            <a:srgbClr val="D2600F"/>
-          </a:solidFill>
-          <a:ln/>
-        </p:spPr>
-        <p:txBody>
-          <a:bodyPr/>
-          <a:lstStyle/>
-          <a:p>
-            <a:endParaRPr lang="it-IT"/>
-          </a:p>
-        </p:txBody>
-      </p:sp>
-      <p:pic>
-        <p:nvPicPr>
-          <p:cNvPr id="23" name="Image 5" descr="preencoded.png"/>
-          <p:cNvPicPr>
-            <a:picLocks noChangeAspect="1"/>
-          </p:cNvPicPr>
-          <p:nvPr/>
-        </p:nvPicPr>
-        <p:blipFill>
-          <a:blip>
-            <a:extLst>
-              <a:ext uri="{96DAC541-7B7A-43D3-8B79-37D633B846F1}">
-                <asvg:svgBlip xmlns:asvg="http://schemas.microsoft.com/office/drawing/2016/SVG/main" r:embed="rId8"/>
-              </a:ext>
-            </a:extLst>
-          </a:blip>
-          <a:stretch>
-            <a:fillRect/>
-          </a:stretch>
-        </p:blipFill>
-        <p:spPr>
-          <a:xfrm>
-            <a:off x="5476738" y="5397798"/>
-            <a:ext cx="175414" cy="175419"/>
-          </a:xfrm>
-          <a:prstGeom prst="rect">
-            <a:avLst/>
-          </a:prstGeom>
-        </p:spPr>
-      </p:pic>
-      <p:sp>
-        <p:nvSpPr>
-          <p:cNvPr id="24" name="Text 16"/>
-          <p:cNvSpPr/>
-          <p:nvPr/>
-        </p:nvSpPr>
-        <p:spPr>
-          <a:xfrm>
-            <a:off x="5369584" y="5769769"/>
-            <a:ext cx="6024412" cy="203002"/>
-          </a:xfrm>
-          <a:prstGeom prst="rect">
-            <a:avLst/>
-          </a:prstGeom>
-          <a:noFill/>
-          <a:ln/>
-        </p:spPr>
-        <p:txBody>
-          <a:bodyPr wrap="none" lIns="0" tIns="0" rIns="0" bIns="0" rtlCol="0" anchor="t"/>
-          <a:lstStyle/>
-          <a:p>
-            <a:pPr marL="0" indent="0" algn="l">
-              <a:lnSpc>
-                <a:spcPct val="104000"/>
-              </a:lnSpc>
-              <a:buNone/>
-            </a:pPr>
-            <a:r>
-              <a:rPr lang="en-US" sz="1250" kern="0" spc="-38" dirty="0">
-                <a:solidFill>
-                  <a:srgbClr val="2B2E3C"/>
-                </a:solidFill>
-                <a:latin typeface="Bitter Medium" pitchFamily="34" charset="0"/>
-                <a:ea typeface="Bitter Medium" pitchFamily="34" charset="-122"/>
-                <a:cs typeface="Bitter Medium" pitchFamily="34" charset="-120"/>
-              </a:rPr>
-              <a:t>Classificazione Aule</a:t>
-            </a:r>
-            <a:endParaRPr lang="en-US" sz="1250" dirty="0"/>
-          </a:p>
-        </p:txBody>
-      </p:sp>
-      <p:sp>
-        <p:nvSpPr>
-          <p:cNvPr id="25" name="Text 17"/>
-          <p:cNvSpPr/>
-          <p:nvPr/>
-        </p:nvSpPr>
-        <p:spPr>
-          <a:xfrm>
-            <a:off x="5369584" y="6026348"/>
-            <a:ext cx="6024412" cy="175419"/>
-          </a:xfrm>
-          <a:prstGeom prst="rect">
-            <a:avLst/>
-          </a:prstGeom>
-          <a:noFill/>
-          <a:ln/>
-        </p:spPr>
-        <p:txBody>
-          <a:bodyPr wrap="none" lIns="0" tIns="0" rIns="0" bIns="0" rtlCol="0" anchor="t"/>
-          <a:lstStyle/>
-          <a:p>
-            <a:pPr marL="0" indent="0" algn="l">
-              <a:lnSpc>
-                <a:spcPct val="113000"/>
-              </a:lnSpc>
-              <a:buNone/>
-            </a:pPr>
-            <a:r>
-              <a:rPr lang="en-US" sz="1000" kern="0" spc="-20" dirty="0">
-                <a:solidFill>
-                  <a:srgbClr val="2B2E3C"/>
-                </a:solidFill>
-                <a:latin typeface="Open Sans" pitchFamily="34" charset="0"/>
-                <a:ea typeface="Open Sans" pitchFamily="34" charset="-122"/>
-                <a:cs typeface="Open Sans" pitchFamily="34" charset="-120"/>
-              </a:rPr>
-              <a:t>Consigliata (≥80), Accettabile (≥60), Poco adatta (≥40), Sconsigliata (&lt;40)</a:t>
-            </a:r>
-            <a:endParaRPr lang="en-US" sz="1000" dirty="0"/>
-          </a:p>
-        </p:txBody>
-      </p:sp>
-      <p:sp>
-        <p:nvSpPr>
-          <p:cNvPr id="27" name="Rettangolo 26">
-            <a:extLst>
-              <a:ext uri="{FF2B5EF4-FFF2-40B4-BE49-F238E27FC236}">
-                <a16:creationId xmlns:a16="http://schemas.microsoft.com/office/drawing/2014/main" id="{DA64EAF0-2E2D-572A-65B8-1C36800F7082}"/>
               </a:ext>
             </a:extLst>
           </p:cNvPr>
@@ -6583,6 +6280,917 @@
 </file>
 
 <file path=ppt/slides/slide8.xml><?xml version="1.0" encoding="utf-8"?>
+<p:sld xmlns:a="http://schemas.openxmlformats.org/drawingml/2006/main" xmlns:r="http://schemas.openxmlformats.org/officeDocument/2006/relationships" xmlns:p="http://schemas.openxmlformats.org/presentationml/2006/main">
+  <p:cSld name="Slide 6">
+    <p:spTree>
+      <p:nvGrpSpPr>
+        <p:cNvPr id="1" name=""/>
+        <p:cNvGrpSpPr/>
+        <p:nvPr/>
+      </p:nvGrpSpPr>
+      <p:grpSpPr>
+        <a:xfrm>
+          <a:off x="0" y="0"/>
+          <a:ext cx="0" cy="0"/>
+          <a:chOff x="0" y="0"/>
+          <a:chExt cx="0" cy="0"/>
+        </a:xfrm>
+      </p:grpSpPr>
+      <p:pic>
+        <p:nvPicPr>
+          <p:cNvPr id="2" name="Image 0" descr="preencoded.png"/>
+          <p:cNvPicPr>
+            <a:picLocks noChangeAspect="1"/>
+          </p:cNvPicPr>
+          <p:nvPr/>
+        </p:nvPicPr>
+        <p:blipFill>
+          <a:blip r:embed="rId3"/>
+          <a:stretch>
+            <a:fillRect/>
+          </a:stretch>
+        </p:blipFill>
+        <p:spPr>
+          <a:xfrm>
+            <a:off x="0" y="0"/>
+            <a:ext cx="4571886" cy="6858000"/>
+          </a:xfrm>
+          <a:prstGeom prst="rect">
+            <a:avLst/>
+          </a:prstGeom>
+        </p:spPr>
+      </p:pic>
+      <p:pic>
+        <p:nvPicPr>
+          <p:cNvPr id="3" name="Image 1" descr="preencoded.png"/>
+          <p:cNvPicPr>
+            <a:picLocks noChangeAspect="1"/>
+          </p:cNvPicPr>
+          <p:nvPr/>
+        </p:nvPicPr>
+        <p:blipFill>
+          <a:blip r:embed="rId4"/>
+          <a:stretch>
+            <a:fillRect/>
+          </a:stretch>
+        </p:blipFill>
+        <p:spPr>
+          <a:xfrm>
+            <a:off x="863578" y="552450"/>
+            <a:ext cx="2844729" cy="5753100"/>
+          </a:xfrm>
+          <a:prstGeom prst="rect">
+            <a:avLst/>
+          </a:prstGeom>
+        </p:spPr>
+      </p:pic>
+      <p:sp>
+        <p:nvSpPr>
+          <p:cNvPr id="4" name="Text 0"/>
+          <p:cNvSpPr/>
+          <p:nvPr/>
+        </p:nvSpPr>
+        <p:spPr>
+          <a:xfrm>
+            <a:off x="5233360" y="519906"/>
+            <a:ext cx="6296860" cy="406003"/>
+          </a:xfrm>
+          <a:prstGeom prst="rect">
+            <a:avLst/>
+          </a:prstGeom>
+          <a:noFill/>
+          <a:ln/>
+        </p:spPr>
+        <p:txBody>
+          <a:bodyPr wrap="none" lIns="0" tIns="0" rIns="0" bIns="0" rtlCol="0" anchor="t"/>
+          <a:lstStyle/>
+          <a:p>
+            <a:pPr marL="0" indent="0" algn="l">
+              <a:lnSpc>
+                <a:spcPct val="104000"/>
+              </a:lnSpc>
+              <a:buNone/>
+            </a:pPr>
+            <a:r>
+              <a:rPr lang="en-US" sz="2550" kern="0" spc="-77" dirty="0">
+                <a:solidFill>
+                  <a:srgbClr val="2C3F42"/>
+                </a:solidFill>
+                <a:latin typeface="Bitter Medium" pitchFamily="34" charset="0"/>
+                <a:ea typeface="Bitter Medium" pitchFamily="34" charset="-122"/>
+                <a:cs typeface="Bitter Medium" pitchFamily="34" charset="-120"/>
+              </a:rPr>
+              <a:t>L'App Android</a:t>
+            </a:r>
+            <a:endParaRPr lang="en-US" sz="2550" dirty="0"/>
+          </a:p>
+        </p:txBody>
+      </p:sp>
+      <p:sp>
+        <p:nvSpPr>
+          <p:cNvPr id="5" name="Text 1"/>
+          <p:cNvSpPr/>
+          <p:nvPr/>
+        </p:nvSpPr>
+        <p:spPr>
+          <a:xfrm>
+            <a:off x="5233360" y="1059855"/>
+            <a:ext cx="6906444" cy="175419"/>
+          </a:xfrm>
+          <a:prstGeom prst="rect">
+            <a:avLst/>
+          </a:prstGeom>
+          <a:noFill/>
+          <a:ln/>
+        </p:spPr>
+        <p:txBody>
+          <a:bodyPr wrap="none" lIns="0" tIns="0" rIns="0" bIns="0" rtlCol="0" anchor="t"/>
+          <a:lstStyle/>
+          <a:p>
+            <a:pPr marL="0" indent="0" algn="l">
+              <a:lnSpc>
+                <a:spcPct val="113000"/>
+              </a:lnSpc>
+              <a:buNone/>
+            </a:pPr>
+            <a:r>
+              <a:rPr lang="en-US" sz="1200" kern="0" spc="-20" dirty="0">
+                <a:solidFill>
+                  <a:srgbClr val="2B2E3C"/>
+                </a:solidFill>
+                <a:latin typeface="Open Sans" pitchFamily="34" charset="0"/>
+                <a:ea typeface="Open Sans" pitchFamily="34" charset="-122"/>
+                <a:cs typeface="Open Sans" pitchFamily="34" charset="-120"/>
+              </a:rPr>
+              <a:t>Un'app nativa in Java/XML che legge da Firebase e ti guida verso l'aula migliore.</a:t>
+            </a:r>
+            <a:endParaRPr lang="en-US" sz="1200" dirty="0"/>
+          </a:p>
+        </p:txBody>
+      </p:sp>
+      <p:sp>
+        <p:nvSpPr>
+          <p:cNvPr id="6" name="Shape 2"/>
+          <p:cNvSpPr/>
+          <p:nvPr/>
+        </p:nvSpPr>
+        <p:spPr>
+          <a:xfrm>
+            <a:off x="5233360" y="1335782"/>
+            <a:ext cx="6296860" cy="1183580"/>
+          </a:xfrm>
+          <a:prstGeom prst="roundRect">
+            <a:avLst>
+              <a:gd name="adj" fmla="val 4611"/>
+            </a:avLst>
+          </a:prstGeom>
+          <a:solidFill>
+            <a:srgbClr val="FCE2CF"/>
+          </a:solidFill>
+          <a:ln w="6350">
+            <a:solidFill>
+              <a:srgbClr val="E2C8B5"/>
+            </a:solidFill>
+            <a:prstDash val="solid"/>
+          </a:ln>
+        </p:spPr>
+        <p:txBody>
+          <a:bodyPr/>
+          <a:lstStyle/>
+          <a:p>
+            <a:endParaRPr lang="it-IT"/>
+          </a:p>
+        </p:txBody>
+      </p:sp>
+      <p:sp>
+        <p:nvSpPr>
+          <p:cNvPr id="7" name="Shape 3"/>
+          <p:cNvSpPr/>
+          <p:nvPr/>
+        </p:nvSpPr>
+        <p:spPr>
+          <a:xfrm>
+            <a:off x="5369584" y="1472009"/>
+            <a:ext cx="389821" cy="389830"/>
+          </a:xfrm>
+          <a:prstGeom prst="ellipse">
+            <a:avLst/>
+          </a:prstGeom>
+          <a:solidFill>
+            <a:srgbClr val="D2600F"/>
+          </a:solidFill>
+          <a:ln/>
+        </p:spPr>
+        <p:txBody>
+          <a:bodyPr/>
+          <a:lstStyle/>
+          <a:p>
+            <a:endParaRPr lang="it-IT"/>
+          </a:p>
+        </p:txBody>
+      </p:sp>
+      <p:pic>
+        <p:nvPicPr>
+          <p:cNvPr id="8" name="Image 2" descr="preencoded.png"/>
+          <p:cNvPicPr>
+            <a:picLocks noChangeAspect="1"/>
+          </p:cNvPicPr>
+          <p:nvPr/>
+        </p:nvPicPr>
+        <p:blipFill>
+          <a:blip>
+            <a:extLst>
+              <a:ext uri="{96DAC541-7B7A-43D3-8B79-37D633B846F1}">
+                <asvg:svgBlip xmlns:asvg="http://schemas.microsoft.com/office/drawing/2016/SVG/main" r:embed="rId5"/>
+              </a:ext>
+            </a:extLst>
+          </a:blip>
+          <a:stretch>
+            <a:fillRect/>
+          </a:stretch>
+        </p:blipFill>
+        <p:spPr>
+          <a:xfrm>
+            <a:off x="5476738" y="1579166"/>
+            <a:ext cx="175414" cy="175419"/>
+          </a:xfrm>
+          <a:prstGeom prst="rect">
+            <a:avLst/>
+          </a:prstGeom>
+        </p:spPr>
+      </p:pic>
+      <p:sp>
+        <p:nvSpPr>
+          <p:cNvPr id="9" name="Text 4"/>
+          <p:cNvSpPr/>
+          <p:nvPr/>
+        </p:nvSpPr>
+        <p:spPr>
+          <a:xfrm>
+            <a:off x="5369584" y="1951137"/>
+            <a:ext cx="6024412" cy="203002"/>
+          </a:xfrm>
+          <a:prstGeom prst="rect">
+            <a:avLst/>
+          </a:prstGeom>
+          <a:noFill/>
+          <a:ln/>
+        </p:spPr>
+        <p:txBody>
+          <a:bodyPr wrap="none" lIns="0" tIns="0" rIns="0" bIns="0" rtlCol="0" anchor="t"/>
+          <a:lstStyle/>
+          <a:p>
+            <a:pPr marL="0" indent="0" algn="l">
+              <a:lnSpc>
+                <a:spcPct val="104000"/>
+              </a:lnSpc>
+              <a:buNone/>
+            </a:pPr>
+            <a:r>
+              <a:rPr lang="en-US" sz="1250" kern="0" spc="-38" dirty="0">
+                <a:solidFill>
+                  <a:srgbClr val="2B2E3C"/>
+                </a:solidFill>
+                <a:latin typeface="Bitter Medium" pitchFamily="34" charset="0"/>
+                <a:ea typeface="Bitter Medium" pitchFamily="34" charset="-122"/>
+                <a:cs typeface="Bitter Medium" pitchFamily="34" charset="-120"/>
+              </a:rPr>
+              <a:t>Score in Tempo Reale</a:t>
+            </a:r>
+            <a:endParaRPr lang="en-US" sz="1250" dirty="0"/>
+          </a:p>
+        </p:txBody>
+      </p:sp>
+      <p:sp>
+        <p:nvSpPr>
+          <p:cNvPr id="10" name="Text 5"/>
+          <p:cNvSpPr/>
+          <p:nvPr/>
+        </p:nvSpPr>
+        <p:spPr>
+          <a:xfrm>
+            <a:off x="5369584" y="2207716"/>
+            <a:ext cx="6024412" cy="175419"/>
+          </a:xfrm>
+          <a:prstGeom prst="rect">
+            <a:avLst/>
+          </a:prstGeom>
+          <a:noFill/>
+          <a:ln/>
+        </p:spPr>
+        <p:txBody>
+          <a:bodyPr wrap="none" lIns="0" tIns="0" rIns="0" bIns="0" rtlCol="0" anchor="t"/>
+          <a:lstStyle/>
+          <a:p>
+            <a:pPr marL="0" indent="0" algn="l">
+              <a:lnSpc>
+                <a:spcPct val="113000"/>
+              </a:lnSpc>
+              <a:buNone/>
+            </a:pPr>
+            <a:r>
+              <a:rPr lang="en-US" sz="1000" kern="0" spc="-20" dirty="0">
+                <a:solidFill>
+                  <a:srgbClr val="2B2E3C"/>
+                </a:solidFill>
+                <a:latin typeface="Open Sans" pitchFamily="34" charset="0"/>
+                <a:ea typeface="Open Sans" pitchFamily="34" charset="-122"/>
+                <a:cs typeface="Open Sans" pitchFamily="34" charset="-120"/>
+              </a:rPr>
+              <a:t>Calcolato da temperatura, umidità e rumore con pesi personalizzabili</a:t>
+            </a:r>
+            <a:endParaRPr lang="en-US" sz="1000" dirty="0"/>
+          </a:p>
+        </p:txBody>
+      </p:sp>
+      <p:sp>
+        <p:nvSpPr>
+          <p:cNvPr id="11" name="Shape 6"/>
+          <p:cNvSpPr/>
+          <p:nvPr/>
+        </p:nvSpPr>
+        <p:spPr>
+          <a:xfrm>
+            <a:off x="5233360" y="2608659"/>
+            <a:ext cx="6296860" cy="1183580"/>
+          </a:xfrm>
+          <a:prstGeom prst="roundRect">
+            <a:avLst>
+              <a:gd name="adj" fmla="val 4611"/>
+            </a:avLst>
+          </a:prstGeom>
+          <a:solidFill>
+            <a:srgbClr val="FCE2CF"/>
+          </a:solidFill>
+          <a:ln w="6350">
+            <a:solidFill>
+              <a:srgbClr val="E2C8B5"/>
+            </a:solidFill>
+            <a:prstDash val="solid"/>
+          </a:ln>
+        </p:spPr>
+        <p:txBody>
+          <a:bodyPr/>
+          <a:lstStyle/>
+          <a:p>
+            <a:endParaRPr lang="it-IT"/>
+          </a:p>
+        </p:txBody>
+      </p:sp>
+      <p:sp>
+        <p:nvSpPr>
+          <p:cNvPr id="12" name="Shape 7"/>
+          <p:cNvSpPr/>
+          <p:nvPr/>
+        </p:nvSpPr>
+        <p:spPr>
+          <a:xfrm>
+            <a:off x="5369584" y="2744887"/>
+            <a:ext cx="389821" cy="389830"/>
+          </a:xfrm>
+          <a:prstGeom prst="ellipse">
+            <a:avLst/>
+          </a:prstGeom>
+          <a:solidFill>
+            <a:srgbClr val="D2600F"/>
+          </a:solidFill>
+          <a:ln/>
+        </p:spPr>
+        <p:txBody>
+          <a:bodyPr/>
+          <a:lstStyle/>
+          <a:p>
+            <a:endParaRPr lang="it-IT"/>
+          </a:p>
+        </p:txBody>
+      </p:sp>
+      <p:pic>
+        <p:nvPicPr>
+          <p:cNvPr id="13" name="Image 3" descr="preencoded.png"/>
+          <p:cNvPicPr>
+            <a:picLocks noChangeAspect="1"/>
+          </p:cNvPicPr>
+          <p:nvPr/>
+        </p:nvPicPr>
+        <p:blipFill>
+          <a:blip>
+            <a:extLst>
+              <a:ext uri="{96DAC541-7B7A-43D3-8B79-37D633B846F1}">
+                <asvg:svgBlip xmlns:asvg="http://schemas.microsoft.com/office/drawing/2016/SVG/main" r:embed="rId6"/>
+              </a:ext>
+            </a:extLst>
+          </a:blip>
+          <a:stretch>
+            <a:fillRect/>
+          </a:stretch>
+        </p:blipFill>
+        <p:spPr>
+          <a:xfrm>
+            <a:off x="5476738" y="2852043"/>
+            <a:ext cx="175414" cy="175419"/>
+          </a:xfrm>
+          <a:prstGeom prst="rect">
+            <a:avLst/>
+          </a:prstGeom>
+        </p:spPr>
+      </p:pic>
+      <p:sp>
+        <p:nvSpPr>
+          <p:cNvPr id="14" name="Text 8"/>
+          <p:cNvSpPr/>
+          <p:nvPr/>
+        </p:nvSpPr>
+        <p:spPr>
+          <a:xfrm>
+            <a:off x="5369584" y="3224014"/>
+            <a:ext cx="6024412" cy="203002"/>
+          </a:xfrm>
+          <a:prstGeom prst="rect">
+            <a:avLst/>
+          </a:prstGeom>
+          <a:noFill/>
+          <a:ln/>
+        </p:spPr>
+        <p:txBody>
+          <a:bodyPr wrap="none" lIns="0" tIns="0" rIns="0" bIns="0" rtlCol="0" anchor="t"/>
+          <a:lstStyle/>
+          <a:p>
+            <a:pPr marL="0" indent="0" algn="l">
+              <a:lnSpc>
+                <a:spcPct val="104000"/>
+              </a:lnSpc>
+              <a:buNone/>
+            </a:pPr>
+            <a:r>
+              <a:rPr lang="en-US" sz="1250" kern="0" spc="-38" dirty="0">
+                <a:solidFill>
+                  <a:srgbClr val="2B2E3C"/>
+                </a:solidFill>
+                <a:latin typeface="Bitter Medium" pitchFamily="34" charset="0"/>
+                <a:ea typeface="Bitter Medium" pitchFamily="34" charset="-122"/>
+                <a:cs typeface="Bitter Medium" pitchFamily="34" charset="-120"/>
+              </a:rPr>
+              <a:t>Notifiche Intelligenti</a:t>
+            </a:r>
+            <a:endParaRPr lang="en-US" sz="1250" dirty="0"/>
+          </a:p>
+        </p:txBody>
+      </p:sp>
+      <p:sp>
+        <p:nvSpPr>
+          <p:cNvPr id="15" name="Text 9"/>
+          <p:cNvSpPr/>
+          <p:nvPr/>
+        </p:nvSpPr>
+        <p:spPr>
+          <a:xfrm>
+            <a:off x="5369584" y="3480594"/>
+            <a:ext cx="6024412" cy="175419"/>
+          </a:xfrm>
+          <a:prstGeom prst="rect">
+            <a:avLst/>
+          </a:prstGeom>
+          <a:noFill/>
+          <a:ln/>
+        </p:spPr>
+        <p:txBody>
+          <a:bodyPr wrap="none" lIns="0" tIns="0" rIns="0" bIns="0" rtlCol="0" anchor="t"/>
+          <a:lstStyle/>
+          <a:p>
+            <a:pPr marL="0" indent="0" algn="l">
+              <a:lnSpc>
+                <a:spcPct val="113000"/>
+              </a:lnSpc>
+              <a:buNone/>
+            </a:pPr>
+            <a:r>
+              <a:rPr lang="en-US" sz="1000" kern="0" spc="-20" dirty="0">
+                <a:solidFill>
+                  <a:srgbClr val="2B2E3C"/>
+                </a:solidFill>
+                <a:latin typeface="Open Sans" pitchFamily="34" charset="0"/>
+                <a:ea typeface="Open Sans" pitchFamily="34" charset="-122"/>
+                <a:cs typeface="Open Sans" pitchFamily="34" charset="-120"/>
+              </a:rPr>
+              <a:t>Avviso quando il rumore supera 30 dB, silenziato automaticamente sotto 20 dB</a:t>
+            </a:r>
+            <a:endParaRPr lang="en-US" sz="1000" dirty="0"/>
+          </a:p>
+        </p:txBody>
+      </p:sp>
+      <p:sp>
+        <p:nvSpPr>
+          <p:cNvPr id="16" name="Shape 10"/>
+          <p:cNvSpPr/>
+          <p:nvPr/>
+        </p:nvSpPr>
+        <p:spPr>
+          <a:xfrm>
+            <a:off x="5233360" y="3881537"/>
+            <a:ext cx="6296860" cy="1183580"/>
+          </a:xfrm>
+          <a:prstGeom prst="roundRect">
+            <a:avLst>
+              <a:gd name="adj" fmla="val 4611"/>
+            </a:avLst>
+          </a:prstGeom>
+          <a:solidFill>
+            <a:srgbClr val="FCE2CF"/>
+          </a:solidFill>
+          <a:ln w="6350">
+            <a:solidFill>
+              <a:srgbClr val="E2C8B5"/>
+            </a:solidFill>
+            <a:prstDash val="solid"/>
+          </a:ln>
+        </p:spPr>
+        <p:txBody>
+          <a:bodyPr/>
+          <a:lstStyle/>
+          <a:p>
+            <a:endParaRPr lang="it-IT"/>
+          </a:p>
+        </p:txBody>
+      </p:sp>
+      <p:sp>
+        <p:nvSpPr>
+          <p:cNvPr id="17" name="Shape 11"/>
+          <p:cNvSpPr/>
+          <p:nvPr/>
+        </p:nvSpPr>
+        <p:spPr>
+          <a:xfrm>
+            <a:off x="5369584" y="4017764"/>
+            <a:ext cx="389821" cy="389830"/>
+          </a:xfrm>
+          <a:prstGeom prst="ellipse">
+            <a:avLst/>
+          </a:prstGeom>
+          <a:solidFill>
+            <a:srgbClr val="D2600F"/>
+          </a:solidFill>
+          <a:ln/>
+        </p:spPr>
+        <p:txBody>
+          <a:bodyPr/>
+          <a:lstStyle/>
+          <a:p>
+            <a:endParaRPr lang="it-IT"/>
+          </a:p>
+        </p:txBody>
+      </p:sp>
+      <p:pic>
+        <p:nvPicPr>
+          <p:cNvPr id="18" name="Image 4" descr="preencoded.png"/>
+          <p:cNvPicPr>
+            <a:picLocks noChangeAspect="1"/>
+          </p:cNvPicPr>
+          <p:nvPr/>
+        </p:nvPicPr>
+        <p:blipFill>
+          <a:blip>
+            <a:extLst>
+              <a:ext uri="{96DAC541-7B7A-43D3-8B79-37D633B846F1}">
+                <asvg:svgBlip xmlns:asvg="http://schemas.microsoft.com/office/drawing/2016/SVG/main" r:embed="rId7"/>
+              </a:ext>
+            </a:extLst>
+          </a:blip>
+          <a:stretch>
+            <a:fillRect/>
+          </a:stretch>
+        </p:blipFill>
+        <p:spPr>
+          <a:xfrm>
+            <a:off x="5476738" y="4124920"/>
+            <a:ext cx="175414" cy="175419"/>
+          </a:xfrm>
+          <a:prstGeom prst="rect">
+            <a:avLst/>
+          </a:prstGeom>
+        </p:spPr>
+      </p:pic>
+      <p:sp>
+        <p:nvSpPr>
+          <p:cNvPr id="19" name="Text 12"/>
+          <p:cNvSpPr/>
+          <p:nvPr/>
+        </p:nvSpPr>
+        <p:spPr>
+          <a:xfrm>
+            <a:off x="5369584" y="4496891"/>
+            <a:ext cx="6024412" cy="203002"/>
+          </a:xfrm>
+          <a:prstGeom prst="rect">
+            <a:avLst/>
+          </a:prstGeom>
+          <a:noFill/>
+          <a:ln/>
+        </p:spPr>
+        <p:txBody>
+          <a:bodyPr wrap="none" lIns="0" tIns="0" rIns="0" bIns="0" rtlCol="0" anchor="t"/>
+          <a:lstStyle/>
+          <a:p>
+            <a:pPr marL="0" indent="0" algn="l">
+              <a:lnSpc>
+                <a:spcPct val="104000"/>
+              </a:lnSpc>
+              <a:buNone/>
+            </a:pPr>
+            <a:r>
+              <a:rPr lang="en-US" sz="1250" kern="0" spc="-38" dirty="0">
+                <a:solidFill>
+                  <a:srgbClr val="2B2E3C"/>
+                </a:solidFill>
+                <a:latin typeface="Bitter Medium" pitchFamily="34" charset="0"/>
+                <a:ea typeface="Bitter Medium" pitchFamily="34" charset="-122"/>
+                <a:cs typeface="Bitter Medium" pitchFamily="34" charset="-120"/>
+              </a:rPr>
+              <a:t>Preferenze Utente</a:t>
+            </a:r>
+            <a:endParaRPr lang="en-US" sz="1250" dirty="0"/>
+          </a:p>
+        </p:txBody>
+      </p:sp>
+      <p:sp>
+        <p:nvSpPr>
+          <p:cNvPr id="20" name="Text 13"/>
+          <p:cNvSpPr/>
+          <p:nvPr/>
+        </p:nvSpPr>
+        <p:spPr>
+          <a:xfrm>
+            <a:off x="5369584" y="4753471"/>
+            <a:ext cx="6024412" cy="175419"/>
+          </a:xfrm>
+          <a:prstGeom prst="rect">
+            <a:avLst/>
+          </a:prstGeom>
+          <a:noFill/>
+          <a:ln/>
+        </p:spPr>
+        <p:txBody>
+          <a:bodyPr wrap="none" lIns="0" tIns="0" rIns="0" bIns="0" rtlCol="0" anchor="t"/>
+          <a:lstStyle/>
+          <a:p>
+            <a:pPr marL="0" indent="0" algn="l">
+              <a:lnSpc>
+                <a:spcPct val="113000"/>
+              </a:lnSpc>
+              <a:buNone/>
+            </a:pPr>
+            <a:r>
+              <a:rPr lang="en-US" sz="1000" kern="0" spc="-20" dirty="0">
+                <a:solidFill>
+                  <a:srgbClr val="2B2E3C"/>
+                </a:solidFill>
+                <a:latin typeface="Open Sans" pitchFamily="34" charset="0"/>
+                <a:ea typeface="Open Sans" pitchFamily="34" charset="-122"/>
+                <a:cs typeface="Open Sans" pitchFamily="34" charset="-120"/>
+              </a:rPr>
+              <a:t>Bilanciata, Priorità Silenzio o Priorità Comfort: i pesi dello score si adattano</a:t>
+            </a:r>
+            <a:endParaRPr lang="en-US" sz="1000" dirty="0"/>
+          </a:p>
+        </p:txBody>
+      </p:sp>
+      <p:sp>
+        <p:nvSpPr>
+          <p:cNvPr id="21" name="Shape 14"/>
+          <p:cNvSpPr/>
+          <p:nvPr/>
+        </p:nvSpPr>
+        <p:spPr>
+          <a:xfrm>
+            <a:off x="5233360" y="5154414"/>
+            <a:ext cx="6296860" cy="1183580"/>
+          </a:xfrm>
+          <a:prstGeom prst="roundRect">
+            <a:avLst>
+              <a:gd name="adj" fmla="val 4611"/>
+            </a:avLst>
+          </a:prstGeom>
+          <a:solidFill>
+            <a:srgbClr val="FCE2CF"/>
+          </a:solidFill>
+          <a:ln w="6350">
+            <a:solidFill>
+              <a:srgbClr val="E2C8B5"/>
+            </a:solidFill>
+            <a:prstDash val="solid"/>
+          </a:ln>
+        </p:spPr>
+        <p:txBody>
+          <a:bodyPr/>
+          <a:lstStyle/>
+          <a:p>
+            <a:endParaRPr lang="it-IT"/>
+          </a:p>
+        </p:txBody>
+      </p:sp>
+      <p:sp>
+        <p:nvSpPr>
+          <p:cNvPr id="22" name="Shape 15"/>
+          <p:cNvSpPr/>
+          <p:nvPr/>
+        </p:nvSpPr>
+        <p:spPr>
+          <a:xfrm>
+            <a:off x="5369584" y="5290641"/>
+            <a:ext cx="389821" cy="389830"/>
+          </a:xfrm>
+          <a:prstGeom prst="ellipse">
+            <a:avLst/>
+          </a:prstGeom>
+          <a:solidFill>
+            <a:srgbClr val="D2600F"/>
+          </a:solidFill>
+          <a:ln/>
+        </p:spPr>
+        <p:txBody>
+          <a:bodyPr/>
+          <a:lstStyle/>
+          <a:p>
+            <a:endParaRPr lang="it-IT"/>
+          </a:p>
+        </p:txBody>
+      </p:sp>
+      <p:pic>
+        <p:nvPicPr>
+          <p:cNvPr id="23" name="Image 5" descr="preencoded.png"/>
+          <p:cNvPicPr>
+            <a:picLocks noChangeAspect="1"/>
+          </p:cNvPicPr>
+          <p:nvPr/>
+        </p:nvPicPr>
+        <p:blipFill>
+          <a:blip>
+            <a:extLst>
+              <a:ext uri="{96DAC541-7B7A-43D3-8B79-37D633B846F1}">
+                <asvg:svgBlip xmlns:asvg="http://schemas.microsoft.com/office/drawing/2016/SVG/main" r:embed="rId8"/>
+              </a:ext>
+            </a:extLst>
+          </a:blip>
+          <a:stretch>
+            <a:fillRect/>
+          </a:stretch>
+        </p:blipFill>
+        <p:spPr>
+          <a:xfrm>
+            <a:off x="5476738" y="5397798"/>
+            <a:ext cx="175414" cy="175419"/>
+          </a:xfrm>
+          <a:prstGeom prst="rect">
+            <a:avLst/>
+          </a:prstGeom>
+        </p:spPr>
+      </p:pic>
+      <p:sp>
+        <p:nvSpPr>
+          <p:cNvPr id="24" name="Text 16"/>
+          <p:cNvSpPr/>
+          <p:nvPr/>
+        </p:nvSpPr>
+        <p:spPr>
+          <a:xfrm>
+            <a:off x="5369584" y="5769769"/>
+            <a:ext cx="6024412" cy="203002"/>
+          </a:xfrm>
+          <a:prstGeom prst="rect">
+            <a:avLst/>
+          </a:prstGeom>
+          <a:noFill/>
+          <a:ln/>
+        </p:spPr>
+        <p:txBody>
+          <a:bodyPr wrap="none" lIns="0" tIns="0" rIns="0" bIns="0" rtlCol="0" anchor="t"/>
+          <a:lstStyle/>
+          <a:p>
+            <a:pPr marL="0" indent="0" algn="l">
+              <a:lnSpc>
+                <a:spcPct val="104000"/>
+              </a:lnSpc>
+              <a:buNone/>
+            </a:pPr>
+            <a:r>
+              <a:rPr lang="en-US" sz="1250" kern="0" spc="-38" dirty="0">
+                <a:solidFill>
+                  <a:srgbClr val="2B2E3C"/>
+                </a:solidFill>
+                <a:latin typeface="Bitter Medium" pitchFamily="34" charset="0"/>
+                <a:ea typeface="Bitter Medium" pitchFamily="34" charset="-122"/>
+                <a:cs typeface="Bitter Medium" pitchFamily="34" charset="-120"/>
+              </a:rPr>
+              <a:t>Classificazione Aule</a:t>
+            </a:r>
+            <a:endParaRPr lang="en-US" sz="1250" dirty="0"/>
+          </a:p>
+        </p:txBody>
+      </p:sp>
+      <p:sp>
+        <p:nvSpPr>
+          <p:cNvPr id="25" name="Text 17"/>
+          <p:cNvSpPr/>
+          <p:nvPr/>
+        </p:nvSpPr>
+        <p:spPr>
+          <a:xfrm>
+            <a:off x="5369584" y="6026348"/>
+            <a:ext cx="6024412" cy="175419"/>
+          </a:xfrm>
+          <a:prstGeom prst="rect">
+            <a:avLst/>
+          </a:prstGeom>
+          <a:noFill/>
+          <a:ln/>
+        </p:spPr>
+        <p:txBody>
+          <a:bodyPr wrap="none" lIns="0" tIns="0" rIns="0" bIns="0" rtlCol="0" anchor="t"/>
+          <a:lstStyle/>
+          <a:p>
+            <a:pPr marL="0" indent="0" algn="l">
+              <a:lnSpc>
+                <a:spcPct val="113000"/>
+              </a:lnSpc>
+              <a:buNone/>
+            </a:pPr>
+            <a:r>
+              <a:rPr lang="en-US" sz="1000" kern="0" spc="-20" dirty="0">
+                <a:solidFill>
+                  <a:srgbClr val="2B2E3C"/>
+                </a:solidFill>
+                <a:latin typeface="Open Sans" pitchFamily="34" charset="0"/>
+                <a:ea typeface="Open Sans" pitchFamily="34" charset="-122"/>
+                <a:cs typeface="Open Sans" pitchFamily="34" charset="-120"/>
+              </a:rPr>
+              <a:t>Consigliata (≥80), Accettabile (≥60), Poco adatta (≥40), Sconsigliata (&lt;40)</a:t>
+            </a:r>
+            <a:endParaRPr lang="en-US" sz="1000" dirty="0"/>
+          </a:p>
+        </p:txBody>
+      </p:sp>
+      <p:sp>
+        <p:nvSpPr>
+          <p:cNvPr id="27" name="Rettangolo 26">
+            <a:extLst>
+              <a:ext uri="{FF2B5EF4-FFF2-40B4-BE49-F238E27FC236}">
+                <a16:creationId xmlns:a16="http://schemas.microsoft.com/office/drawing/2014/main" id="{DA64EAF0-2E2D-572A-65B8-1C36800F7082}"/>
+              </a:ext>
+            </a:extLst>
+          </p:cNvPr>
+          <p:cNvSpPr/>
+          <p:nvPr/>
+        </p:nvSpPr>
+        <p:spPr>
+          <a:xfrm>
+            <a:off x="10961052" y="6559422"/>
+            <a:ext cx="1138335" cy="223934"/>
+          </a:xfrm>
+          <a:prstGeom prst="rect">
+            <a:avLst/>
+          </a:prstGeom>
+          <a:solidFill>
+            <a:srgbClr val="FFF8F0"/>
+          </a:solidFill>
+          <a:ln>
+            <a:solidFill>
+              <a:srgbClr val="FFF8F0"/>
+            </a:solidFill>
+          </a:ln>
+        </p:spPr>
+        <p:style>
+          <a:lnRef idx="2">
+            <a:schemeClr val="accent1">
+              <a:shade val="15000"/>
+            </a:schemeClr>
+          </a:lnRef>
+          <a:fillRef idx="1">
+            <a:schemeClr val="accent1"/>
+          </a:fillRef>
+          <a:effectRef idx="0">
+            <a:schemeClr val="accent1"/>
+          </a:effectRef>
+          <a:fontRef idx="minor">
+            <a:schemeClr val="lt1"/>
+          </a:fontRef>
+        </p:style>
+        <p:txBody>
+          <a:bodyPr rtlCol="0" anchor="ctr"/>
+          <a:lstStyle/>
+          <a:p>
+            <a:pPr algn="ctr"/>
+            <a:endParaRPr lang="it-IT"/>
+          </a:p>
+        </p:txBody>
+      </p:sp>
+    </p:spTree>
+  </p:cSld>
+  <p:clrMapOvr>
+    <a:masterClrMapping/>
+  </p:clrMapOvr>
+</p:sld>
+</file>
+
+<file path=ppt/slides/slide9.xml><?xml version="1.0" encoding="utf-8"?>
 <p:sld xmlns:a="http://schemas.openxmlformats.org/drawingml/2006/main" xmlns:r="http://schemas.openxmlformats.org/officeDocument/2006/relationships" xmlns:p="http://schemas.openxmlformats.org/presentationml/2006/main">
   <p:cSld name="Slide 8">
     <p:spTree>
@@ -7322,614 +7930,6 @@
             <a:extLst>
               <a:ext uri="{FF2B5EF4-FFF2-40B4-BE49-F238E27FC236}">
                 <a16:creationId xmlns:a16="http://schemas.microsoft.com/office/drawing/2014/main" id="{C8EB2CC5-052E-61C8-08AD-4DA21E17D649}"/>
-              </a:ext>
-            </a:extLst>
-          </p:cNvPr>
-          <p:cNvSpPr/>
-          <p:nvPr/>
-        </p:nvSpPr>
-        <p:spPr>
-          <a:xfrm>
-            <a:off x="10961052" y="6559422"/>
-            <a:ext cx="1138335" cy="223934"/>
-          </a:xfrm>
-          <a:prstGeom prst="rect">
-            <a:avLst/>
-          </a:prstGeom>
-          <a:solidFill>
-            <a:srgbClr val="FFF8F0"/>
-          </a:solidFill>
-          <a:ln>
-            <a:solidFill>
-              <a:srgbClr val="FFF8F0"/>
-            </a:solidFill>
-          </a:ln>
-        </p:spPr>
-        <p:style>
-          <a:lnRef idx="2">
-            <a:schemeClr val="accent1">
-              <a:shade val="15000"/>
-            </a:schemeClr>
-          </a:lnRef>
-          <a:fillRef idx="1">
-            <a:schemeClr val="accent1"/>
-          </a:fillRef>
-          <a:effectRef idx="0">
-            <a:schemeClr val="accent1"/>
-          </a:effectRef>
-          <a:fontRef idx="minor">
-            <a:schemeClr val="lt1"/>
-          </a:fontRef>
-        </p:style>
-        <p:txBody>
-          <a:bodyPr rtlCol="0" anchor="ctr"/>
-          <a:lstStyle/>
-          <a:p>
-            <a:pPr algn="ctr"/>
-            <a:endParaRPr lang="it-IT"/>
-          </a:p>
-        </p:txBody>
-      </p:sp>
-    </p:spTree>
-  </p:cSld>
-  <p:clrMapOvr>
-    <a:masterClrMapping/>
-  </p:clrMapOvr>
-</p:sld>
-</file>
-
-<file path=ppt/slides/slide9.xml><?xml version="1.0" encoding="utf-8"?>
-<p:sld xmlns:a="http://schemas.openxmlformats.org/drawingml/2006/main" xmlns:r="http://schemas.openxmlformats.org/officeDocument/2006/relationships" xmlns:p="http://schemas.openxmlformats.org/presentationml/2006/main">
-  <p:cSld name="Slide 9">
-    <p:spTree>
-      <p:nvGrpSpPr>
-        <p:cNvPr id="1" name=""/>
-        <p:cNvGrpSpPr/>
-        <p:nvPr/>
-      </p:nvGrpSpPr>
-      <p:grpSpPr>
-        <a:xfrm>
-          <a:off x="0" y="0"/>
-          <a:ext cx="0" cy="0"/>
-          <a:chOff x="0" y="0"/>
-          <a:chExt cx="0" cy="0"/>
-        </a:xfrm>
-      </p:grpSpPr>
-      <p:sp>
-        <p:nvSpPr>
-          <p:cNvPr id="2" name="Text 0"/>
-          <p:cNvSpPr/>
-          <p:nvPr/>
-        </p:nvSpPr>
-        <p:spPr>
-          <a:xfrm>
-            <a:off x="661475" y="1213743"/>
-            <a:ext cx="10868745" cy="590649"/>
-          </a:xfrm>
-          <a:prstGeom prst="rect">
-            <a:avLst/>
-          </a:prstGeom>
-          <a:noFill/>
-          <a:ln/>
-        </p:spPr>
-        <p:txBody>
-          <a:bodyPr wrap="none" lIns="0" tIns="0" rIns="0" bIns="0" rtlCol="0" anchor="t"/>
-          <a:lstStyle/>
-          <a:p>
-            <a:pPr marL="0" indent="0" algn="l">
-              <a:lnSpc>
-                <a:spcPct val="104000"/>
-              </a:lnSpc>
-              <a:buNone/>
-            </a:pPr>
-            <a:r>
-              <a:rPr lang="en-US" sz="3700" kern="0" spc="-112" dirty="0">
-                <a:solidFill>
-                  <a:srgbClr val="2C3F42"/>
-                </a:solidFill>
-                <a:latin typeface="Bitter Medium" pitchFamily="34" charset="0"/>
-                <a:ea typeface="Bitter Medium" pitchFamily="34" charset="-122"/>
-                <a:cs typeface="Bitter Medium" pitchFamily="34" charset="-120"/>
-              </a:rPr>
-              <a:t>Roadmap: Cosa Viene Dopo</a:t>
-            </a:r>
-            <a:endParaRPr lang="en-US" sz="3700" dirty="0"/>
-          </a:p>
-        </p:txBody>
-      </p:sp>
-      <p:sp>
-        <p:nvSpPr>
-          <p:cNvPr id="3" name="Text 1"/>
-          <p:cNvSpPr/>
-          <p:nvPr/>
-        </p:nvSpPr>
-        <p:spPr>
-          <a:xfrm>
-            <a:off x="661475" y="1931987"/>
-            <a:ext cx="11478330" cy="302419"/>
-          </a:xfrm>
-          <a:prstGeom prst="rect">
-            <a:avLst/>
-          </a:prstGeom>
-          <a:noFill/>
-          <a:ln/>
-        </p:spPr>
-        <p:txBody>
-          <a:bodyPr wrap="none" lIns="0" tIns="0" rIns="0" bIns="0" rtlCol="0" anchor="t"/>
-          <a:lstStyle/>
-          <a:p>
-            <a:pPr marL="0" indent="0" algn="l">
-              <a:lnSpc>
-                <a:spcPct val="133000"/>
-              </a:lnSpc>
-              <a:buNone/>
-            </a:pPr>
-            <a:r>
-              <a:rPr lang="en-US" sz="1450" kern="0" spc="-30" dirty="0">
-                <a:solidFill>
-                  <a:srgbClr val="2B2E3C"/>
-                </a:solidFill>
-                <a:latin typeface="Open Sans" pitchFamily="34" charset="0"/>
-                <a:ea typeface="Open Sans" pitchFamily="34" charset="-122"/>
-                <a:cs typeface="Open Sans" pitchFamily="34" charset="-120"/>
-              </a:rPr>
-              <a:t>Smart Study Rooms è già un buon prototipo e ha tutte le carte in regola per diventare un prodotto completo.</a:t>
-            </a:r>
-            <a:endParaRPr lang="en-US" sz="1450" dirty="0"/>
-          </a:p>
-        </p:txBody>
-      </p:sp>
-      <p:pic>
-        <p:nvPicPr>
-          <p:cNvPr id="4" name="Image 0" descr="preencoded.png"/>
-          <p:cNvPicPr>
-            <a:picLocks noChangeAspect="1"/>
-          </p:cNvPicPr>
-          <p:nvPr/>
-        </p:nvPicPr>
-        <p:blipFill>
-          <a:blip r:embed="rId3"/>
-          <a:stretch>
-            <a:fillRect/>
-          </a:stretch>
-        </p:blipFill>
-        <p:spPr>
-          <a:xfrm>
-            <a:off x="661475" y="2697460"/>
-            <a:ext cx="1117572" cy="690662"/>
-          </a:xfrm>
-          <a:prstGeom prst="rect">
-            <a:avLst/>
-          </a:prstGeom>
-        </p:spPr>
-      </p:pic>
-      <p:sp>
-        <p:nvSpPr>
-          <p:cNvPr id="5" name="Text 2"/>
-          <p:cNvSpPr/>
-          <p:nvPr/>
-        </p:nvSpPr>
-        <p:spPr>
-          <a:xfrm>
-            <a:off x="661475" y="3624362"/>
-            <a:ext cx="2539936" cy="295275"/>
-          </a:xfrm>
-          <a:prstGeom prst="rect">
-            <a:avLst/>
-          </a:prstGeom>
-          <a:noFill/>
-          <a:ln/>
-        </p:spPr>
-        <p:txBody>
-          <a:bodyPr wrap="none" lIns="0" tIns="0" rIns="0" bIns="0" rtlCol="0" anchor="t"/>
-          <a:lstStyle/>
-          <a:p>
-            <a:pPr marL="0" indent="0" algn="l">
-              <a:lnSpc>
-                <a:spcPct val="104000"/>
-              </a:lnSpc>
-              <a:buNone/>
-            </a:pPr>
-            <a:r>
-              <a:rPr lang="en-US" sz="1850" kern="0" spc="-56" dirty="0">
-                <a:solidFill>
-                  <a:srgbClr val="2B2E3C"/>
-                </a:solidFill>
-                <a:latin typeface="Bitter Medium" pitchFamily="34" charset="0"/>
-                <a:ea typeface="Bitter Medium" pitchFamily="34" charset="-122"/>
-                <a:cs typeface="Bitter Medium" pitchFamily="34" charset="-120"/>
-              </a:rPr>
-              <a:t>Gateway Dedicato</a:t>
-            </a:r>
-            <a:endParaRPr lang="en-US" sz="1850" dirty="0"/>
-          </a:p>
-        </p:txBody>
-      </p:sp>
-      <p:sp>
-        <p:nvSpPr>
-          <p:cNvPr id="6" name="Text 3"/>
-          <p:cNvSpPr/>
-          <p:nvPr/>
-        </p:nvSpPr>
-        <p:spPr>
-          <a:xfrm>
-            <a:off x="661475" y="4033044"/>
-            <a:ext cx="2539936" cy="907256"/>
-          </a:xfrm>
-          <a:prstGeom prst="rect">
-            <a:avLst/>
-          </a:prstGeom>
-          <a:noFill/>
-          <a:ln/>
-        </p:spPr>
-        <p:txBody>
-          <a:bodyPr wrap="square" lIns="0" tIns="0" rIns="0" bIns="0" rtlCol="0" anchor="t">
-            <a:normAutofit/>
-          </a:bodyPr>
-          <a:lstStyle/>
-          <a:p>
-            <a:pPr marL="0" indent="0" algn="l">
-              <a:lnSpc>
-                <a:spcPct val="133000"/>
-              </a:lnSpc>
-              <a:buNone/>
-            </a:pPr>
-            <a:r>
-              <a:rPr lang="en-US" sz="1450" kern="0" spc="-30" dirty="0">
-                <a:solidFill>
-                  <a:srgbClr val="2B2E3C"/>
-                </a:solidFill>
-                <a:latin typeface="Open Sans" pitchFamily="34" charset="0"/>
-                <a:ea typeface="Open Sans" pitchFamily="34" charset="-122"/>
-                <a:cs typeface="Open Sans" pitchFamily="34" charset="-120"/>
-              </a:rPr>
-              <a:t>Bridge su Raspberry Pi sempre acceso, indipendente dal PC</a:t>
-            </a:r>
-            <a:endParaRPr lang="en-US" sz="1450" dirty="0"/>
-          </a:p>
-        </p:txBody>
-      </p:sp>
-      <p:pic>
-        <p:nvPicPr>
-          <p:cNvPr id="7" name="Image 1" descr="preencoded.png"/>
-          <p:cNvPicPr>
-            <a:picLocks noChangeAspect="1"/>
-          </p:cNvPicPr>
-          <p:nvPr/>
-        </p:nvPicPr>
-        <p:blipFill>
-          <a:blip r:embed="rId4"/>
-          <a:stretch>
-            <a:fillRect/>
-          </a:stretch>
-        </p:blipFill>
-        <p:spPr>
-          <a:xfrm>
-            <a:off x="3437645" y="2697460"/>
-            <a:ext cx="1117572" cy="690662"/>
-          </a:xfrm>
-          <a:prstGeom prst="rect">
-            <a:avLst/>
-          </a:prstGeom>
-        </p:spPr>
-      </p:pic>
-      <p:sp>
-        <p:nvSpPr>
-          <p:cNvPr id="8" name="Text 4"/>
-          <p:cNvSpPr/>
-          <p:nvPr/>
-        </p:nvSpPr>
-        <p:spPr>
-          <a:xfrm>
-            <a:off x="3437645" y="3624362"/>
-            <a:ext cx="2540036" cy="295275"/>
-          </a:xfrm>
-          <a:prstGeom prst="rect">
-            <a:avLst/>
-          </a:prstGeom>
-          <a:noFill/>
-          <a:ln/>
-        </p:spPr>
-        <p:txBody>
-          <a:bodyPr wrap="none" lIns="0" tIns="0" rIns="0" bIns="0" rtlCol="0" anchor="t"/>
-          <a:lstStyle/>
-          <a:p>
-            <a:pPr marL="0" indent="0" algn="l">
-              <a:lnSpc>
-                <a:spcPct val="104000"/>
-              </a:lnSpc>
-              <a:buNone/>
-            </a:pPr>
-            <a:r>
-              <a:rPr lang="en-US" sz="1850" kern="0" spc="-56" dirty="0">
-                <a:solidFill>
-                  <a:srgbClr val="2B2E3C"/>
-                </a:solidFill>
-                <a:latin typeface="Bitter Medium" pitchFamily="34" charset="0"/>
-                <a:ea typeface="Bitter Medium" pitchFamily="34" charset="-122"/>
-                <a:cs typeface="Bitter Medium" pitchFamily="34" charset="-120"/>
-              </a:rPr>
-              <a:t>Cloud &amp; FCM</a:t>
-            </a:r>
-            <a:endParaRPr lang="en-US" sz="1850" dirty="0"/>
-          </a:p>
-        </p:txBody>
-      </p:sp>
-      <p:sp>
-        <p:nvSpPr>
-          <p:cNvPr id="9" name="Text 5"/>
-          <p:cNvSpPr/>
-          <p:nvPr/>
-        </p:nvSpPr>
-        <p:spPr>
-          <a:xfrm>
-            <a:off x="3437645" y="4033044"/>
-            <a:ext cx="2540036" cy="907256"/>
-          </a:xfrm>
-          <a:prstGeom prst="rect">
-            <a:avLst/>
-          </a:prstGeom>
-          <a:noFill/>
-          <a:ln/>
-        </p:spPr>
-        <p:txBody>
-          <a:bodyPr wrap="square" lIns="0" tIns="0" rIns="0" bIns="0" rtlCol="0" anchor="t">
-            <a:normAutofit/>
-          </a:bodyPr>
-          <a:lstStyle/>
-          <a:p>
-            <a:pPr marL="0" indent="0" algn="l">
-              <a:lnSpc>
-                <a:spcPct val="133000"/>
-              </a:lnSpc>
-              <a:buNone/>
-            </a:pPr>
-            <a:r>
-              <a:rPr lang="en-US" sz="1450" kern="0" spc="-30" dirty="0">
-                <a:solidFill>
-                  <a:srgbClr val="2B2E3C"/>
-                </a:solidFill>
-                <a:latin typeface="Open Sans" pitchFamily="34" charset="0"/>
-                <a:ea typeface="Open Sans" pitchFamily="34" charset="-122"/>
-                <a:cs typeface="Open Sans" pitchFamily="34" charset="-120"/>
-              </a:rPr>
-              <a:t>Bridge cloud per accesso remoto e notifiche push via Firebase Cloud Messaging</a:t>
-            </a:r>
-            <a:endParaRPr lang="en-US" sz="1450" dirty="0"/>
-          </a:p>
-        </p:txBody>
-      </p:sp>
-      <p:pic>
-        <p:nvPicPr>
-          <p:cNvPr id="10" name="Image 2" descr="preencoded.png"/>
-          <p:cNvPicPr>
-            <a:picLocks noChangeAspect="1"/>
-          </p:cNvPicPr>
-          <p:nvPr/>
-        </p:nvPicPr>
-        <p:blipFill>
-          <a:blip r:embed="rId5"/>
-          <a:stretch>
-            <a:fillRect/>
-          </a:stretch>
-        </p:blipFill>
-        <p:spPr>
-          <a:xfrm>
-            <a:off x="6213915" y="2697460"/>
-            <a:ext cx="1117572" cy="690662"/>
-          </a:xfrm>
-          <a:prstGeom prst="rect">
-            <a:avLst/>
-          </a:prstGeom>
-        </p:spPr>
-      </p:pic>
-      <p:sp>
-        <p:nvSpPr>
-          <p:cNvPr id="11" name="Text 6"/>
-          <p:cNvSpPr/>
-          <p:nvPr/>
-        </p:nvSpPr>
-        <p:spPr>
-          <a:xfrm>
-            <a:off x="6213915" y="3624362"/>
-            <a:ext cx="2540036" cy="885825"/>
-          </a:xfrm>
-          <a:prstGeom prst="rect">
-            <a:avLst/>
-          </a:prstGeom>
-          <a:noFill/>
-          <a:ln/>
-        </p:spPr>
-        <p:txBody>
-          <a:bodyPr wrap="square" lIns="0" tIns="0" rIns="0" bIns="0" rtlCol="0" anchor="t">
-            <a:normAutofit/>
-          </a:bodyPr>
-          <a:lstStyle/>
-          <a:p>
-            <a:pPr marL="0" indent="0" algn="l">
-              <a:lnSpc>
-                <a:spcPct val="104000"/>
-              </a:lnSpc>
-              <a:buNone/>
-            </a:pPr>
-            <a:r>
-              <a:rPr lang="en-US" sz="1850" kern="0" spc="-56" dirty="0">
-                <a:solidFill>
-                  <a:srgbClr val="2B2E3C"/>
-                </a:solidFill>
-                <a:latin typeface="Bitter Medium" pitchFamily="34" charset="0"/>
-                <a:ea typeface="Bitter Medium" pitchFamily="34" charset="-122"/>
-                <a:cs typeface="Bitter Medium" pitchFamily="34" charset="-120"/>
-              </a:rPr>
-              <a:t>Meccanismo di Raffreddamento e Riscaldamento</a:t>
-            </a:r>
-            <a:endParaRPr lang="en-US" sz="1850" dirty="0"/>
-          </a:p>
-        </p:txBody>
-      </p:sp>
-      <p:sp>
-        <p:nvSpPr>
-          <p:cNvPr id="12" name="Text 7"/>
-          <p:cNvSpPr/>
-          <p:nvPr/>
-        </p:nvSpPr>
-        <p:spPr>
-          <a:xfrm>
-            <a:off x="6213915" y="4623594"/>
-            <a:ext cx="2540036" cy="1020663"/>
-          </a:xfrm>
-          <a:prstGeom prst="rect">
-            <a:avLst/>
-          </a:prstGeom>
-          <a:noFill/>
-          <a:ln/>
-        </p:spPr>
-        <p:txBody>
-          <a:bodyPr wrap="square" lIns="0" tIns="0" rIns="0" bIns="0" rtlCol="0" anchor="t">
-            <a:normAutofit/>
-          </a:bodyPr>
-          <a:lstStyle/>
-          <a:p>
-            <a:pPr marL="0" indent="0" algn="l">
-              <a:lnSpc>
-                <a:spcPct val="133000"/>
-              </a:lnSpc>
-              <a:spcAft>
-                <a:spcPts val="850"/>
-              </a:spcAft>
-              <a:buNone/>
-            </a:pPr>
-            <a:r>
-              <a:rPr lang="en-US" sz="1450" kern="0" spc="-30" dirty="0">
-                <a:solidFill>
-                  <a:srgbClr val="2B2E3C"/>
-                </a:solidFill>
-                <a:latin typeface="Open Sans" pitchFamily="34" charset="0"/>
-                <a:ea typeface="Open Sans" pitchFamily="34" charset="-122"/>
-                <a:cs typeface="Open Sans" pitchFamily="34" charset="-120"/>
-              </a:rPr>
-              <a:t>Sostituzione dei led utilizzati con condizionatori reali</a:t>
-            </a:r>
-            <a:endParaRPr lang="en-US" sz="1450" dirty="0"/>
-          </a:p>
-        </p:txBody>
-      </p:sp>
-      <p:pic>
-        <p:nvPicPr>
-          <p:cNvPr id="13" name="Image 3" descr="preencoded.png"/>
-          <p:cNvPicPr>
-            <a:picLocks noChangeAspect="1"/>
-          </p:cNvPicPr>
-          <p:nvPr/>
-        </p:nvPicPr>
-        <p:blipFill>
-          <a:blip r:embed="rId6"/>
-          <a:stretch>
-            <a:fillRect/>
-          </a:stretch>
-        </p:blipFill>
-        <p:spPr>
-          <a:xfrm>
-            <a:off x="8990184" y="2697460"/>
-            <a:ext cx="1117572" cy="690662"/>
-          </a:xfrm>
-          <a:prstGeom prst="rect">
-            <a:avLst/>
-          </a:prstGeom>
-        </p:spPr>
-      </p:pic>
-      <p:sp>
-        <p:nvSpPr>
-          <p:cNvPr id="14" name="Text 8"/>
-          <p:cNvSpPr/>
-          <p:nvPr/>
-        </p:nvSpPr>
-        <p:spPr>
-          <a:xfrm>
-            <a:off x="8990184" y="3624362"/>
-            <a:ext cx="2540036" cy="295275"/>
-          </a:xfrm>
-          <a:prstGeom prst="rect">
-            <a:avLst/>
-          </a:prstGeom>
-          <a:noFill/>
-          <a:ln/>
-        </p:spPr>
-        <p:txBody>
-          <a:bodyPr wrap="none" lIns="0" tIns="0" rIns="0" bIns="0" rtlCol="0" anchor="t"/>
-          <a:lstStyle/>
-          <a:p>
-            <a:pPr marL="0" indent="0" algn="l">
-              <a:lnSpc>
-                <a:spcPct val="104000"/>
-              </a:lnSpc>
-              <a:buNone/>
-            </a:pPr>
-            <a:r>
-              <a:rPr lang="en-US" sz="1850" kern="0" spc="-56" dirty="0">
-                <a:solidFill>
-                  <a:srgbClr val="2B2E3C"/>
-                </a:solidFill>
-                <a:latin typeface="Bitter Medium" pitchFamily="34" charset="0"/>
-                <a:ea typeface="Bitter Medium" pitchFamily="34" charset="-122"/>
-                <a:cs typeface="Bitter Medium" pitchFamily="34" charset="-120"/>
-              </a:rPr>
-              <a:t>AI Avanzata</a:t>
-            </a:r>
-            <a:endParaRPr lang="en-US" sz="1850" dirty="0"/>
-          </a:p>
-        </p:txBody>
-      </p:sp>
-      <p:sp>
-        <p:nvSpPr>
-          <p:cNvPr id="15" name="Text 9"/>
-          <p:cNvSpPr/>
-          <p:nvPr/>
-        </p:nvSpPr>
-        <p:spPr>
-          <a:xfrm>
-            <a:off x="8990184" y="4033044"/>
-            <a:ext cx="2540036" cy="907256"/>
-          </a:xfrm>
-          <a:prstGeom prst="rect">
-            <a:avLst/>
-          </a:prstGeom>
-          <a:noFill/>
-          <a:ln/>
-        </p:spPr>
-        <p:txBody>
-          <a:bodyPr wrap="square" lIns="0" tIns="0" rIns="0" bIns="0" rtlCol="0" anchor="t">
-            <a:normAutofit/>
-          </a:bodyPr>
-          <a:lstStyle/>
-          <a:p>
-            <a:pPr marL="0" indent="0" algn="l">
-              <a:lnSpc>
-                <a:spcPct val="133000"/>
-              </a:lnSpc>
-              <a:buNone/>
-            </a:pPr>
-            <a:r>
-              <a:rPr lang="en-US" sz="1450" kern="0" spc="-30" dirty="0">
-                <a:solidFill>
-                  <a:srgbClr val="2B2E3C"/>
-                </a:solidFill>
-                <a:latin typeface="Open Sans" pitchFamily="34" charset="0"/>
-                <a:ea typeface="Open Sans" pitchFamily="34" charset="-122"/>
-                <a:cs typeface="Open Sans" pitchFamily="34" charset="-120"/>
-              </a:rPr>
-              <a:t>Predizioni di occupazione, qualità dell'aria (CO2) e suggerimenti automatici</a:t>
-            </a:r>
-            <a:endParaRPr lang="en-US" sz="1450" dirty="0"/>
-          </a:p>
-        </p:txBody>
-      </p:sp>
-      <p:sp>
-        <p:nvSpPr>
-          <p:cNvPr id="17" name="Rettangolo 16">
-            <a:extLst>
-              <a:ext uri="{FF2B5EF4-FFF2-40B4-BE49-F238E27FC236}">
-                <a16:creationId xmlns:a16="http://schemas.microsoft.com/office/drawing/2014/main" id="{4C450058-7DEF-7A71-7A12-E1C2D5356F94}"/>
               </a:ext>
             </a:extLst>
           </p:cNvPr>

--- a/presentation/Smart-Study-Rooms.pptx
+++ b/presentation/Smart-Study-Rooms.pptx
@@ -3,51 +3,50 @@
 <p:presentation xmlns:a="http://schemas.openxmlformats.org/drawingml/2006/main" xmlns:r="http://schemas.openxmlformats.org/officeDocument/2006/relationships" xmlns:p="http://schemas.openxmlformats.org/presentationml/2006/main" embedTrueTypeFonts="1" saveSubsetFonts="1" autoCompressPictures="0">
   <p:sldMasterIdLst>
     <p:sldMasterId id="2147483648" r:id="rId1"/>
-    <p:sldMasterId id="2147483651" r:id="rId2"/>
   </p:sldMasterIdLst>
   <p:notesMasterIdLst>
-    <p:notesMasterId r:id="rId16"/>
+    <p:notesMasterId r:id="rId15"/>
   </p:notesMasterIdLst>
   <p:sldIdLst>
-    <p:sldId id="256" r:id="rId3"/>
-    <p:sldId id="257" r:id="rId4"/>
-    <p:sldId id="258" r:id="rId5"/>
-    <p:sldId id="259" r:id="rId6"/>
-    <p:sldId id="260" r:id="rId7"/>
-    <p:sldId id="261" r:id="rId8"/>
-    <p:sldId id="262" r:id="rId9"/>
-    <p:sldId id="266" r:id="rId10"/>
-    <p:sldId id="263" r:id="rId11"/>
-    <p:sldId id="267" r:id="rId12"/>
-    <p:sldId id="271" r:id="rId13"/>
-    <p:sldId id="268" r:id="rId14"/>
-    <p:sldId id="270" r:id="rId15"/>
+    <p:sldId id="256" r:id="rId2"/>
+    <p:sldId id="257" r:id="rId3"/>
+    <p:sldId id="258" r:id="rId4"/>
+    <p:sldId id="259" r:id="rId5"/>
+    <p:sldId id="260" r:id="rId6"/>
+    <p:sldId id="261" r:id="rId7"/>
+    <p:sldId id="262" r:id="rId8"/>
+    <p:sldId id="266" r:id="rId9"/>
+    <p:sldId id="263" r:id="rId10"/>
+    <p:sldId id="267" r:id="rId11"/>
+    <p:sldId id="271" r:id="rId12"/>
+    <p:sldId id="268" r:id="rId13"/>
+    <p:sldId id="270" r:id="rId14"/>
   </p:sldIdLst>
   <p:sldSz cx="12192000" cy="6858000"/>
   <p:notesSz cx="6858000" cy="12192000"/>
   <p:embeddedFontLst>
     <p:embeddedFont>
       <p:font typeface="Bitter Medium" panose="020B0604020202020204" charset="0"/>
+      <p:regular r:id="rId16"/>
+    </p:embeddedFont>
+    <p:embeddedFont>
+      <p:font typeface="MuseoModerno Medium" panose="020B0604020202020204" charset="0"/>
       <p:regular r:id="rId17"/>
     </p:embeddedFont>
     <p:embeddedFont>
-      <p:font typeface="MuseoModerno Medium" panose="020B0604020202020204" charset="0"/>
+      <p:font typeface="Open Sans" panose="020B0606030504020204" pitchFamily="34" charset="0"/>
       <p:regular r:id="rId18"/>
-    </p:embeddedFont>
-    <p:embeddedFont>
-      <p:font typeface="Open Sans" panose="020B0606030504020204" pitchFamily="34" charset="0"/>
-      <p:regular r:id="rId19"/>
-      <p:bold r:id="rId20"/>
-      <p:italic r:id="rId21"/>
-      <p:boldItalic r:id="rId22"/>
+      <p:bold r:id="rId19"/>
+      <p:italic r:id="rId20"/>
+      <p:boldItalic r:id="rId21"/>
     </p:embeddedFont>
     <p:embeddedFont>
       <p:font typeface="Source Sans 3" panose="020B0604020202020204" charset="0"/>
-      <p:regular r:id="rId23"/>
+      <p:regular r:id="rId22"/>
     </p:embeddedFont>
     <p:embeddedFont>
       <p:font typeface="Source Sans 3 Bold" panose="020B0604020202020204" charset="0"/>
-      <p:regular r:id="rId24"/>
+      <p:regular r:id="rId23"/>
     </p:embeddedFont>
   </p:embeddedFontLst>
   <p:defaultTextStyle>
@@ -153,7 +152,7 @@
 <file path=ppt/revisionInfo.xml><?xml version="1.0" encoding="utf-8"?>
 <p1510:revInfo xmlns:a="http://schemas.openxmlformats.org/drawingml/2006/main" xmlns:r="http://schemas.openxmlformats.org/officeDocument/2006/relationships" xmlns:p1510="http://schemas.microsoft.com/office/powerpoint/2015/10/main">
   <p1510:revLst>
-    <p1510:client id="{D7FB788E-8B80-4776-8146-9265B36569C0}" v="2" dt="2026-09-07T23:00:44.452"/>
+    <p1510:client id="{D7FB788E-8B80-4776-8146-9265B36569C0}" v="3" dt="2026-09-08T12:16:10"/>
   </p1510:revLst>
 </p1510:revInfo>
 </file>
@@ -163,10 +162,25 @@
   <pc:docChgLst>
     <pc:chgData name="GIANLUCA CAVANI" userId="87922040f0d244e1" providerId="LiveId" clId="{D9E828B3-A941-4B93-80FD-F166EA6B65A7}"/>
     <pc:docChg chg="undo custSel modSld">
-      <pc:chgData name="GIANLUCA CAVANI" userId="87922040f0d244e1" providerId="LiveId" clId="{D9E828B3-A941-4B93-80FD-F166EA6B65A7}" dt="2026-09-07T23:08:05.990" v="35" actId="1076"/>
+      <pc:chgData name="GIANLUCA CAVANI" userId="87922040f0d244e1" providerId="LiveId" clId="{D9E828B3-A941-4B93-80FD-F166EA6B65A7}" dt="2026-09-08T12:17:34.924" v="71" actId="1076"/>
       <pc:docMkLst>
         <pc:docMk/>
       </pc:docMkLst>
+      <pc:sldChg chg="modSp mod">
+        <pc:chgData name="GIANLUCA CAVANI" userId="87922040f0d244e1" providerId="LiveId" clId="{D9E828B3-A941-4B93-80FD-F166EA6B65A7}" dt="2026-09-08T12:17:34.924" v="71" actId="1076"/>
+        <pc:sldMkLst>
+          <pc:docMk/>
+          <pc:sldMk cId="0" sldId="256"/>
+        </pc:sldMkLst>
+        <pc:picChg chg="mod">
+          <ac:chgData name="GIANLUCA CAVANI" userId="87922040f0d244e1" providerId="LiveId" clId="{D9E828B3-A941-4B93-80FD-F166EA6B65A7}" dt="2026-09-08T12:17:34.924" v="71" actId="1076"/>
+          <ac:picMkLst>
+            <pc:docMk/>
+            <pc:sldMk cId="0" sldId="256"/>
+            <ac:picMk id="2" creationId="{00000000-0000-0000-0000-000000000000}"/>
+          </ac:picMkLst>
+        </pc:picChg>
+      </pc:sldChg>
       <pc:sldChg chg="modSp mod">
         <pc:chgData name="GIANLUCA CAVANI" userId="87922040f0d244e1" providerId="LiveId" clId="{D9E828B3-A941-4B93-80FD-F166EA6B65A7}" dt="2026-09-07T23:01:04.810" v="13" actId="255"/>
         <pc:sldMkLst>
@@ -244,11 +258,104 @@
         </pc:picChg>
       </pc:sldChg>
       <pc:sldChg chg="addSp delSp modSp mod">
-        <pc:chgData name="GIANLUCA CAVANI" userId="87922040f0d244e1" providerId="LiveId" clId="{D9E828B3-A941-4B93-80FD-F166EA6B65A7}" dt="2026-09-07T23:08:05.990" v="35" actId="1076"/>
+        <pc:chgData name="GIANLUCA CAVANI" userId="87922040f0d244e1" providerId="LiveId" clId="{D9E828B3-A941-4B93-80FD-F166EA6B65A7}" dt="2026-09-08T12:15:20.028" v="60" actId="22"/>
+        <pc:sldMkLst>
+          <pc:docMk/>
+          <pc:sldMk cId="0" sldId="263"/>
+        </pc:sldMkLst>
+        <pc:spChg chg="add">
+          <ac:chgData name="GIANLUCA CAVANI" userId="87922040f0d244e1" providerId="LiveId" clId="{D9E828B3-A941-4B93-80FD-F166EA6B65A7}" dt="2026-09-08T12:15:20.028" v="60" actId="22"/>
+          <ac:spMkLst>
+            <pc:docMk/>
+            <pc:sldMk cId="0" sldId="263"/>
+            <ac:spMk id="4" creationId="{577826C6-BB0D-09A7-E574-DC0813B84765}"/>
+          </ac:spMkLst>
+        </pc:spChg>
+        <pc:spChg chg="del mod">
+          <ac:chgData name="GIANLUCA CAVANI" userId="87922040f0d244e1" providerId="LiveId" clId="{D9E828B3-A941-4B93-80FD-F166EA6B65A7}" dt="2026-09-08T12:15:17.219" v="59" actId="478"/>
+          <ac:spMkLst>
+            <pc:docMk/>
+            <pc:sldMk cId="0" sldId="263"/>
+            <ac:spMk id="8" creationId="{755F6FEE-8057-65F7-6010-A445B4795AED}"/>
+          </ac:spMkLst>
+        </pc:spChg>
+      </pc:sldChg>
+      <pc:sldChg chg="addSp delSp modSp mod">
+        <pc:chgData name="GIANLUCA CAVANI" userId="87922040f0d244e1" providerId="LiveId" clId="{D9E828B3-A941-4B93-80FD-F166EA6B65A7}" dt="2026-09-08T12:15:10.469" v="58" actId="22"/>
+        <pc:sldMkLst>
+          <pc:docMk/>
+          <pc:sldMk cId="0" sldId="266"/>
+        </pc:sldMkLst>
+        <pc:spChg chg="del">
+          <ac:chgData name="GIANLUCA CAVANI" userId="87922040f0d244e1" providerId="LiveId" clId="{D9E828B3-A941-4B93-80FD-F166EA6B65A7}" dt="2026-09-08T12:12:44.085" v="40" actId="478"/>
+          <ac:spMkLst>
+            <pc:docMk/>
+            <pc:sldMk cId="0" sldId="266"/>
+            <ac:spMk id="17" creationId="{4C450058-7DEF-7A71-7A12-E1C2D5356F94}"/>
+          </ac:spMkLst>
+        </pc:spChg>
+        <pc:spChg chg="add del mod">
+          <ac:chgData name="GIANLUCA CAVANI" userId="87922040f0d244e1" providerId="LiveId" clId="{D9E828B3-A941-4B93-80FD-F166EA6B65A7}" dt="2026-09-08T12:15:09.229" v="57" actId="478"/>
+          <ac:spMkLst>
+            <pc:docMk/>
+            <pc:sldMk cId="0" sldId="266"/>
+            <ac:spMk id="18" creationId="{1830D42B-5D63-F3F2-C3DA-EC807E33615C}"/>
+          </ac:spMkLst>
+        </pc:spChg>
+        <pc:spChg chg="add">
+          <ac:chgData name="GIANLUCA CAVANI" userId="87922040f0d244e1" providerId="LiveId" clId="{D9E828B3-A941-4B93-80FD-F166EA6B65A7}" dt="2026-09-08T12:15:10.469" v="58" actId="22"/>
+          <ac:spMkLst>
+            <pc:docMk/>
+            <pc:sldMk cId="0" sldId="266"/>
+            <ac:spMk id="20" creationId="{A04CE64D-4AC6-4703-A031-ED530A1FAB1A}"/>
+          </ac:spMkLst>
+        </pc:spChg>
+      </pc:sldChg>
+      <pc:sldChg chg="addSp delSp mod">
+        <pc:chgData name="GIANLUCA CAVANI" userId="87922040f0d244e1" providerId="LiveId" clId="{D9E828B3-A941-4B93-80FD-F166EA6B65A7}" dt="2026-09-08T12:15:27.872" v="62" actId="22"/>
+        <pc:sldMkLst>
+          <pc:docMk/>
+          <pc:sldMk cId="0" sldId="267"/>
+        </pc:sldMkLst>
+        <pc:spChg chg="del">
+          <ac:chgData name="GIANLUCA CAVANI" userId="87922040f0d244e1" providerId="LiveId" clId="{D9E828B3-A941-4B93-80FD-F166EA6B65A7}" dt="2026-09-08T12:15:26.460" v="61" actId="478"/>
+          <ac:spMkLst>
+            <pc:docMk/>
+            <pc:sldMk cId="0" sldId="267"/>
+            <ac:spMk id="19" creationId="{251BF78C-2940-02B3-6200-64E64F7E52AB}"/>
+          </ac:spMkLst>
+        </pc:spChg>
+        <pc:spChg chg="add">
+          <ac:chgData name="GIANLUCA CAVANI" userId="87922040f0d244e1" providerId="LiveId" clId="{D9E828B3-A941-4B93-80FD-F166EA6B65A7}" dt="2026-09-08T12:15:27.872" v="62" actId="22"/>
+          <ac:spMkLst>
+            <pc:docMk/>
+            <pc:sldMk cId="0" sldId="267"/>
+            <ac:spMk id="20" creationId="{4C7F2062-4182-2305-6743-D55548778DE3}"/>
+          </ac:spMkLst>
+        </pc:spChg>
+      </pc:sldChg>
+      <pc:sldChg chg="addSp delSp modSp mod">
+        <pc:chgData name="GIANLUCA CAVANI" userId="87922040f0d244e1" providerId="LiveId" clId="{D9E828B3-A941-4B93-80FD-F166EA6B65A7}" dt="2026-09-08T12:16:59.541" v="67" actId="14100"/>
         <pc:sldMkLst>
           <pc:docMk/>
           <pc:sldMk cId="0" sldId="268"/>
         </pc:sldMkLst>
+        <pc:spChg chg="add mod">
+          <ac:chgData name="GIANLUCA CAVANI" userId="87922040f0d244e1" providerId="LiveId" clId="{D9E828B3-A941-4B93-80FD-F166EA6B65A7}" dt="2026-09-08T12:16:59.541" v="67" actId="14100"/>
+          <ac:spMkLst>
+            <pc:docMk/>
+            <pc:sldMk cId="0" sldId="268"/>
+            <ac:spMk id="26" creationId="{4AE20AE1-D635-9C2C-3E17-A11A3FA29751}"/>
+          </ac:spMkLst>
+        </pc:spChg>
+        <pc:spChg chg="del mod">
+          <ac:chgData name="GIANLUCA CAVANI" userId="87922040f0d244e1" providerId="LiveId" clId="{D9E828B3-A941-4B93-80FD-F166EA6B65A7}" dt="2026-09-08T12:16:55.463" v="65" actId="478"/>
+          <ac:spMkLst>
+            <pc:docMk/>
+            <pc:sldMk cId="0" sldId="268"/>
+            <ac:spMk id="27" creationId="{DA64EAF0-2E2D-572A-65B8-1C36800F7082}"/>
+          </ac:spMkLst>
+        </pc:spChg>
         <pc:picChg chg="del">
           <ac:chgData name="GIANLUCA CAVANI" userId="87922040f0d244e1" providerId="LiveId" clId="{D9E828B3-A941-4B93-80FD-F166EA6B65A7}" dt="2026-09-07T23:07:24.012" v="24" actId="21"/>
           <ac:picMkLst>
@@ -266,8 +373,39 @@
           </ac:picMkLst>
         </pc:picChg>
       </pc:sldChg>
-      <pc:sldChg chg="modSp mod">
-        <pc:chgData name="GIANLUCA CAVANI" userId="87922040f0d244e1" providerId="LiveId" clId="{D9E828B3-A941-4B93-80FD-F166EA6B65A7}" dt="2026-09-07T22:59:40.332" v="7" actId="108"/>
+      <pc:sldChg chg="addSp delSp modSp mod">
+        <pc:chgData name="GIANLUCA CAVANI" userId="87922040f0d244e1" providerId="LiveId" clId="{D9E828B3-A941-4B93-80FD-F166EA6B65A7}" dt="2026-09-08T12:17:06.748" v="69" actId="22"/>
+        <pc:sldMkLst>
+          <pc:docMk/>
+          <pc:sldMk cId="0" sldId="270"/>
+        </pc:sldMkLst>
+        <pc:spChg chg="del">
+          <ac:chgData name="GIANLUCA CAVANI" userId="87922040f0d244e1" providerId="LiveId" clId="{D9E828B3-A941-4B93-80FD-F166EA6B65A7}" dt="2026-09-08T12:13:52.599" v="45" actId="478"/>
+          <ac:spMkLst>
+            <pc:docMk/>
+            <pc:sldMk cId="0" sldId="270"/>
+            <ac:spMk id="20" creationId="{C8EB2CC5-052E-61C8-08AD-4DA21E17D649}"/>
+          </ac:spMkLst>
+        </pc:spChg>
+        <pc:spChg chg="add del mod">
+          <ac:chgData name="GIANLUCA CAVANI" userId="87922040f0d244e1" providerId="LiveId" clId="{D9E828B3-A941-4B93-80FD-F166EA6B65A7}" dt="2026-09-08T12:17:05.759" v="68" actId="478"/>
+          <ac:spMkLst>
+            <pc:docMk/>
+            <pc:sldMk cId="0" sldId="270"/>
+            <ac:spMk id="21" creationId="{6434A974-E300-3B3D-DDB4-786AD468DAE5}"/>
+          </ac:spMkLst>
+        </pc:spChg>
+        <pc:spChg chg="add">
+          <ac:chgData name="GIANLUCA CAVANI" userId="87922040f0d244e1" providerId="LiveId" clId="{D9E828B3-A941-4B93-80FD-F166EA6B65A7}" dt="2026-09-08T12:17:06.748" v="69" actId="22"/>
+          <ac:spMkLst>
+            <pc:docMk/>
+            <pc:sldMk cId="0" sldId="270"/>
+            <ac:spMk id="23" creationId="{E352E022-A85A-4A38-797C-3370EF5A386A}"/>
+          </ac:spMkLst>
+        </pc:spChg>
+      </pc:sldChg>
+      <pc:sldChg chg="addSp delSp modSp mod">
+        <pc:chgData name="GIANLUCA CAVANI" userId="87922040f0d244e1" providerId="LiveId" clId="{D9E828B3-A941-4B93-80FD-F166EA6B65A7}" dt="2026-09-08T12:15:37.336" v="64" actId="22"/>
         <pc:sldMkLst>
           <pc:docMk/>
           <pc:sldMk cId="0" sldId="271"/>
@@ -278,6 +416,22 @@
             <pc:docMk/>
             <pc:sldMk cId="0" sldId="271"/>
             <ac:spMk id="6" creationId="{A8F90596-EF63-D761-4361-1785F375564E}"/>
+          </ac:spMkLst>
+        </pc:spChg>
+        <pc:spChg chg="add">
+          <ac:chgData name="GIANLUCA CAVANI" userId="87922040f0d244e1" providerId="LiveId" clId="{D9E828B3-A941-4B93-80FD-F166EA6B65A7}" dt="2026-09-08T12:15:37.336" v="64" actId="22"/>
+          <ac:spMkLst>
+            <pc:docMk/>
+            <pc:sldMk cId="0" sldId="271"/>
+            <ac:spMk id="7" creationId="{D329EBE4-F62C-6705-87F8-E627DD3474F0}"/>
+          </ac:spMkLst>
+        </pc:spChg>
+        <pc:spChg chg="del">
+          <ac:chgData name="GIANLUCA CAVANI" userId="87922040f0d244e1" providerId="LiveId" clId="{D9E828B3-A941-4B93-80FD-F166EA6B65A7}" dt="2026-09-08T12:15:36.431" v="63" actId="478"/>
+          <ac:spMkLst>
+            <pc:docMk/>
+            <pc:sldMk cId="0" sldId="271"/>
+            <ac:spMk id="11" creationId="{EB698D01-92F7-ABBE-28EE-A42260AB28EA}"/>
           </ac:spMkLst>
         </pc:spChg>
       </pc:sldChg>
@@ -1790,151 +1944,6 @@
         </p:spPr>
       </p:pic>
     </p:spTree>
-  </p:cSld>
-  <p:clrMapOvr>
-    <a:masterClrMapping/>
-  </p:clrMapOvr>
-</p:sldLayout>
-</file>
-
-<file path=ppt/slideLayouts/slideLayout3.xml><?xml version="1.0" encoding="utf-8"?>
-<p:sldLayout xmlns:a="http://schemas.openxmlformats.org/drawingml/2006/main" xmlns:r="http://schemas.openxmlformats.org/officeDocument/2006/relationships" xmlns:p="http://schemas.openxmlformats.org/presentationml/2006/main" preserve="1">
-  <p:cSld name="DEFAULT">
-    <p:bg>
-      <p:bgRef idx="1001">
-        <a:schemeClr val="bg1"/>
-      </p:bgRef>
-    </p:bg>
-    <p:spTree>
-      <p:nvGrpSpPr>
-        <p:cNvPr id="1" name=""/>
-        <p:cNvGrpSpPr/>
-        <p:nvPr/>
-      </p:nvGrpSpPr>
-      <p:grpSpPr>
-        <a:xfrm>
-          <a:off x="0" y="0"/>
-          <a:ext cx="0" cy="0"/>
-          <a:chOff x="0" y="0"/>
-          <a:chExt cx="0" cy="0"/>
-        </a:xfrm>
-      </p:grpSpPr>
-    </p:spTree>
-    <p:extLst>
-      <p:ext uri="{BB962C8B-B14F-4D97-AF65-F5344CB8AC3E}">
-        <p14:creationId xmlns:p14="http://schemas.microsoft.com/office/powerpoint/2010/main" val="1384723990"/>
-      </p:ext>
-    </p:extLst>
-  </p:cSld>
-  <p:clrMapOvr>
-    <a:masterClrMapping/>
-  </p:clrMapOvr>
-</p:sldLayout>
-</file>
-
-<file path=ppt/slideLayouts/slideLayout4.xml><?xml version="1.0" encoding="utf-8"?>
-<p:sldLayout xmlns:a="http://schemas.openxmlformats.org/drawingml/2006/main" xmlns:r="http://schemas.openxmlformats.org/officeDocument/2006/relationships" xmlns:p="http://schemas.openxmlformats.org/presentationml/2006/main" preserve="1">
-  <p:cSld name="Slide master 1">
-    <p:spTree>
-      <p:nvGrpSpPr>
-        <p:cNvPr id="1" name=""/>
-        <p:cNvGrpSpPr/>
-        <p:nvPr/>
-      </p:nvGrpSpPr>
-      <p:grpSpPr>
-        <a:xfrm>
-          <a:off x="0" y="0"/>
-          <a:ext cx="0" cy="0"/>
-          <a:chOff x="0" y="0"/>
-          <a:chExt cx="0" cy="0"/>
-        </a:xfrm>
-      </p:grpSpPr>
-      <p:sp>
-        <p:nvSpPr>
-          <p:cNvPr id="2" name="Shape 0"/>
-          <p:cNvSpPr/>
-          <p:nvPr/>
-        </p:nvSpPr>
-        <p:spPr>
-          <a:xfrm>
-            <a:off x="0" y="0"/>
-            <a:ext cx="12191695" cy="6858000"/>
-          </a:xfrm>
-          <a:prstGeom prst="rect">
-            <a:avLst/>
-          </a:prstGeom>
-          <a:solidFill>
-            <a:srgbClr val="AABCB6"/>
-          </a:solidFill>
-          <a:ln/>
-        </p:spPr>
-        <p:txBody>
-          <a:bodyPr/>
-          <a:lstStyle/>
-          <a:p>
-            <a:endParaRPr lang="it-IT"/>
-          </a:p>
-        </p:txBody>
-      </p:sp>
-      <p:sp>
-        <p:nvSpPr>
-          <p:cNvPr id="3" name="Shape 1"/>
-          <p:cNvSpPr/>
-          <p:nvPr/>
-        </p:nvSpPr>
-        <p:spPr>
-          <a:xfrm>
-            <a:off x="0" y="0"/>
-            <a:ext cx="12191695" cy="6858000"/>
-          </a:xfrm>
-          <a:prstGeom prst="rect">
-            <a:avLst/>
-          </a:prstGeom>
-          <a:solidFill>
-            <a:srgbClr val="FFF8F0"/>
-          </a:solidFill>
-          <a:ln/>
-        </p:spPr>
-        <p:txBody>
-          <a:bodyPr/>
-          <a:lstStyle/>
-          <a:p>
-            <a:endParaRPr lang="it-IT"/>
-          </a:p>
-        </p:txBody>
-      </p:sp>
-      <p:pic>
-        <p:nvPicPr>
-          <p:cNvPr id="4" name="Image 0" descr="preencoded.png">
-            <a:hlinkClick r:id="rId2"/>
-          </p:cNvPr>
-          <p:cNvPicPr>
-            <a:picLocks noChangeAspect="1"/>
-          </p:cNvPicPr>
-          <p:nvPr/>
-        </p:nvPicPr>
-        <p:blipFill>
-          <a:blip r:embed="rId3"/>
-          <a:stretch>
-            <a:fillRect/>
-          </a:stretch>
-        </p:blipFill>
-        <p:spPr>
-          <a:xfrm>
-            <a:off x="11076875" y="6558991"/>
-            <a:ext cx="1071843" cy="256032"/>
-          </a:xfrm>
-          <a:prstGeom prst="rect">
-            <a:avLst/>
-          </a:prstGeom>
-        </p:spPr>
-      </p:pic>
-    </p:spTree>
-    <p:extLst>
-      <p:ext uri="{BB962C8B-B14F-4D97-AF65-F5344CB8AC3E}">
-        <p14:creationId xmlns:p14="http://schemas.microsoft.com/office/powerpoint/2010/main" val="2932653649"/>
-      </p:ext>
-    </p:extLst>
   </p:cSld>
   <p:clrMapOvr>
     <a:masterClrMapping/>
@@ -2225,294 +2234,6 @@
 </p:sldMaster>
 </file>
 
-<file path=ppt/slideMasters/slideMaster2.xml><?xml version="1.0" encoding="utf-8"?>
-<p:sldMaster xmlns:a="http://schemas.openxmlformats.org/drawingml/2006/main" xmlns:r="http://schemas.openxmlformats.org/officeDocument/2006/relationships" xmlns:p="http://schemas.openxmlformats.org/presentationml/2006/main">
-  <p:cSld>
-    <p:bg>
-      <p:bgRef idx="1001">
-        <a:schemeClr val="bg1"/>
-      </p:bgRef>
-    </p:bg>
-    <p:spTree>
-      <p:nvGrpSpPr>
-        <p:cNvPr id="1" name=""/>
-        <p:cNvGrpSpPr/>
-        <p:nvPr/>
-      </p:nvGrpSpPr>
-      <p:grpSpPr>
-        <a:xfrm>
-          <a:off x="0" y="0"/>
-          <a:ext cx="0" cy="0"/>
-          <a:chOff x="0" y="0"/>
-          <a:chExt cx="0" cy="0"/>
-        </a:xfrm>
-      </p:grpSpPr>
-    </p:spTree>
-    <p:extLst>
-      <p:ext uri="{BB962C8B-B14F-4D97-AF65-F5344CB8AC3E}">
-        <p14:creationId xmlns:p14="http://schemas.microsoft.com/office/powerpoint/2010/main" val="1761058385"/>
-      </p:ext>
-    </p:extLst>
-  </p:cSld>
-  <p:clrMap bg1="lt1" tx1="dk1" bg2="lt2" tx2="dk2" accent1="accent1" accent2="accent2" accent3="accent3" accent4="accent4" accent5="accent5" accent6="accent6" hlink="hlink" folHlink="folHlink"/>
-  <p:sldLayoutIdLst>
-    <p:sldLayoutId id="2147483652" r:id="rId1"/>
-    <p:sldLayoutId id="2147483653" r:id="rId2"/>
-  </p:sldLayoutIdLst>
-  <p:hf sldNum="0" hdr="0" ftr="0" dt="0"/>
-  <p:txStyles>
-    <p:titleStyle>
-      <a:lvl1pPr algn="ctr" defTabSz="914400" rtl="0" eaLnBrk="1" latinLnBrk="0" hangingPunct="1">
-        <a:spcBef>
-          <a:spcPct val="0"/>
-        </a:spcBef>
-        <a:buNone/>
-        <a:defRPr sz="4400" kern="1200">
-          <a:solidFill>
-            <a:schemeClr val="tx1"/>
-          </a:solidFill>
-          <a:latin typeface="+mj-lt"/>
-          <a:ea typeface="+mj-ea"/>
-          <a:cs typeface="+mj-cs"/>
-        </a:defRPr>
-      </a:lvl1pPr>
-    </p:titleStyle>
-    <p:bodyStyle>
-      <a:lvl1pPr marL="342900" indent="-342900" algn="l" defTabSz="914400" rtl="0" eaLnBrk="1" latinLnBrk="0" hangingPunct="1">
-        <a:spcBef>
-          <a:spcPct val="20000"/>
-        </a:spcBef>
-        <a:buFont typeface="Arial" pitchFamily="34" charset="0"/>
-        <a:buChar char="•"/>
-        <a:defRPr sz="3200" kern="1200">
-          <a:solidFill>
-            <a:schemeClr val="tx1"/>
-          </a:solidFill>
-          <a:latin typeface="+mn-lt"/>
-          <a:ea typeface="+mn-ea"/>
-          <a:cs typeface="+mn-cs"/>
-        </a:defRPr>
-      </a:lvl1pPr>
-      <a:lvl2pPr marL="742950" indent="-285750" algn="l" defTabSz="914400" rtl="0" eaLnBrk="1" latinLnBrk="0" hangingPunct="1">
-        <a:spcBef>
-          <a:spcPct val="20000"/>
-        </a:spcBef>
-        <a:buFont typeface="Arial" pitchFamily="34" charset="0"/>
-        <a:buChar char="–"/>
-        <a:defRPr sz="2800" kern="1200">
-          <a:solidFill>
-            <a:schemeClr val="tx1"/>
-          </a:solidFill>
-          <a:latin typeface="+mn-lt"/>
-          <a:ea typeface="+mn-ea"/>
-          <a:cs typeface="+mn-cs"/>
-        </a:defRPr>
-      </a:lvl2pPr>
-      <a:lvl3pPr marL="1143000" indent="-228600" algn="l" defTabSz="914400" rtl="0" eaLnBrk="1" latinLnBrk="0" hangingPunct="1">
-        <a:spcBef>
-          <a:spcPct val="20000"/>
-        </a:spcBef>
-        <a:buFont typeface="Arial" pitchFamily="34" charset="0"/>
-        <a:buChar char="•"/>
-        <a:defRPr sz="2400" kern="1200">
-          <a:solidFill>
-            <a:schemeClr val="tx1"/>
-          </a:solidFill>
-          <a:latin typeface="+mn-lt"/>
-          <a:ea typeface="+mn-ea"/>
-          <a:cs typeface="+mn-cs"/>
-        </a:defRPr>
-      </a:lvl3pPr>
-      <a:lvl4pPr marL="1600200" indent="-228600" algn="l" defTabSz="914400" rtl="0" eaLnBrk="1" latinLnBrk="0" hangingPunct="1">
-        <a:spcBef>
-          <a:spcPct val="20000"/>
-        </a:spcBef>
-        <a:buFont typeface="Arial" pitchFamily="34" charset="0"/>
-        <a:buChar char="–"/>
-        <a:defRPr sz="2000" kern="1200">
-          <a:solidFill>
-            <a:schemeClr val="tx1"/>
-          </a:solidFill>
-          <a:latin typeface="+mn-lt"/>
-          <a:ea typeface="+mn-ea"/>
-          <a:cs typeface="+mn-cs"/>
-        </a:defRPr>
-      </a:lvl4pPr>
-      <a:lvl5pPr marL="2057400" indent="-228600" algn="l" defTabSz="914400" rtl="0" eaLnBrk="1" latinLnBrk="0" hangingPunct="1">
-        <a:spcBef>
-          <a:spcPct val="20000"/>
-        </a:spcBef>
-        <a:buFont typeface="Arial" pitchFamily="34" charset="0"/>
-        <a:buChar char="»"/>
-        <a:defRPr sz="2000" kern="1200">
-          <a:solidFill>
-            <a:schemeClr val="tx1"/>
-          </a:solidFill>
-          <a:latin typeface="+mn-lt"/>
-          <a:ea typeface="+mn-ea"/>
-          <a:cs typeface="+mn-cs"/>
-        </a:defRPr>
-      </a:lvl5pPr>
-      <a:lvl6pPr marL="2514600" indent="-228600" algn="l" defTabSz="914400" rtl="0" eaLnBrk="1" latinLnBrk="0" hangingPunct="1">
-        <a:spcBef>
-          <a:spcPct val="20000"/>
-        </a:spcBef>
-        <a:buFont typeface="Arial" pitchFamily="34" charset="0"/>
-        <a:buChar char="•"/>
-        <a:defRPr sz="2000" kern="1200">
-          <a:solidFill>
-            <a:schemeClr val="tx1"/>
-          </a:solidFill>
-          <a:latin typeface="+mn-lt"/>
-          <a:ea typeface="+mn-ea"/>
-          <a:cs typeface="+mn-cs"/>
-        </a:defRPr>
-      </a:lvl6pPr>
-      <a:lvl7pPr marL="2971800" indent="-228600" algn="l" defTabSz="914400" rtl="0" eaLnBrk="1" latinLnBrk="0" hangingPunct="1">
-        <a:spcBef>
-          <a:spcPct val="20000"/>
-        </a:spcBef>
-        <a:buFont typeface="Arial" pitchFamily="34" charset="0"/>
-        <a:buChar char="•"/>
-        <a:defRPr sz="2000" kern="1200">
-          <a:solidFill>
-            <a:schemeClr val="tx1"/>
-          </a:solidFill>
-          <a:latin typeface="+mn-lt"/>
-          <a:ea typeface="+mn-ea"/>
-          <a:cs typeface="+mn-cs"/>
-        </a:defRPr>
-      </a:lvl7pPr>
-      <a:lvl8pPr marL="3429000" indent="-228600" algn="l" defTabSz="914400" rtl="0" eaLnBrk="1" latinLnBrk="0" hangingPunct="1">
-        <a:spcBef>
-          <a:spcPct val="20000"/>
-        </a:spcBef>
-        <a:buFont typeface="Arial" pitchFamily="34" charset="0"/>
-        <a:buChar char="•"/>
-        <a:defRPr sz="2000" kern="1200">
-          <a:solidFill>
-            <a:schemeClr val="tx1"/>
-          </a:solidFill>
-          <a:latin typeface="+mn-lt"/>
-          <a:ea typeface="+mn-ea"/>
-          <a:cs typeface="+mn-cs"/>
-        </a:defRPr>
-      </a:lvl8pPr>
-      <a:lvl9pPr marL="3886200" indent="-228600" algn="l" defTabSz="914400" rtl="0" eaLnBrk="1" latinLnBrk="0" hangingPunct="1">
-        <a:spcBef>
-          <a:spcPct val="20000"/>
-        </a:spcBef>
-        <a:buFont typeface="Arial" pitchFamily="34" charset="0"/>
-        <a:buChar char="•"/>
-        <a:defRPr sz="2000" kern="1200">
-          <a:solidFill>
-            <a:schemeClr val="tx1"/>
-          </a:solidFill>
-          <a:latin typeface="+mn-lt"/>
-          <a:ea typeface="+mn-ea"/>
-          <a:cs typeface="+mn-cs"/>
-        </a:defRPr>
-      </a:lvl9pPr>
-    </p:bodyStyle>
-    <p:otherStyle>
-      <a:defPPr>
-        <a:defRPr lang="en-US"/>
-      </a:defPPr>
-      <a:lvl1pPr marL="0" algn="l" defTabSz="914400" rtl="0" eaLnBrk="1" latinLnBrk="0" hangingPunct="1">
-        <a:defRPr sz="1800" kern="1200">
-          <a:solidFill>
-            <a:schemeClr val="tx1"/>
-          </a:solidFill>
-          <a:latin typeface="+mn-lt"/>
-          <a:ea typeface="+mn-ea"/>
-          <a:cs typeface="+mn-cs"/>
-        </a:defRPr>
-      </a:lvl1pPr>
-      <a:lvl2pPr marL="457200" algn="l" defTabSz="914400" rtl="0" eaLnBrk="1" latinLnBrk="0" hangingPunct="1">
-        <a:defRPr sz="1800" kern="1200">
-          <a:solidFill>
-            <a:schemeClr val="tx1"/>
-          </a:solidFill>
-          <a:latin typeface="+mn-lt"/>
-          <a:ea typeface="+mn-ea"/>
-          <a:cs typeface="+mn-cs"/>
-        </a:defRPr>
-      </a:lvl2pPr>
-      <a:lvl3pPr marL="914400" algn="l" defTabSz="914400" rtl="0" eaLnBrk="1" latinLnBrk="0" hangingPunct="1">
-        <a:defRPr sz="1800" kern="1200">
-          <a:solidFill>
-            <a:schemeClr val="tx1"/>
-          </a:solidFill>
-          <a:latin typeface="+mn-lt"/>
-          <a:ea typeface="+mn-ea"/>
-          <a:cs typeface="+mn-cs"/>
-        </a:defRPr>
-      </a:lvl3pPr>
-      <a:lvl4pPr marL="1371600" algn="l" defTabSz="914400" rtl="0" eaLnBrk="1" latinLnBrk="0" hangingPunct="1">
-        <a:defRPr sz="1800" kern="1200">
-          <a:solidFill>
-            <a:schemeClr val="tx1"/>
-          </a:solidFill>
-          <a:latin typeface="+mn-lt"/>
-          <a:ea typeface="+mn-ea"/>
-          <a:cs typeface="+mn-cs"/>
-        </a:defRPr>
-      </a:lvl4pPr>
-      <a:lvl5pPr marL="1828800" algn="l" defTabSz="914400" rtl="0" eaLnBrk="1" latinLnBrk="0" hangingPunct="1">
-        <a:defRPr sz="1800" kern="1200">
-          <a:solidFill>
-            <a:schemeClr val="tx1"/>
-          </a:solidFill>
-          <a:latin typeface="+mn-lt"/>
-          <a:ea typeface="+mn-ea"/>
-          <a:cs typeface="+mn-cs"/>
-        </a:defRPr>
-      </a:lvl5pPr>
-      <a:lvl6pPr marL="2286000" algn="l" defTabSz="914400" rtl="0" eaLnBrk="1" latinLnBrk="0" hangingPunct="1">
-        <a:defRPr sz="1800" kern="1200">
-          <a:solidFill>
-            <a:schemeClr val="tx1"/>
-          </a:solidFill>
-          <a:latin typeface="+mn-lt"/>
-          <a:ea typeface="+mn-ea"/>
-          <a:cs typeface="+mn-cs"/>
-        </a:defRPr>
-      </a:lvl6pPr>
-      <a:lvl7pPr marL="2743200" algn="l" defTabSz="914400" rtl="0" eaLnBrk="1" latinLnBrk="0" hangingPunct="1">
-        <a:defRPr sz="1800" kern="1200">
-          <a:solidFill>
-            <a:schemeClr val="tx1"/>
-          </a:solidFill>
-          <a:latin typeface="+mn-lt"/>
-          <a:ea typeface="+mn-ea"/>
-          <a:cs typeface="+mn-cs"/>
-        </a:defRPr>
-      </a:lvl7pPr>
-      <a:lvl8pPr marL="3200400" algn="l" defTabSz="914400" rtl="0" eaLnBrk="1" latinLnBrk="0" hangingPunct="1">
-        <a:defRPr sz="1800" kern="1200">
-          <a:solidFill>
-            <a:schemeClr val="tx1"/>
-          </a:solidFill>
-          <a:latin typeface="+mn-lt"/>
-          <a:ea typeface="+mn-ea"/>
-          <a:cs typeface="+mn-cs"/>
-        </a:defRPr>
-      </a:lvl8pPr>
-      <a:lvl9pPr marL="3657600" algn="l" defTabSz="914400" rtl="0" eaLnBrk="1" latinLnBrk="0" hangingPunct="1">
-        <a:defRPr sz="1800" kern="1200">
-          <a:solidFill>
-            <a:schemeClr val="tx1"/>
-          </a:solidFill>
-          <a:latin typeface="+mn-lt"/>
-          <a:ea typeface="+mn-ea"/>
-          <a:cs typeface="+mn-cs"/>
-        </a:defRPr>
-      </a:lvl9pPr>
-    </p:otherStyle>
-  </p:txStyles>
-</p:sldMaster>
-</file>
-
 <file path=ppt/slides/slide1.xml><?xml version="1.0" encoding="utf-8"?>
 <p:sld xmlns:a="http://schemas.openxmlformats.org/drawingml/2006/main" xmlns:r="http://schemas.openxmlformats.org/officeDocument/2006/relationships" xmlns:p="http://schemas.openxmlformats.org/presentationml/2006/main">
   <p:cSld name="Slide 1">
@@ -3667,10 +3388,10 @@
       </p:sp>
       <p:sp>
         <p:nvSpPr>
-          <p:cNvPr id="19" name="Rettangolo 18">
+          <p:cNvPr id="20" name="Rettangolo 19">
             <a:extLst>
               <a:ext uri="{FF2B5EF4-FFF2-40B4-BE49-F238E27FC236}">
-                <a16:creationId xmlns:a16="http://schemas.microsoft.com/office/drawing/2014/main" id="{251BF78C-2940-02B3-6200-64E64F7E52AB}"/>
+                <a16:creationId xmlns:a16="http://schemas.microsoft.com/office/drawing/2014/main" id="{4C7F2062-4182-2305-6743-D55548778DE3}"/>
               </a:ext>
             </a:extLst>
           </p:cNvPr>
@@ -3679,18 +3400,18 @@
         </p:nvSpPr>
         <p:spPr>
           <a:xfrm>
-            <a:off x="10961052" y="6559422"/>
-            <a:ext cx="1138335" cy="223934"/>
+            <a:off x="10913577" y="6204858"/>
+            <a:ext cx="1220585" cy="592494"/>
           </a:xfrm>
           <a:prstGeom prst="rect">
             <a:avLst/>
           </a:prstGeom>
           <a:solidFill>
-            <a:srgbClr val="FFF8F0"/>
+            <a:srgbClr val="FFFCF5"/>
           </a:solidFill>
           <a:ln>
             <a:solidFill>
-              <a:srgbClr val="FFF8F0"/>
+              <a:srgbClr val="FFFCF5"/>
             </a:solidFill>
           </a:ln>
         </p:spPr>
@@ -3715,7 +3436,7 @@
           <a:lstStyle/>
           <a:p>
             <a:pPr algn="ctr"/>
-            <a:endParaRPr lang="it-IT"/>
+            <a:endParaRPr lang="it-IT" dirty="0"/>
           </a:p>
         </p:txBody>
       </p:sp>
@@ -4296,10 +4017,10 @@
       </p:sp>
       <p:sp>
         <p:nvSpPr>
-          <p:cNvPr id="11" name="Rettangolo 10">
+          <p:cNvPr id="7" name="Rettangolo 6">
             <a:extLst>
               <a:ext uri="{FF2B5EF4-FFF2-40B4-BE49-F238E27FC236}">
-                <a16:creationId xmlns:a16="http://schemas.microsoft.com/office/drawing/2014/main" id="{EB698D01-92F7-ABBE-28EE-A42260AB28EA}"/>
+                <a16:creationId xmlns:a16="http://schemas.microsoft.com/office/drawing/2014/main" id="{D329EBE4-F62C-6705-87F8-E627DD3474F0}"/>
               </a:ext>
             </a:extLst>
           </p:cNvPr>
@@ -4308,8 +4029,8 @@
         </p:nvSpPr>
         <p:spPr>
           <a:xfrm>
-            <a:off x="10291665" y="6326154"/>
-            <a:ext cx="1828532" cy="475863"/>
+            <a:off x="10913577" y="6204858"/>
+            <a:ext cx="1220585" cy="592494"/>
           </a:xfrm>
           <a:prstGeom prst="rect">
             <a:avLst/>
@@ -4318,7 +4039,9 @@
             <a:srgbClr val="FFFCF5"/>
           </a:solidFill>
           <a:ln>
-            <a:noFill/>
+            <a:solidFill>
+              <a:srgbClr val="FFFCF5"/>
+            </a:solidFill>
           </a:ln>
         </p:spPr>
         <p:style>
@@ -5253,32 +4976,62 @@
           </a:p>
         </p:txBody>
       </p:sp>
-      <p:sp>
-        <p:nvSpPr>
-          <p:cNvPr id="27" name="Rettangolo 26">
+      <p:pic>
+        <p:nvPicPr>
+          <p:cNvPr id="28" name="Immagine 27">
             <a:extLst>
               <a:ext uri="{FF2B5EF4-FFF2-40B4-BE49-F238E27FC236}">
-                <a16:creationId xmlns:a16="http://schemas.microsoft.com/office/drawing/2014/main" id="{DA64EAF0-2E2D-572A-65B8-1C36800F7082}"/>
+                <a16:creationId xmlns:a16="http://schemas.microsoft.com/office/drawing/2014/main" id="{799AB428-EDC6-A39E-9CB9-7595C27F8449}"/>
               </a:ext>
             </a:extLst>
           </p:cNvPr>
-          <p:cNvSpPr/>
-          <p:nvPr/>
-        </p:nvSpPr>
-        <p:spPr>
-          <a:xfrm>
-            <a:off x="10961052" y="6559422"/>
-            <a:ext cx="1138335" cy="223934"/>
+          <p:cNvPicPr>
+            <a:picLocks noChangeAspect="1"/>
+          </p:cNvPicPr>
+          <p:nvPr/>
+        </p:nvPicPr>
+        <p:blipFill>
+          <a:blip r:embed="rId8"/>
+          <a:stretch>
+            <a:fillRect/>
+          </a:stretch>
+        </p:blipFill>
+        <p:spPr>
+          <a:xfrm>
+            <a:off x="685086" y="199760"/>
+            <a:ext cx="2996465" cy="6251510"/>
+          </a:xfrm>
+          <a:prstGeom prst="rect">
+            <a:avLst/>
+          </a:prstGeom>
+        </p:spPr>
+      </p:pic>
+      <p:sp>
+        <p:nvSpPr>
+          <p:cNvPr id="26" name="Rettangolo 25">
+            <a:extLst>
+              <a:ext uri="{FF2B5EF4-FFF2-40B4-BE49-F238E27FC236}">
+                <a16:creationId xmlns:a16="http://schemas.microsoft.com/office/drawing/2014/main" id="{4AE20AE1-D635-9C2C-3E17-A11A3FA29751}"/>
+              </a:ext>
+            </a:extLst>
+          </p:cNvPr>
+          <p:cNvSpPr/>
+          <p:nvPr/>
+        </p:nvSpPr>
+        <p:spPr>
+          <a:xfrm>
+            <a:off x="10913577" y="6427290"/>
+            <a:ext cx="1220585" cy="370061"/>
           </a:xfrm>
           <a:prstGeom prst="rect">
             <a:avLst/>
           </a:prstGeom>
           <a:solidFill>
-            <a:srgbClr val="FFF8F0"/>
+            <a:srgbClr val="FFFCF5"/>
           </a:solidFill>
           <a:ln>
             <a:solidFill>
-              <a:srgbClr val="FFF8F0"/>
+              <a:srgbClr val="FFFCF5"/>
             </a:solidFill>
           </a:ln>
         </p:spPr>
@@ -5303,40 +5056,10 @@
           <a:lstStyle/>
           <a:p>
             <a:pPr algn="ctr"/>
-            <a:endParaRPr lang="it-IT"/>
-          </a:p>
-        </p:txBody>
-      </p:sp>
-      <p:pic>
-        <p:nvPicPr>
-          <p:cNvPr id="28" name="Immagine 27">
-            <a:extLst>
-              <a:ext uri="{FF2B5EF4-FFF2-40B4-BE49-F238E27FC236}">
-                <a16:creationId xmlns:a16="http://schemas.microsoft.com/office/drawing/2014/main" id="{799AB428-EDC6-A39E-9CB9-7595C27F8449}"/>
-              </a:ext>
-            </a:extLst>
-          </p:cNvPr>
-          <p:cNvPicPr>
-            <a:picLocks noChangeAspect="1"/>
-          </p:cNvPicPr>
-          <p:nvPr/>
-        </p:nvPicPr>
-        <p:blipFill>
-          <a:blip r:embed="rId8"/>
-          <a:stretch>
-            <a:fillRect/>
-          </a:stretch>
-        </p:blipFill>
-        <p:spPr>
-          <a:xfrm>
-            <a:off x="685086" y="199760"/>
-            <a:ext cx="2996465" cy="6251510"/>
-          </a:xfrm>
-          <a:prstGeom prst="rect">
-            <a:avLst/>
-          </a:prstGeom>
-        </p:spPr>
-      </p:pic>
+            <a:endParaRPr lang="it-IT" dirty="0"/>
+          </a:p>
+        </p:txBody>
+      </p:sp>
     </p:spTree>
   </p:cSld>
   <p:clrMapOvr>
@@ -6132,10 +5855,10 @@
       </p:sp>
       <p:sp>
         <p:nvSpPr>
-          <p:cNvPr id="20" name="Rettangolo 19">
+          <p:cNvPr id="17" name="Rettangolo 16">
             <a:extLst>
               <a:ext uri="{FF2B5EF4-FFF2-40B4-BE49-F238E27FC236}">
-                <a16:creationId xmlns:a16="http://schemas.microsoft.com/office/drawing/2014/main" id="{C8EB2CC5-052E-61C8-08AD-4DA21E17D649}"/>
+                <a16:creationId xmlns:a16="http://schemas.microsoft.com/office/drawing/2014/main" id="{F2B0A44C-ACF1-A0EB-E5DE-3B3FC7DADA72}"/>
               </a:ext>
             </a:extLst>
           </p:cNvPr>
@@ -6144,19 +5867,15 @@
         </p:nvSpPr>
         <p:spPr>
           <a:xfrm>
-            <a:off x="10961052" y="6559422"/>
-            <a:ext cx="1138335" cy="223934"/>
-          </a:xfrm>
-          <a:prstGeom prst="rect">
-            <a:avLst/>
-          </a:prstGeom>
-          <a:solidFill>
-            <a:srgbClr val="FFF8F0"/>
-          </a:solidFill>
+            <a:off x="5887616" y="6083559"/>
+            <a:ext cx="1828532" cy="475863"/>
+          </a:xfrm>
+          <a:prstGeom prst="rect">
+            <a:avLst/>
+          </a:prstGeom>
+          <a:noFill/>
           <a:ln>
-            <a:solidFill>
-              <a:srgbClr val="FFF8F0"/>
-            </a:solidFill>
+            <a:noFill/>
           </a:ln>
         </p:spPr>
         <p:style>
@@ -6186,10 +5905,10 @@
       </p:sp>
       <p:sp>
         <p:nvSpPr>
-          <p:cNvPr id="17" name="Rettangolo 16">
+          <p:cNvPr id="23" name="Rettangolo 22">
             <a:extLst>
               <a:ext uri="{FF2B5EF4-FFF2-40B4-BE49-F238E27FC236}">
-                <a16:creationId xmlns:a16="http://schemas.microsoft.com/office/drawing/2014/main" id="{F2B0A44C-ACF1-A0EB-E5DE-3B3FC7DADA72}"/>
+                <a16:creationId xmlns:a16="http://schemas.microsoft.com/office/drawing/2014/main" id="{E352E022-A85A-4A38-797C-3370EF5A386A}"/>
               </a:ext>
             </a:extLst>
           </p:cNvPr>
@@ -6198,15 +5917,19 @@
         </p:nvSpPr>
         <p:spPr>
           <a:xfrm>
-            <a:off x="5887616" y="6083559"/>
-            <a:ext cx="1828532" cy="475863"/>
-          </a:xfrm>
-          <a:prstGeom prst="rect">
-            <a:avLst/>
-          </a:prstGeom>
-          <a:noFill/>
+            <a:off x="10913577" y="6204858"/>
+            <a:ext cx="1220585" cy="592494"/>
+          </a:xfrm>
+          <a:prstGeom prst="rect">
+            <a:avLst/>
+          </a:prstGeom>
+          <a:solidFill>
+            <a:srgbClr val="FFFCF5"/>
+          </a:solidFill>
           <a:ln>
-            <a:noFill/>
+            <a:solidFill>
+              <a:srgbClr val="FFFCF5"/>
+            </a:solidFill>
           </a:ln>
         </p:spPr>
         <p:style>
@@ -6230,7 +5953,7 @@
           <a:lstStyle/>
           <a:p>
             <a:pPr algn="ctr"/>
-            <a:endParaRPr lang="it-IT"/>
+            <a:endParaRPr lang="it-IT" dirty="0"/>
           </a:p>
         </p:txBody>
       </p:sp>
@@ -10832,10 +10555,10 @@
       </p:sp>
       <p:sp>
         <p:nvSpPr>
-          <p:cNvPr id="17" name="Rettangolo 16">
+          <p:cNvPr id="20" name="Rettangolo 19">
             <a:extLst>
               <a:ext uri="{FF2B5EF4-FFF2-40B4-BE49-F238E27FC236}">
-                <a16:creationId xmlns:a16="http://schemas.microsoft.com/office/drawing/2014/main" id="{4C450058-7DEF-7A71-7A12-E1C2D5356F94}"/>
+                <a16:creationId xmlns:a16="http://schemas.microsoft.com/office/drawing/2014/main" id="{A04CE64D-4AC6-4703-A031-ED530A1FAB1A}"/>
               </a:ext>
             </a:extLst>
           </p:cNvPr>
@@ -10844,18 +10567,18 @@
         </p:nvSpPr>
         <p:spPr>
           <a:xfrm>
-            <a:off x="10961052" y="6559422"/>
-            <a:ext cx="1138335" cy="223934"/>
+            <a:off x="10913577" y="6204858"/>
+            <a:ext cx="1220585" cy="592494"/>
           </a:xfrm>
           <a:prstGeom prst="rect">
             <a:avLst/>
           </a:prstGeom>
           <a:solidFill>
-            <a:srgbClr val="FFF8F0"/>
+            <a:srgbClr val="FFFCF5"/>
           </a:solidFill>
           <a:ln>
             <a:solidFill>
-              <a:srgbClr val="FFF8F0"/>
+              <a:srgbClr val="FFFCF5"/>
             </a:solidFill>
           </a:ln>
         </p:spPr>
@@ -10880,7 +10603,7 @@
           <a:lstStyle/>
           <a:p>
             <a:pPr algn="ctr"/>
-            <a:endParaRPr lang="it-IT"/>
+            <a:endParaRPr lang="it-IT" dirty="0"/>
           </a:p>
         </p:txBody>
       </p:sp>
@@ -11019,10 +10742,10 @@
       </p:sp>
       <p:sp>
         <p:nvSpPr>
-          <p:cNvPr id="8" name="Rettangolo 7">
+          <p:cNvPr id="4" name="Rettangolo 3">
             <a:extLst>
               <a:ext uri="{FF2B5EF4-FFF2-40B4-BE49-F238E27FC236}">
-                <a16:creationId xmlns:a16="http://schemas.microsoft.com/office/drawing/2014/main" id="{755F6FEE-8057-65F7-6010-A445B4795AED}"/>
+                <a16:creationId xmlns:a16="http://schemas.microsoft.com/office/drawing/2014/main" id="{577826C6-BB0D-09A7-E574-DC0813B84765}"/>
               </a:ext>
             </a:extLst>
           </p:cNvPr>
@@ -11031,8 +10754,8 @@
         </p:nvSpPr>
         <p:spPr>
           <a:xfrm>
-            <a:off x="10291665" y="6326154"/>
-            <a:ext cx="1828532" cy="475863"/>
+            <a:off x="10913577" y="6204858"/>
+            <a:ext cx="1220585" cy="592494"/>
           </a:xfrm>
           <a:prstGeom prst="rect">
             <a:avLst/>
@@ -11041,7 +10764,9 @@
             <a:srgbClr val="FFFCF5"/>
           </a:solidFill>
           <a:ln>
-            <a:noFill/>
+            <a:solidFill>
+              <a:srgbClr val="FFFCF5"/>
+            </a:solidFill>
           </a:ln>
         </p:spPr>
         <p:style>
@@ -11373,301 +11098,6 @@
 </file>
 
 <file path=ppt/theme/theme2.xml><?xml version="1.0" encoding="utf-8"?>
-<a:theme xmlns:a="http://schemas.openxmlformats.org/drawingml/2006/main" name="1_Office Theme">
-  <a:themeElements>
-    <a:clrScheme name="Office">
-      <a:dk1>
-        <a:sysClr val="windowText" lastClr="000000"/>
-      </a:dk1>
-      <a:lt1>
-        <a:sysClr val="window" lastClr="FFFFFF"/>
-      </a:lt1>
-      <a:dk2>
-        <a:srgbClr val="44546A"/>
-      </a:dk2>
-      <a:lt2>
-        <a:srgbClr val="E7E6E6"/>
-      </a:lt2>
-      <a:accent1>
-        <a:srgbClr val="4472C4"/>
-      </a:accent1>
-      <a:accent2>
-        <a:srgbClr val="ED7D31"/>
-      </a:accent2>
-      <a:accent3>
-        <a:srgbClr val="A5A5A5"/>
-      </a:accent3>
-      <a:accent4>
-        <a:srgbClr val="FFC000"/>
-      </a:accent4>
-      <a:accent5>
-        <a:srgbClr val="5B9BD5"/>
-      </a:accent5>
-      <a:accent6>
-        <a:srgbClr val="70AD47"/>
-      </a:accent6>
-      <a:hlink>
-        <a:srgbClr val="0563C1"/>
-      </a:hlink>
-      <a:folHlink>
-        <a:srgbClr val="954F72"/>
-      </a:folHlink>
-    </a:clrScheme>
-    <a:fontScheme name="Office">
-      <a:majorFont>
-        <a:latin typeface="Calibri Light" panose="020F0302020204030204"/>
-        <a:ea typeface=""/>
-        <a:cs typeface=""/>
-        <a:font script="Jpan" typeface="游ゴシック Light"/>
-        <a:font script="Hang" typeface="맑은 고딕"/>
-        <a:font script="Hans" typeface="等线 Light"/>
-        <a:font script="Hant" typeface="新細明體"/>
-        <a:font script="Arab" typeface="Times New Roman"/>
-        <a:font script="Hebr" typeface="Times New Roman"/>
-        <a:font script="Thai" typeface="Angsana New"/>
-        <a:font script="Ethi" typeface="Nyala"/>
-        <a:font script="Beng" typeface="Vrinda"/>
-        <a:font script="Gujr" typeface="Shruti"/>
-        <a:font script="Khmr" typeface="MoolBoran"/>
-        <a:font script="Knda" typeface="Tunga"/>
-        <a:font script="Guru" typeface="Raavi"/>
-        <a:font script="Cans" typeface="Euphemia"/>
-        <a:font script="Cher" typeface="Plantagenet Cherokee"/>
-        <a:font script="Yiii" typeface="Microsoft Yi Baiti"/>
-        <a:font script="Tibt" typeface="Microsoft Himalaya"/>
-        <a:font script="Thaa" typeface="MV Boli"/>
-        <a:font script="Deva" typeface="Mangal"/>
-        <a:font script="Telu" typeface="Gautami"/>
-        <a:font script="Taml" typeface="Latha"/>
-        <a:font script="Syrc" typeface="Estrangelo Edessa"/>
-        <a:font script="Orya" typeface="Kalinga"/>
-        <a:font script="Mlym" typeface="Kartika"/>
-        <a:font script="Laoo" typeface="DokChampa"/>
-        <a:font script="Sinh" typeface="Iskoola Pota"/>
-        <a:font script="Mong" typeface="Mongolian Baiti"/>
-        <a:font script="Viet" typeface="Times New Roman"/>
-        <a:font script="Uigh" typeface="Microsoft Uighur"/>
-        <a:font script="Geor" typeface="Sylfaen"/>
-        <a:font script="Armn" typeface="Arial"/>
-        <a:font script="Bugi" typeface="Leelawadee UI"/>
-        <a:font script="Bopo" typeface="Microsoft JhengHei"/>
-        <a:font script="Java" typeface="Javanese Text"/>
-        <a:font script="Lisu" typeface="Segoe UI"/>
-        <a:font script="Mymr" typeface="Myanmar Text"/>
-        <a:font script="Nkoo" typeface="Ebrima"/>
-        <a:font script="Olck" typeface="Nirmala UI"/>
-        <a:font script="Osma" typeface="Ebrima"/>
-        <a:font script="Phag" typeface="Phagspa"/>
-        <a:font script="Syrn" typeface="Estrangelo Edessa"/>
-        <a:font script="Syrj" typeface="Estrangelo Edessa"/>
-        <a:font script="Syre" typeface="Estrangelo Edessa"/>
-        <a:font script="Sora" typeface="Nirmala UI"/>
-        <a:font script="Tale" typeface="Microsoft Tai Le"/>
-        <a:font script="Talu" typeface="Microsoft New Tai Lue"/>
-        <a:font script="Tfng" typeface="Ebrima"/>
-      </a:majorFont>
-      <a:minorFont>
-        <a:latin typeface="Calibri" panose="020F0502020204030204"/>
-        <a:ea typeface=""/>
-        <a:cs typeface=""/>
-        <a:font script="Jpan" typeface="游ゴシック"/>
-        <a:font script="Hang" typeface="맑은 고딕"/>
-        <a:font script="Hans" typeface="等线"/>
-        <a:font script="Hant" typeface="新細明體"/>
-        <a:font script="Arab" typeface="Arial"/>
-        <a:font script="Hebr" typeface="Arial"/>
-        <a:font script="Thai" typeface="Cordia New"/>
-        <a:font script="Ethi" typeface="Nyala"/>
-        <a:font script="Beng" typeface="Vrinda"/>
-        <a:font script="Gujr" typeface="Shruti"/>
-        <a:font script="Khmr" typeface="DaunPenh"/>
-        <a:font script="Knda" typeface="Tunga"/>
-        <a:font script="Guru" typeface="Raavi"/>
-        <a:font script="Cans" typeface="Euphemia"/>
-        <a:font script="Cher" typeface="Plantagenet Cherokee"/>
-        <a:font script="Yiii" typeface="Microsoft Yi Baiti"/>
-        <a:font script="Tibt" typeface="Microsoft Himalaya"/>
-        <a:font script="Thaa" typeface="MV Boli"/>
-        <a:font script="Deva" typeface="Mangal"/>
-        <a:font script="Telu" typeface="Gautami"/>
-        <a:font script="Taml" typeface="Latha"/>
-        <a:font script="Syrc" typeface="Estrangelo Edessa"/>
-        <a:font script="Orya" typeface="Kalinga"/>
-        <a:font script="Mlym" typeface="Kartika"/>
-        <a:font script="Laoo" typeface="DokChampa"/>
-        <a:font script="Sinh" typeface="Iskoola Pota"/>
-        <a:font script="Mong" typeface="Mongolian Baiti"/>
-        <a:font script="Viet" typeface="Arial"/>
-        <a:font script="Uigh" typeface="Microsoft Uighur"/>
-        <a:font script="Geor" typeface="Sylfaen"/>
-        <a:font script="Armn" typeface="Arial"/>
-        <a:font script="Bugi" typeface="Leelawadee UI"/>
-        <a:font script="Bopo" typeface="Microsoft JhengHei"/>
-        <a:font script="Java" typeface="Javanese Text"/>
-        <a:font script="Lisu" typeface="Segoe UI"/>
-        <a:font script="Mymr" typeface="Myanmar Text"/>
-        <a:font script="Nkoo" typeface="Ebrima"/>
-        <a:font script="Olck" typeface="Nirmala UI"/>
-        <a:font script="Osma" typeface="Ebrima"/>
-        <a:font script="Phag" typeface="Phagspa"/>
-        <a:font script="Syrn" typeface="Estrangelo Edessa"/>
-        <a:font script="Syrj" typeface="Estrangelo Edessa"/>
-        <a:font script="Syre" typeface="Estrangelo Edessa"/>
-        <a:font script="Sora" typeface="Nirmala UI"/>
-        <a:font script="Tale" typeface="Microsoft Tai Le"/>
-        <a:font script="Talu" typeface="Microsoft New Tai Lue"/>
-        <a:font script="Tfng" typeface="Ebrima"/>
-      </a:minorFont>
-    </a:fontScheme>
-    <a:fmtScheme name="Office">
-      <a:fillStyleLst>
-        <a:solidFill>
-          <a:schemeClr val="phClr"/>
-        </a:solidFill>
-        <a:gradFill rotWithShape="1">
-          <a:gsLst>
-            <a:gs pos="0">
-              <a:schemeClr val="phClr">
-                <a:lumMod val="110000"/>
-                <a:satMod val="105000"/>
-                <a:tint val="67000"/>
-              </a:schemeClr>
-            </a:gs>
-            <a:gs pos="50000">
-              <a:schemeClr val="phClr">
-                <a:lumMod val="105000"/>
-                <a:satMod val="103000"/>
-                <a:tint val="73000"/>
-              </a:schemeClr>
-            </a:gs>
-            <a:gs pos="100000">
-              <a:schemeClr val="phClr">
-                <a:lumMod val="105000"/>
-                <a:satMod val="109000"/>
-                <a:tint val="81000"/>
-              </a:schemeClr>
-            </a:gs>
-          </a:gsLst>
-          <a:lin ang="5400000" scaled="0"/>
-        </a:gradFill>
-        <a:gradFill rotWithShape="1">
-          <a:gsLst>
-            <a:gs pos="0">
-              <a:schemeClr val="phClr">
-                <a:satMod val="103000"/>
-                <a:lumMod val="102000"/>
-                <a:tint val="94000"/>
-              </a:schemeClr>
-            </a:gs>
-            <a:gs pos="50000">
-              <a:schemeClr val="phClr">
-                <a:satMod val="110000"/>
-                <a:lumMod val="100000"/>
-                <a:shade val="100000"/>
-              </a:schemeClr>
-            </a:gs>
-            <a:gs pos="100000">
-              <a:schemeClr val="phClr">
-                <a:lumMod val="99000"/>
-                <a:satMod val="120000"/>
-                <a:shade val="78000"/>
-              </a:schemeClr>
-            </a:gs>
-          </a:gsLst>
-          <a:lin ang="5400000" scaled="0"/>
-        </a:gradFill>
-      </a:fillStyleLst>
-      <a:lnStyleLst>
-        <a:ln w="6350" cap="flat" cmpd="sng" algn="ctr">
-          <a:solidFill>
-            <a:schemeClr val="phClr"/>
-          </a:solidFill>
-          <a:prstDash val="solid"/>
-          <a:miter lim="800000"/>
-        </a:ln>
-        <a:ln w="12700" cap="flat" cmpd="sng" algn="ctr">
-          <a:solidFill>
-            <a:schemeClr val="phClr"/>
-          </a:solidFill>
-          <a:prstDash val="solid"/>
-          <a:miter lim="800000"/>
-        </a:ln>
-        <a:ln w="19050" cap="flat" cmpd="sng" algn="ctr">
-          <a:solidFill>
-            <a:schemeClr val="phClr"/>
-          </a:solidFill>
-          <a:prstDash val="solid"/>
-          <a:miter lim="800000"/>
-        </a:ln>
-      </a:lnStyleLst>
-      <a:effectStyleLst>
-        <a:effectStyle>
-          <a:effectLst/>
-        </a:effectStyle>
-        <a:effectStyle>
-          <a:effectLst/>
-        </a:effectStyle>
-        <a:effectStyle>
-          <a:effectLst>
-            <a:outerShdw blurRad="57150" dist="19050" dir="5400000" algn="ctr" rotWithShape="0">
-              <a:srgbClr val="000000">
-                <a:alpha val="63000"/>
-              </a:srgbClr>
-            </a:outerShdw>
-          </a:effectLst>
-        </a:effectStyle>
-      </a:effectStyleLst>
-      <a:bgFillStyleLst>
-        <a:solidFill>
-          <a:schemeClr val="phClr"/>
-        </a:solidFill>
-        <a:solidFill>
-          <a:schemeClr val="phClr">
-            <a:tint val="95000"/>
-            <a:satMod val="170000"/>
-          </a:schemeClr>
-        </a:solidFill>
-        <a:gradFill rotWithShape="1">
-          <a:gsLst>
-            <a:gs pos="0">
-              <a:schemeClr val="phClr">
-                <a:tint val="93000"/>
-                <a:satMod val="150000"/>
-                <a:shade val="98000"/>
-                <a:lumMod val="102000"/>
-              </a:schemeClr>
-            </a:gs>
-            <a:gs pos="50000">
-              <a:schemeClr val="phClr">
-                <a:tint val="98000"/>
-                <a:satMod val="130000"/>
-                <a:shade val="90000"/>
-                <a:lumMod val="103000"/>
-              </a:schemeClr>
-            </a:gs>
-            <a:gs pos="100000">
-              <a:schemeClr val="phClr">
-                <a:shade val="63000"/>
-                <a:satMod val="120000"/>
-              </a:schemeClr>
-            </a:gs>
-          </a:gsLst>
-          <a:lin ang="5400000" scaled="0"/>
-        </a:gradFill>
-      </a:bgFillStyleLst>
-    </a:fmtScheme>
-  </a:themeElements>
-  <a:objectDefaults/>
-  <a:extraClrSchemeLst/>
-  <a:extLst>
-    <a:ext uri="{05A4C25C-085E-4340-85A3-A5531E510DB2}">
-      <thm15:themeFamily xmlns:thm15="http://schemas.microsoft.com/office/thememl/2012/main" name="Office Theme" id="{62F939B6-93AF-4DB8-9C6B-D6C7DFDC589F}" vid="{4A3C46E8-61CC-4603-A589-7422A47A8E4A}"/>
-    </a:ext>
-  </a:extLst>
-</a:theme>
-</file>
-
-<file path=ppt/theme/theme3.xml><?xml version="1.0" encoding="utf-8"?>
 <a:theme xmlns:a="http://schemas.openxmlformats.org/drawingml/2006/main" name="Tema di Office">
   <a:themeElements>
     <a:clrScheme name="Office">

--- a/presentation/Smart-Study-Rooms.pptx
+++ b/presentation/Smart-Study-Rooms.pptx
@@ -152,7 +152,7 @@
 <file path=ppt/revisionInfo.xml><?xml version="1.0" encoding="utf-8"?>
 <p1510:revInfo xmlns:a="http://schemas.openxmlformats.org/drawingml/2006/main" xmlns:r="http://schemas.openxmlformats.org/officeDocument/2006/relationships" xmlns:p1510="http://schemas.microsoft.com/office/powerpoint/2015/10/main">
   <p1510:revLst>
-    <p1510:client id="{D7FB788E-8B80-4776-8146-9265B36569C0}" v="3" dt="2026-09-08T12:16:10"/>
+    <p1510:client id="{D7FB788E-8B80-4776-8146-9265B36569C0}" v="17" dt="2026-09-08T13:21:53.432"/>
   </p1510:revLst>
 </p1510:revInfo>
 </file>
@@ -161,8 +161,8 @@
 <pc:chgInfo xmlns:a="http://schemas.openxmlformats.org/drawingml/2006/main" xmlns:r="http://schemas.openxmlformats.org/officeDocument/2006/relationships" xmlns:ac="http://schemas.microsoft.com/office/drawing/2013/main/command" xmlns:pc="http://schemas.microsoft.com/office/powerpoint/2013/main/command">
   <pc:docChgLst>
     <pc:chgData name="GIANLUCA CAVANI" userId="87922040f0d244e1" providerId="LiveId" clId="{D9E828B3-A941-4B93-80FD-F166EA6B65A7}"/>
-    <pc:docChg chg="undo custSel modSld">
-      <pc:chgData name="GIANLUCA CAVANI" userId="87922040f0d244e1" providerId="LiveId" clId="{D9E828B3-A941-4B93-80FD-F166EA6B65A7}" dt="2026-09-08T12:17:34.924" v="71" actId="1076"/>
+    <pc:docChg chg="undo custSel addSld delSld modSld sldOrd">
+      <pc:chgData name="GIANLUCA CAVANI" userId="87922040f0d244e1" providerId="LiveId" clId="{D9E828B3-A941-4B93-80FD-F166EA6B65A7}" dt="2026-09-08T13:23:44.044" v="105" actId="2696"/>
       <pc:docMkLst>
         <pc:docMk/>
       </pc:docMkLst>
@@ -241,6 +241,109 @@
             <ac:spMk id="14" creationId="{00000000-0000-0000-0000-000000000000}"/>
           </ac:spMkLst>
         </pc:spChg>
+      </pc:sldChg>
+      <pc:sldChg chg="modSp mod">
+        <pc:chgData name="GIANLUCA CAVANI" userId="87922040f0d244e1" providerId="LiveId" clId="{D9E828B3-A941-4B93-80FD-F166EA6B65A7}" dt="2026-09-08T13:23:02.759" v="104" actId="14100"/>
+        <pc:sldMkLst>
+          <pc:docMk/>
+          <pc:sldMk cId="0" sldId="261"/>
+        </pc:sldMkLst>
+        <pc:spChg chg="mod">
+          <ac:chgData name="GIANLUCA CAVANI" userId="87922040f0d244e1" providerId="LiveId" clId="{D9E828B3-A941-4B93-80FD-F166EA6B65A7}" dt="2026-09-08T13:20:58.616" v="82"/>
+          <ac:spMkLst>
+            <pc:docMk/>
+            <pc:sldMk cId="0" sldId="261"/>
+            <ac:spMk id="6" creationId="{00000000-0000-0000-0000-000000000000}"/>
+          </ac:spMkLst>
+        </pc:spChg>
+        <pc:spChg chg="mod">
+          <ac:chgData name="GIANLUCA CAVANI" userId="87922040f0d244e1" providerId="LiveId" clId="{D9E828B3-A941-4B93-80FD-F166EA6B65A7}" dt="2026-09-08T13:21:03.384" v="83"/>
+          <ac:spMkLst>
+            <pc:docMk/>
+            <pc:sldMk cId="0" sldId="261"/>
+            <ac:spMk id="7" creationId="{00000000-0000-0000-0000-000000000000}"/>
+          </ac:spMkLst>
+        </pc:spChg>
+        <pc:spChg chg="mod">
+          <ac:chgData name="GIANLUCA CAVANI" userId="87922040f0d244e1" providerId="LiveId" clId="{D9E828B3-A941-4B93-80FD-F166EA6B65A7}" dt="2026-09-08T13:21:09.609" v="84"/>
+          <ac:spMkLst>
+            <pc:docMk/>
+            <pc:sldMk cId="0" sldId="261"/>
+            <ac:spMk id="9" creationId="{00000000-0000-0000-0000-000000000000}"/>
+          </ac:spMkLst>
+        </pc:spChg>
+        <pc:spChg chg="mod">
+          <ac:chgData name="GIANLUCA CAVANI" userId="87922040f0d244e1" providerId="LiveId" clId="{D9E828B3-A941-4B93-80FD-F166EA6B65A7}" dt="2026-09-08T13:21:14.613" v="85"/>
+          <ac:spMkLst>
+            <pc:docMk/>
+            <pc:sldMk cId="0" sldId="261"/>
+            <ac:spMk id="10" creationId="{00000000-0000-0000-0000-000000000000}"/>
+          </ac:spMkLst>
+        </pc:spChg>
+        <pc:spChg chg="mod">
+          <ac:chgData name="GIANLUCA CAVANI" userId="87922040f0d244e1" providerId="LiveId" clId="{D9E828B3-A941-4B93-80FD-F166EA6B65A7}" dt="2026-09-08T13:21:21.165" v="88"/>
+          <ac:spMkLst>
+            <pc:docMk/>
+            <pc:sldMk cId="0" sldId="261"/>
+            <ac:spMk id="12" creationId="{00000000-0000-0000-0000-000000000000}"/>
+          </ac:spMkLst>
+        </pc:spChg>
+        <pc:spChg chg="mod">
+          <ac:chgData name="GIANLUCA CAVANI" userId="87922040f0d244e1" providerId="LiveId" clId="{D9E828B3-A941-4B93-80FD-F166EA6B65A7}" dt="2026-09-08T13:21:25.141" v="89"/>
+          <ac:spMkLst>
+            <pc:docMk/>
+            <pc:sldMk cId="0" sldId="261"/>
+            <ac:spMk id="13" creationId="{00000000-0000-0000-0000-000000000000}"/>
+          </ac:spMkLst>
+        </pc:spChg>
+        <pc:spChg chg="mod">
+          <ac:chgData name="GIANLUCA CAVANI" userId="87922040f0d244e1" providerId="LiveId" clId="{D9E828B3-A941-4B93-80FD-F166EA6B65A7}" dt="2026-09-08T13:21:30.254" v="90"/>
+          <ac:spMkLst>
+            <pc:docMk/>
+            <pc:sldMk cId="0" sldId="261"/>
+            <ac:spMk id="15" creationId="{00000000-0000-0000-0000-000000000000}"/>
+          </ac:spMkLst>
+        </pc:spChg>
+        <pc:spChg chg="mod">
+          <ac:chgData name="GIANLUCA CAVANI" userId="87922040f0d244e1" providerId="LiveId" clId="{D9E828B3-A941-4B93-80FD-F166EA6B65A7}" dt="2026-09-08T13:21:34.949" v="91"/>
+          <ac:spMkLst>
+            <pc:docMk/>
+            <pc:sldMk cId="0" sldId="261"/>
+            <ac:spMk id="16" creationId="{00000000-0000-0000-0000-000000000000}"/>
+          </ac:spMkLst>
+        </pc:spChg>
+        <pc:spChg chg="mod">
+          <ac:chgData name="GIANLUCA CAVANI" userId="87922040f0d244e1" providerId="LiveId" clId="{D9E828B3-A941-4B93-80FD-F166EA6B65A7}" dt="2026-09-08T13:21:48.659" v="93"/>
+          <ac:spMkLst>
+            <pc:docMk/>
+            <pc:sldMk cId="0" sldId="261"/>
+            <ac:spMk id="18" creationId="{00000000-0000-0000-0000-000000000000}"/>
+          </ac:spMkLst>
+        </pc:spChg>
+        <pc:spChg chg="mod">
+          <ac:chgData name="GIANLUCA CAVANI" userId="87922040f0d244e1" providerId="LiveId" clId="{D9E828B3-A941-4B93-80FD-F166EA6B65A7}" dt="2026-09-08T13:22:49.395" v="101" actId="20577"/>
+          <ac:spMkLst>
+            <pc:docMk/>
+            <pc:sldMk cId="0" sldId="261"/>
+            <ac:spMk id="19" creationId="{00000000-0000-0000-0000-000000000000}"/>
+          </ac:spMkLst>
+        </pc:spChg>
+        <pc:picChg chg="mod">
+          <ac:chgData name="GIANLUCA CAVANI" userId="87922040f0d244e1" providerId="LiveId" clId="{D9E828B3-A941-4B93-80FD-F166EA6B65A7}" dt="2026-09-08T13:19:30.495" v="73" actId="1076"/>
+          <ac:picMkLst>
+            <pc:docMk/>
+            <pc:sldMk cId="0" sldId="261"/>
+            <ac:picMk id="5" creationId="{00000000-0000-0000-0000-000000000000}"/>
+          </ac:picMkLst>
+        </pc:picChg>
+        <pc:picChg chg="mod">
+          <ac:chgData name="GIANLUCA CAVANI" userId="87922040f0d244e1" providerId="LiveId" clId="{D9E828B3-A941-4B93-80FD-F166EA6B65A7}" dt="2026-09-08T13:23:02.759" v="104" actId="14100"/>
+          <ac:picMkLst>
+            <pc:docMk/>
+            <pc:sldMk cId="0" sldId="261"/>
+            <ac:picMk id="17" creationId="{00000000-0000-0000-0000-000000000000}"/>
+          </ac:picMkLst>
+        </pc:picChg>
       </pc:sldChg>
       <pc:sldChg chg="modSp mod">
         <pc:chgData name="GIANLUCA CAVANI" userId="87922040f0d244e1" providerId="LiveId" clId="{D9E828B3-A941-4B93-80FD-F166EA6B65A7}" dt="2026-09-07T23:02:55.330" v="22" actId="1076"/>
@@ -432,6 +535,29 @@
             <pc:docMk/>
             <pc:sldMk cId="0" sldId="271"/>
             <ac:spMk id="11" creationId="{EB698D01-92F7-ABBE-28EE-A42260AB28EA}"/>
+          </ac:spMkLst>
+        </pc:spChg>
+      </pc:sldChg>
+      <pc:sldChg chg="addSp modSp new del mod ord">
+        <pc:chgData name="GIANLUCA CAVANI" userId="87922040f0d244e1" providerId="LiveId" clId="{D9E828B3-A941-4B93-80FD-F166EA6B65A7}" dt="2026-09-08T13:23:44.044" v="105" actId="2696"/>
+        <pc:sldMkLst>
+          <pc:docMk/>
+          <pc:sldMk cId="1470892683" sldId="272"/>
+        </pc:sldMkLst>
+        <pc:spChg chg="add mod">
+          <ac:chgData name="GIANLUCA CAVANI" userId="87922040f0d244e1" providerId="LiveId" clId="{D9E828B3-A941-4B93-80FD-F166EA6B65A7}" dt="2026-09-08T13:20:27.291" v="76" actId="1076"/>
+          <ac:spMkLst>
+            <pc:docMk/>
+            <pc:sldMk cId="1470892683" sldId="272"/>
+            <ac:spMk id="3" creationId="{3C5E50C4-389F-C8E3-2291-95E866C31938}"/>
+          </ac:spMkLst>
+        </pc:spChg>
+        <pc:spChg chg="add">
+          <ac:chgData name="GIANLUCA CAVANI" userId="87922040f0d244e1" providerId="LiveId" clId="{D9E828B3-A941-4B93-80FD-F166EA6B65A7}" dt="2026-09-08T13:20:49.046" v="79" actId="22"/>
+          <ac:spMkLst>
+            <pc:docMk/>
+            <pc:sldMk cId="1470892683" sldId="272"/>
+            <ac:spMk id="5" creationId="{F113F248-3155-FCC4-3F7A-6714910318E1}"/>
           </ac:spMkLst>
         </pc:spChg>
       </pc:sldChg>
@@ -8239,11 +8365,10 @@
           <a:bodyPr wrap="none" lIns="0" tIns="0" rIns="0" bIns="0" rtlCol="0" anchor="t"/>
           <a:lstStyle/>
           <a:p>
-            <a:pPr marL="0" indent="0" algn="l">
+            <a:pPr>
               <a:lnSpc>
                 <a:spcPct val="104000"/>
               </a:lnSpc>
-              <a:buNone/>
             </a:pPr>
             <a:r>
               <a:rPr lang="en-US" sz="1200" dirty="0">
@@ -8254,7 +8379,7 @@
                 <a:ea typeface="Twemoji Mozilla" pitchFamily="34" charset="-122"/>
                 <a:cs typeface="Twemoji Mozilla" pitchFamily="34" charset="-120"/>
               </a:rPr>
-              <a:t>📱</a:t>
+              <a:t>🔵</a:t>
             </a:r>
             <a:r>
               <a:rPr lang="en-US" sz="1200" dirty="0">
@@ -8265,8 +8390,49 @@
                 <a:ea typeface="MuseoModerno Medium" pitchFamily="34" charset="-122"/>
                 <a:cs typeface="MuseoModerno Medium" pitchFamily="34" charset="-120"/>
               </a:rPr>
-              <a:t> Livello Applicativo</a:t>
-            </a:r>
+              <a:t> </a:t>
+            </a:r>
+            <a:r>
+              <a:rPr lang="en-US" sz="1200" dirty="0" err="1">
+                <a:solidFill>
+                  <a:srgbClr val="2B4150"/>
+                </a:solidFill>
+                <a:latin typeface="MuseoModerno Medium" pitchFamily="34" charset="0"/>
+                <a:ea typeface="MuseoModerno Medium" pitchFamily="34" charset="-122"/>
+                <a:cs typeface="MuseoModerno Medium" pitchFamily="34" charset="-120"/>
+              </a:rPr>
+              <a:t>Livello</a:t>
+            </a:r>
+            <a:r>
+              <a:rPr lang="en-US" sz="1200" dirty="0">
+                <a:solidFill>
+                  <a:srgbClr val="2B4150"/>
+                </a:solidFill>
+                <a:latin typeface="MuseoModerno Medium" pitchFamily="34" charset="0"/>
+                <a:ea typeface="MuseoModerno Medium" pitchFamily="34" charset="-122"/>
+                <a:cs typeface="MuseoModerno Medium" pitchFamily="34" charset="-120"/>
+              </a:rPr>
+              <a:t> </a:t>
+            </a:r>
+            <a:r>
+              <a:rPr lang="en-US" sz="1200" dirty="0" err="1">
+                <a:solidFill>
+                  <a:srgbClr val="2B4150"/>
+                </a:solidFill>
+                <a:latin typeface="MuseoModerno Medium" pitchFamily="34" charset="0"/>
+                <a:ea typeface="MuseoModerno Medium" pitchFamily="34" charset="-122"/>
+                <a:cs typeface="MuseoModerno Medium" pitchFamily="34" charset="-120"/>
+              </a:rPr>
+              <a:t>Fisico</a:t>
+            </a:r>
+            <a:endParaRPr lang="en-US" sz="1200" dirty="0"/>
+          </a:p>
+          <a:p>
+            <a:pPr>
+              <a:lnSpc>
+                <a:spcPct val="104000"/>
+              </a:lnSpc>
+            </a:pPr>
             <a:endParaRPr lang="en-US" sz="1200" dirty="0"/>
           </a:p>
         </p:txBody>
@@ -8294,14 +8460,13 @@
           </a:bodyPr>
           <a:lstStyle/>
           <a:p>
-            <a:pPr marL="0" indent="0" algn="l">
+            <a:pPr>
               <a:lnSpc>
                 <a:spcPct val="110000"/>
               </a:lnSpc>
-              <a:buNone/>
             </a:pPr>
             <a:r>
-              <a:rPr lang="en-US" sz="950" dirty="0">
+              <a:rPr lang="en-US" sz="950" dirty="0" err="1">
                 <a:solidFill>
                   <a:srgbClr val="2B4150"/>
                 </a:solidFill>
@@ -8309,7 +8474,95 @@
                 <a:ea typeface="Source Sans 3" pitchFamily="34" charset="-122"/>
                 <a:cs typeface="Source Sans 3" pitchFamily="34" charset="-120"/>
               </a:rPr>
-              <a:t>Android app mostra le aule in tempo reale e riceve notifiche</a:t>
+              <a:t>Sensori</a:t>
+            </a:r>
+            <a:r>
+              <a:rPr lang="en-US" sz="950" dirty="0">
+                <a:solidFill>
+                  <a:srgbClr val="2B4150"/>
+                </a:solidFill>
+                <a:latin typeface="Source Sans 3" pitchFamily="34" charset="0"/>
+                <a:ea typeface="Source Sans 3" pitchFamily="34" charset="-122"/>
+                <a:cs typeface="Source Sans 3" pitchFamily="34" charset="-120"/>
+              </a:rPr>
+              <a:t> di </a:t>
+            </a:r>
+            <a:r>
+              <a:rPr lang="en-US" sz="950" dirty="0" err="1">
+                <a:solidFill>
+                  <a:srgbClr val="2B4150"/>
+                </a:solidFill>
+                <a:latin typeface="Source Sans 3" pitchFamily="34" charset="0"/>
+                <a:ea typeface="Source Sans 3" pitchFamily="34" charset="-122"/>
+                <a:cs typeface="Source Sans 3" pitchFamily="34" charset="-120"/>
+              </a:rPr>
+              <a:t>temperatura</a:t>
+            </a:r>
+            <a:r>
+              <a:rPr lang="en-US" sz="950" dirty="0">
+                <a:solidFill>
+                  <a:srgbClr val="2B4150"/>
+                </a:solidFill>
+                <a:latin typeface="Source Sans 3" pitchFamily="34" charset="0"/>
+                <a:ea typeface="Source Sans 3" pitchFamily="34" charset="-122"/>
+                <a:cs typeface="Source Sans 3" pitchFamily="34" charset="-120"/>
+              </a:rPr>
+              <a:t>, </a:t>
+            </a:r>
+            <a:r>
+              <a:rPr lang="en-US" sz="950" dirty="0" err="1">
+                <a:solidFill>
+                  <a:srgbClr val="2B4150"/>
+                </a:solidFill>
+                <a:latin typeface="Source Sans 3" pitchFamily="34" charset="0"/>
+                <a:ea typeface="Source Sans 3" pitchFamily="34" charset="-122"/>
+                <a:cs typeface="Source Sans 3" pitchFamily="34" charset="-120"/>
+              </a:rPr>
+              <a:t>umidità</a:t>
+            </a:r>
+            <a:r>
+              <a:rPr lang="en-US" sz="950" dirty="0">
+                <a:solidFill>
+                  <a:srgbClr val="2B4150"/>
+                </a:solidFill>
+                <a:latin typeface="Source Sans 3" pitchFamily="34" charset="0"/>
+                <a:ea typeface="Source Sans 3" pitchFamily="34" charset="-122"/>
+                <a:cs typeface="Source Sans 3" pitchFamily="34" charset="-120"/>
+              </a:rPr>
+              <a:t> e </a:t>
+            </a:r>
+            <a:r>
+              <a:rPr lang="en-US" sz="950" dirty="0" err="1">
+                <a:solidFill>
+                  <a:srgbClr val="2B4150"/>
+                </a:solidFill>
+                <a:latin typeface="Source Sans 3" pitchFamily="34" charset="0"/>
+                <a:ea typeface="Source Sans 3" pitchFamily="34" charset="-122"/>
+                <a:cs typeface="Source Sans 3" pitchFamily="34" charset="-120"/>
+              </a:rPr>
+              <a:t>rumore</a:t>
+            </a:r>
+            <a:r>
+              <a:rPr lang="en-US" sz="950" dirty="0">
+                <a:solidFill>
+                  <a:srgbClr val="2B4150"/>
+                </a:solidFill>
+                <a:latin typeface="Source Sans 3" pitchFamily="34" charset="0"/>
+                <a:ea typeface="Source Sans 3" pitchFamily="34" charset="-122"/>
+                <a:cs typeface="Source Sans 3" pitchFamily="34" charset="-120"/>
+              </a:rPr>
+              <a:t> + LED </a:t>
+            </a:r>
+            <a:r>
+              <a:rPr lang="en-US" sz="950" dirty="0" err="1">
+                <a:solidFill>
+                  <a:srgbClr val="2B4150"/>
+                </a:solidFill>
+                <a:latin typeface="Source Sans 3" pitchFamily="34" charset="0"/>
+                <a:ea typeface="Source Sans 3" pitchFamily="34" charset="-122"/>
+                <a:cs typeface="Source Sans 3" pitchFamily="34" charset="-120"/>
+              </a:rPr>
+              <a:t>attuatori</a:t>
             </a:r>
             <a:endParaRPr lang="en-US" sz="950" dirty="0"/>
           </a:p>
@@ -8366,11 +8619,10 @@
           <a:bodyPr wrap="none" lIns="0" tIns="0" rIns="0" bIns="0" rtlCol="0" anchor="t"/>
           <a:lstStyle/>
           <a:p>
-            <a:pPr marL="0" indent="0" algn="l">
+            <a:pPr>
               <a:lnSpc>
                 <a:spcPct val="104000"/>
               </a:lnSpc>
-              <a:buNone/>
             </a:pPr>
             <a:r>
               <a:rPr lang="en-US" sz="1200" dirty="0">
@@ -8381,7 +8633,7 @@
                 <a:ea typeface="Twemoji Mozilla" pitchFamily="34" charset="-122"/>
                 <a:cs typeface="Twemoji Mozilla" pitchFamily="34" charset="-120"/>
               </a:rPr>
-              <a:t>🔵</a:t>
+              <a:t>⚙️</a:t>
             </a:r>
             <a:r>
               <a:rPr lang="en-US" sz="1200" dirty="0">
@@ -8392,7 +8644,29 @@
                 <a:ea typeface="MuseoModerno Medium" pitchFamily="34" charset="-122"/>
                 <a:cs typeface="MuseoModerno Medium" pitchFamily="34" charset="-120"/>
               </a:rPr>
-              <a:t> Livello Fisico</a:t>
+              <a:t> </a:t>
+            </a:r>
+            <a:r>
+              <a:rPr lang="en-US" sz="1200" dirty="0" err="1">
+                <a:solidFill>
+                  <a:srgbClr val="2B4150"/>
+                </a:solidFill>
+                <a:latin typeface="MuseoModerno Medium" pitchFamily="34" charset="0"/>
+                <a:ea typeface="MuseoModerno Medium" pitchFamily="34" charset="-122"/>
+                <a:cs typeface="MuseoModerno Medium" pitchFamily="34" charset="-120"/>
+              </a:rPr>
+              <a:t>Livello</a:t>
+            </a:r>
+            <a:r>
+              <a:rPr lang="en-US" sz="1200" dirty="0">
+                <a:solidFill>
+                  <a:srgbClr val="2B4150"/>
+                </a:solidFill>
+                <a:latin typeface="MuseoModerno Medium" pitchFamily="34" charset="0"/>
+                <a:ea typeface="MuseoModerno Medium" pitchFamily="34" charset="-122"/>
+                <a:cs typeface="MuseoModerno Medium" pitchFamily="34" charset="-120"/>
+              </a:rPr>
+              <a:t> Embedded</a:t>
             </a:r>
             <a:endParaRPr lang="en-US" sz="1200" dirty="0"/>
           </a:p>
@@ -8421,11 +8695,10 @@
           </a:bodyPr>
           <a:lstStyle/>
           <a:p>
-            <a:pPr marL="0" indent="0" algn="l">
+            <a:pPr>
               <a:lnSpc>
                 <a:spcPct val="110000"/>
               </a:lnSpc>
-              <a:buNone/>
             </a:pPr>
             <a:r>
               <a:rPr lang="en-US" sz="950" dirty="0">
@@ -8436,7 +8709,84 @@
                 <a:ea typeface="Source Sans 3" pitchFamily="34" charset="-122"/>
                 <a:cs typeface="Source Sans 3" pitchFamily="34" charset="-120"/>
               </a:rPr>
-              <a:t>Sensori di temperatura, umidità e rumore + LED attuatori</a:t>
+              <a:t>Arduino UNO </a:t>
+            </a:r>
+            <a:r>
+              <a:rPr lang="en-US" sz="950" dirty="0" err="1">
+                <a:solidFill>
+                  <a:srgbClr val="2B4150"/>
+                </a:solidFill>
+                <a:latin typeface="Source Sans 3" pitchFamily="34" charset="0"/>
+                <a:ea typeface="Source Sans 3" pitchFamily="34" charset="-122"/>
+                <a:cs typeface="Source Sans 3" pitchFamily="34" charset="-120"/>
+              </a:rPr>
+              <a:t>legge</a:t>
+            </a:r>
+            <a:r>
+              <a:rPr lang="en-US" sz="950" dirty="0">
+                <a:solidFill>
+                  <a:srgbClr val="2B4150"/>
+                </a:solidFill>
+                <a:latin typeface="Source Sans 3" pitchFamily="34" charset="0"/>
+                <a:ea typeface="Source Sans 3" pitchFamily="34" charset="-122"/>
+                <a:cs typeface="Source Sans 3" pitchFamily="34" charset="-120"/>
+              </a:rPr>
+              <a:t> </a:t>
+            </a:r>
+            <a:r>
+              <a:rPr lang="en-US" sz="950" dirty="0" err="1">
+                <a:solidFill>
+                  <a:srgbClr val="2B4150"/>
+                </a:solidFill>
+                <a:latin typeface="Source Sans 3" pitchFamily="34" charset="0"/>
+                <a:ea typeface="Source Sans 3" pitchFamily="34" charset="-122"/>
+                <a:cs typeface="Source Sans 3" pitchFamily="34" charset="-120"/>
+              </a:rPr>
+              <a:t>i</a:t>
+            </a:r>
+            <a:r>
+              <a:rPr lang="en-US" sz="950" dirty="0">
+                <a:solidFill>
+                  <a:srgbClr val="2B4150"/>
+                </a:solidFill>
+                <a:latin typeface="Source Sans 3" pitchFamily="34" charset="0"/>
+                <a:ea typeface="Source Sans 3" pitchFamily="34" charset="-122"/>
+                <a:cs typeface="Source Sans 3" pitchFamily="34" charset="-120"/>
+              </a:rPr>
+              <a:t> </a:t>
+            </a:r>
+            <a:r>
+              <a:rPr lang="en-US" sz="950" dirty="0" err="1">
+                <a:solidFill>
+                  <a:srgbClr val="2B4150"/>
+                </a:solidFill>
+                <a:latin typeface="Source Sans 3" pitchFamily="34" charset="0"/>
+                <a:ea typeface="Source Sans 3" pitchFamily="34" charset="-122"/>
+                <a:cs typeface="Source Sans 3" pitchFamily="34" charset="-120"/>
+              </a:rPr>
+              <a:t>sensori</a:t>
+            </a:r>
+            <a:r>
+              <a:rPr lang="en-US" sz="950" dirty="0">
+                <a:solidFill>
+                  <a:srgbClr val="2B4150"/>
+                </a:solidFill>
+                <a:latin typeface="Source Sans 3" pitchFamily="34" charset="0"/>
+                <a:ea typeface="Source Sans 3" pitchFamily="34" charset="-122"/>
+                <a:cs typeface="Source Sans 3" pitchFamily="34" charset="-120"/>
+              </a:rPr>
+              <a:t> e produce </a:t>
+            </a:r>
+            <a:r>
+              <a:rPr lang="en-US" sz="950" dirty="0" err="1">
+                <a:solidFill>
+                  <a:srgbClr val="2B4150"/>
+                </a:solidFill>
+                <a:latin typeface="Source Sans 3" pitchFamily="34" charset="0"/>
+                <a:ea typeface="Source Sans 3" pitchFamily="34" charset="-122"/>
+                <a:cs typeface="Source Sans 3" pitchFamily="34" charset="-120"/>
+              </a:rPr>
+              <a:t>dati</a:t>
             </a:r>
             <a:endParaRPr lang="en-US" sz="950" dirty="0"/>
           </a:p>
@@ -8493,11 +8843,10 @@
           <a:bodyPr wrap="none" lIns="0" tIns="0" rIns="0" bIns="0" rtlCol="0" anchor="t"/>
           <a:lstStyle/>
           <a:p>
-            <a:pPr marL="0" indent="0" algn="l">
+            <a:pPr>
               <a:lnSpc>
                 <a:spcPct val="104000"/>
               </a:lnSpc>
-              <a:buNone/>
             </a:pPr>
             <a:r>
               <a:rPr lang="en-US" sz="1200" dirty="0">
@@ -8508,7 +8857,7 @@
                 <a:ea typeface="Twemoji Mozilla" pitchFamily="34" charset="-122"/>
                 <a:cs typeface="Twemoji Mozilla" pitchFamily="34" charset="-120"/>
               </a:rPr>
-              <a:t>⚙️</a:t>
+              <a:t>🌐</a:t>
             </a:r>
             <a:r>
               <a:rPr lang="en-US" sz="1200" dirty="0">
@@ -8519,8 +8868,38 @@
                 <a:ea typeface="MuseoModerno Medium" pitchFamily="34" charset="-122"/>
                 <a:cs typeface="MuseoModerno Medium" pitchFamily="34" charset="-120"/>
               </a:rPr>
-              <a:t> Livello Embedded</a:t>
-            </a:r>
+              <a:t> </a:t>
+            </a:r>
+            <a:r>
+              <a:rPr lang="en-US" sz="1200" dirty="0" err="1">
+                <a:solidFill>
+                  <a:srgbClr val="2B4150"/>
+                </a:solidFill>
+                <a:latin typeface="MuseoModerno Medium" pitchFamily="34" charset="0"/>
+                <a:ea typeface="MuseoModerno Medium" pitchFamily="34" charset="-122"/>
+                <a:cs typeface="MuseoModerno Medium" pitchFamily="34" charset="-120"/>
+              </a:rPr>
+              <a:t>Livello</a:t>
+            </a:r>
+            <a:r>
+              <a:rPr lang="en-US" sz="1200" dirty="0">
+                <a:solidFill>
+                  <a:srgbClr val="2B4150"/>
+                </a:solidFill>
+                <a:latin typeface="MuseoModerno Medium" pitchFamily="34" charset="0"/>
+                <a:ea typeface="MuseoModerno Medium" pitchFamily="34" charset="-122"/>
+                <a:cs typeface="MuseoModerno Medium" pitchFamily="34" charset="-120"/>
+              </a:rPr>
+              <a:t> Bridge</a:t>
+            </a:r>
+            <a:endParaRPr lang="en-US" sz="1200" dirty="0"/>
+          </a:p>
+          <a:p>
+            <a:pPr>
+              <a:lnSpc>
+                <a:spcPct val="104000"/>
+              </a:lnSpc>
+            </a:pPr>
             <a:endParaRPr lang="en-US" sz="1200" dirty="0"/>
           </a:p>
         </p:txBody>
@@ -8546,11 +8925,10 @@
           <a:bodyPr wrap="none" lIns="0" tIns="0" rIns="0" bIns="0" rtlCol="0" anchor="t"/>
           <a:lstStyle/>
           <a:p>
-            <a:pPr marL="0" indent="0" algn="l">
+            <a:pPr>
               <a:lnSpc>
                 <a:spcPct val="110000"/>
               </a:lnSpc>
-              <a:buNone/>
             </a:pPr>
             <a:r>
               <a:rPr lang="en-US" sz="950" dirty="0">
@@ -8561,7 +8939,73 @@
                 <a:ea typeface="Source Sans 3" pitchFamily="34" charset="-122"/>
                 <a:cs typeface="Source Sans 3" pitchFamily="34" charset="-120"/>
               </a:rPr>
-              <a:t>Arduino UNO legge i sensori e produce dati</a:t>
+              <a:t>Python </a:t>
+            </a:r>
+            <a:r>
+              <a:rPr lang="en-US" sz="950" dirty="0" err="1">
+                <a:solidFill>
+                  <a:srgbClr val="2B4150"/>
+                </a:solidFill>
+                <a:latin typeface="Source Sans 3" pitchFamily="34" charset="0"/>
+                <a:ea typeface="Source Sans 3" pitchFamily="34" charset="-122"/>
+                <a:cs typeface="Source Sans 3" pitchFamily="34" charset="-120"/>
+              </a:rPr>
+              <a:t>valida</a:t>
+            </a:r>
+            <a:r>
+              <a:rPr lang="en-US" sz="950" dirty="0">
+                <a:solidFill>
+                  <a:srgbClr val="2B4150"/>
+                </a:solidFill>
+                <a:latin typeface="Source Sans 3" pitchFamily="34" charset="0"/>
+                <a:ea typeface="Source Sans 3" pitchFamily="34" charset="-122"/>
+                <a:cs typeface="Source Sans 3" pitchFamily="34" charset="-120"/>
+              </a:rPr>
+              <a:t>, </a:t>
+            </a:r>
+            <a:r>
+              <a:rPr lang="en-US" sz="950" dirty="0" err="1">
+                <a:solidFill>
+                  <a:srgbClr val="2B4150"/>
+                </a:solidFill>
+                <a:latin typeface="Source Sans 3" pitchFamily="34" charset="0"/>
+                <a:ea typeface="Source Sans 3" pitchFamily="34" charset="-122"/>
+                <a:cs typeface="Source Sans 3" pitchFamily="34" charset="-120"/>
+              </a:rPr>
+              <a:t>timestampa</a:t>
+            </a:r>
+            <a:r>
+              <a:rPr lang="en-US" sz="950" dirty="0">
+                <a:solidFill>
+                  <a:srgbClr val="2B4150"/>
+                </a:solidFill>
+                <a:latin typeface="Source Sans 3" pitchFamily="34" charset="0"/>
+                <a:ea typeface="Source Sans 3" pitchFamily="34" charset="-122"/>
+                <a:cs typeface="Source Sans 3" pitchFamily="34" charset="-120"/>
+              </a:rPr>
+              <a:t> e </a:t>
+            </a:r>
+            <a:r>
+              <a:rPr lang="en-US" sz="950" dirty="0" err="1">
+                <a:solidFill>
+                  <a:srgbClr val="2B4150"/>
+                </a:solidFill>
+                <a:latin typeface="Source Sans 3" pitchFamily="34" charset="0"/>
+                <a:ea typeface="Source Sans 3" pitchFamily="34" charset="-122"/>
+                <a:cs typeface="Source Sans 3" pitchFamily="34" charset="-120"/>
+              </a:rPr>
+              <a:t>invia</a:t>
+            </a:r>
+            <a:r>
+              <a:rPr lang="en-US" sz="950" dirty="0">
+                <a:solidFill>
+                  <a:srgbClr val="2B4150"/>
+                </a:solidFill>
+                <a:latin typeface="Source Sans 3" pitchFamily="34" charset="0"/>
+                <a:ea typeface="Source Sans 3" pitchFamily="34" charset="-122"/>
+                <a:cs typeface="Source Sans 3" pitchFamily="34" charset="-120"/>
+              </a:rPr>
+              <a:t> al cloud</a:t>
             </a:r>
             <a:endParaRPr lang="en-US" sz="950" dirty="0"/>
           </a:p>
@@ -8618,11 +9062,10 @@
           <a:bodyPr wrap="none" lIns="0" tIns="0" rIns="0" bIns="0" rtlCol="0" anchor="t"/>
           <a:lstStyle/>
           <a:p>
-            <a:pPr marL="0" indent="0" algn="l">
+            <a:pPr>
               <a:lnSpc>
                 <a:spcPct val="104000"/>
               </a:lnSpc>
-              <a:buNone/>
             </a:pPr>
             <a:r>
               <a:rPr lang="en-US" sz="1200" dirty="0">
@@ -8633,7 +9076,7 @@
                 <a:ea typeface="Twemoji Mozilla" pitchFamily="34" charset="-122"/>
                 <a:cs typeface="Twemoji Mozilla" pitchFamily="34" charset="-120"/>
               </a:rPr>
-              <a:t>🌐</a:t>
+              <a:t>☁️</a:t>
             </a:r>
             <a:r>
               <a:rPr lang="en-US" sz="1200" dirty="0">
@@ -8644,7 +9087,29 @@
                 <a:ea typeface="MuseoModerno Medium" pitchFamily="34" charset="-122"/>
                 <a:cs typeface="MuseoModerno Medium" pitchFamily="34" charset="-120"/>
               </a:rPr>
-              <a:t> Livello Bridge</a:t>
+              <a:t> </a:t>
+            </a:r>
+            <a:r>
+              <a:rPr lang="en-US" sz="1200" dirty="0" err="1">
+                <a:solidFill>
+                  <a:srgbClr val="2B4150"/>
+                </a:solidFill>
+                <a:latin typeface="MuseoModerno Medium" pitchFamily="34" charset="0"/>
+                <a:ea typeface="MuseoModerno Medium" pitchFamily="34" charset="-122"/>
+                <a:cs typeface="MuseoModerno Medium" pitchFamily="34" charset="-120"/>
+              </a:rPr>
+              <a:t>Livello</a:t>
+            </a:r>
+            <a:r>
+              <a:rPr lang="en-US" sz="1200" dirty="0">
+                <a:solidFill>
+                  <a:srgbClr val="2B4150"/>
+                </a:solidFill>
+                <a:latin typeface="MuseoModerno Medium" pitchFamily="34" charset="0"/>
+                <a:ea typeface="MuseoModerno Medium" pitchFamily="34" charset="-122"/>
+                <a:cs typeface="MuseoModerno Medium" pitchFamily="34" charset="-120"/>
+              </a:rPr>
+              <a:t> Cloud</a:t>
             </a:r>
             <a:endParaRPr lang="en-US" sz="1200" dirty="0"/>
           </a:p>
@@ -8671,11 +9136,10 @@
           <a:bodyPr wrap="none" lIns="0" tIns="0" rIns="0" bIns="0" rtlCol="0" anchor="t"/>
           <a:lstStyle/>
           <a:p>
-            <a:pPr marL="0" indent="0" algn="l">
+            <a:pPr>
               <a:lnSpc>
                 <a:spcPct val="110000"/>
               </a:lnSpc>
-              <a:buNone/>
             </a:pPr>
             <a:r>
               <a:rPr lang="en-US" sz="950" dirty="0">
@@ -8686,7 +9150,62 @@
                 <a:ea typeface="Source Sans 3" pitchFamily="34" charset="-122"/>
                 <a:cs typeface="Source Sans 3" pitchFamily="34" charset="-120"/>
               </a:rPr>
-              <a:t>Python valida, timestampa e invia al cloud</a:t>
+              <a:t>Firebase Realtime Database </a:t>
+            </a:r>
+            <a:r>
+              <a:rPr lang="en-US" sz="950" dirty="0" err="1">
+                <a:solidFill>
+                  <a:srgbClr val="2B4150"/>
+                </a:solidFill>
+                <a:latin typeface="Source Sans 3" pitchFamily="34" charset="0"/>
+                <a:ea typeface="Source Sans 3" pitchFamily="34" charset="-122"/>
+                <a:cs typeface="Source Sans 3" pitchFamily="34" charset="-120"/>
+              </a:rPr>
+              <a:t>sincronizza</a:t>
+            </a:r>
+            <a:r>
+              <a:rPr lang="en-US" sz="950" dirty="0">
+                <a:solidFill>
+                  <a:srgbClr val="2B4150"/>
+                </a:solidFill>
+                <a:latin typeface="Source Sans 3" pitchFamily="34" charset="0"/>
+                <a:ea typeface="Source Sans 3" pitchFamily="34" charset="-122"/>
+                <a:cs typeface="Source Sans 3" pitchFamily="34" charset="-120"/>
+              </a:rPr>
+              <a:t> </a:t>
+            </a:r>
+            <a:r>
+              <a:rPr lang="en-US" sz="950" dirty="0" err="1">
+                <a:solidFill>
+                  <a:srgbClr val="2B4150"/>
+                </a:solidFill>
+                <a:latin typeface="Source Sans 3" pitchFamily="34" charset="0"/>
+                <a:ea typeface="Source Sans 3" pitchFamily="34" charset="-122"/>
+                <a:cs typeface="Source Sans 3" pitchFamily="34" charset="-120"/>
+              </a:rPr>
+              <a:t>i</a:t>
+            </a:r>
+            <a:r>
+              <a:rPr lang="en-US" sz="950" dirty="0">
+                <a:solidFill>
+                  <a:srgbClr val="2B4150"/>
+                </a:solidFill>
+                <a:latin typeface="Source Sans 3" pitchFamily="34" charset="0"/>
+                <a:ea typeface="Source Sans 3" pitchFamily="34" charset="-122"/>
+                <a:cs typeface="Source Sans 3" pitchFamily="34" charset="-120"/>
+              </a:rPr>
+              <a:t> </a:t>
+            </a:r>
+            <a:r>
+              <a:rPr lang="en-US" sz="950" dirty="0" err="1">
+                <a:solidFill>
+                  <a:srgbClr val="2B4150"/>
+                </a:solidFill>
+                <a:latin typeface="Source Sans 3" pitchFamily="34" charset="0"/>
+                <a:ea typeface="Source Sans 3" pitchFamily="34" charset="-122"/>
+                <a:cs typeface="Source Sans 3" pitchFamily="34" charset="-120"/>
+              </a:rPr>
+              <a:t>dati</a:t>
             </a:r>
             <a:endParaRPr lang="en-US" sz="950" dirty="0"/>
           </a:p>
@@ -8715,7 +9234,7 @@
         <p:spPr>
           <a:xfrm>
             <a:off x="661475" y="5653980"/>
-            <a:ext cx="2657309" cy="673001"/>
+            <a:ext cx="2657309" cy="835124"/>
           </a:xfrm>
           <a:prstGeom prst="rect">
             <a:avLst/>
@@ -8743,11 +9262,10 @@
           <a:bodyPr wrap="none" lIns="0" tIns="0" rIns="0" bIns="0" rtlCol="0" anchor="t"/>
           <a:lstStyle/>
           <a:p>
-            <a:pPr marL="0" indent="0" algn="l">
+            <a:pPr>
               <a:lnSpc>
                 <a:spcPct val="104000"/>
               </a:lnSpc>
-              <a:buNone/>
             </a:pPr>
             <a:r>
               <a:rPr lang="en-US" sz="1200" dirty="0">
@@ -8758,7 +9276,7 @@
                 <a:ea typeface="Twemoji Mozilla" pitchFamily="34" charset="-122"/>
                 <a:cs typeface="Twemoji Mozilla" pitchFamily="34" charset="-120"/>
               </a:rPr>
-              <a:t>☁️</a:t>
+              <a:t>📱</a:t>
             </a:r>
             <a:r>
               <a:rPr lang="en-US" sz="1200" dirty="0">
@@ -8769,7 +9287,40 @@
                 <a:ea typeface="MuseoModerno Medium" pitchFamily="34" charset="-122"/>
                 <a:cs typeface="MuseoModerno Medium" pitchFamily="34" charset="-120"/>
               </a:rPr>
-              <a:t> Livello Cloud</a:t>
+              <a:t> </a:t>
+            </a:r>
+            <a:r>
+              <a:rPr lang="en-US" sz="1200" dirty="0" err="1">
+                <a:solidFill>
+                  <a:srgbClr val="2B4150"/>
+                </a:solidFill>
+                <a:latin typeface="MuseoModerno Medium" pitchFamily="34" charset="0"/>
+                <a:ea typeface="MuseoModerno Medium" pitchFamily="34" charset="-122"/>
+                <a:cs typeface="MuseoModerno Medium" pitchFamily="34" charset="-120"/>
+              </a:rPr>
+              <a:t>Livello</a:t>
+            </a:r>
+            <a:r>
+              <a:rPr lang="en-US" sz="1200" dirty="0">
+                <a:solidFill>
+                  <a:srgbClr val="2B4150"/>
+                </a:solidFill>
+                <a:latin typeface="MuseoModerno Medium" pitchFamily="34" charset="0"/>
+                <a:ea typeface="MuseoModerno Medium" pitchFamily="34" charset="-122"/>
+                <a:cs typeface="MuseoModerno Medium" pitchFamily="34" charset="-120"/>
+              </a:rPr>
+              <a:t> </a:t>
+            </a:r>
+            <a:r>
+              <a:rPr lang="en-US" sz="1200" dirty="0" err="1">
+                <a:solidFill>
+                  <a:srgbClr val="2B4150"/>
+                </a:solidFill>
+                <a:latin typeface="MuseoModerno Medium" pitchFamily="34" charset="0"/>
+                <a:ea typeface="MuseoModerno Medium" pitchFamily="34" charset="-122"/>
+                <a:cs typeface="MuseoModerno Medium" pitchFamily="34" charset="-120"/>
+              </a:rPr>
+              <a:t>Applicativo</a:t>
             </a:r>
             <a:endParaRPr lang="en-US" sz="1200" dirty="0"/>
           </a:p>
@@ -8783,8 +9334,8 @@
         </p:nvSpPr>
         <p:spPr>
           <a:xfrm>
-            <a:off x="847803" y="6029325"/>
-            <a:ext cx="2335452" cy="162123"/>
+            <a:off x="847802" y="6029325"/>
+            <a:ext cx="2026027" cy="191988"/>
           </a:xfrm>
           <a:prstGeom prst="rect">
             <a:avLst/>
@@ -8796,11 +9347,10 @@
           <a:bodyPr wrap="none" lIns="0" tIns="0" rIns="0" bIns="0" rtlCol="0" anchor="t"/>
           <a:lstStyle/>
           <a:p>
-            <a:pPr marL="0" indent="0" algn="l">
+            <a:pPr>
               <a:lnSpc>
                 <a:spcPct val="110000"/>
               </a:lnSpc>
-              <a:buNone/>
             </a:pPr>
             <a:r>
               <a:rPr lang="en-US" sz="950" dirty="0">
@@ -8811,7 +9361,124 @@
                 <a:ea typeface="Source Sans 3" pitchFamily="34" charset="-122"/>
                 <a:cs typeface="Source Sans 3" pitchFamily="34" charset="-120"/>
               </a:rPr>
-              <a:t>Firebase Realtime Database sincronizza i dati</a:t>
+              <a:t>Android app </a:t>
+            </a:r>
+            <a:r>
+              <a:rPr lang="en-US" sz="950" dirty="0" err="1">
+                <a:solidFill>
+                  <a:srgbClr val="2B4150"/>
+                </a:solidFill>
+                <a:latin typeface="Source Sans 3" pitchFamily="34" charset="0"/>
+                <a:ea typeface="Source Sans 3" pitchFamily="34" charset="-122"/>
+                <a:cs typeface="Source Sans 3" pitchFamily="34" charset="-120"/>
+              </a:rPr>
+              <a:t>mostra</a:t>
+            </a:r>
+            <a:r>
+              <a:rPr lang="en-US" sz="950" dirty="0">
+                <a:solidFill>
+                  <a:srgbClr val="2B4150"/>
+                </a:solidFill>
+                <a:latin typeface="Source Sans 3" pitchFamily="34" charset="0"/>
+                <a:ea typeface="Source Sans 3" pitchFamily="34" charset="-122"/>
+                <a:cs typeface="Source Sans 3" pitchFamily="34" charset="-120"/>
+              </a:rPr>
+              <a:t> le </a:t>
+            </a:r>
+            <a:r>
+              <a:rPr lang="en-US" sz="950" dirty="0" err="1">
+                <a:solidFill>
+                  <a:srgbClr val="2B4150"/>
+                </a:solidFill>
+                <a:latin typeface="Source Sans 3" pitchFamily="34" charset="0"/>
+                <a:ea typeface="Source Sans 3" pitchFamily="34" charset="-122"/>
+                <a:cs typeface="Source Sans 3" pitchFamily="34" charset="-120"/>
+              </a:rPr>
+              <a:t>aule</a:t>
+            </a:r>
+            <a:r>
+              <a:rPr lang="en-US" sz="950" dirty="0">
+                <a:solidFill>
+                  <a:srgbClr val="2B4150"/>
+                </a:solidFill>
+                <a:latin typeface="Source Sans 3" pitchFamily="34" charset="0"/>
+                <a:ea typeface="Source Sans 3" pitchFamily="34" charset="-122"/>
+                <a:cs typeface="Source Sans 3" pitchFamily="34" charset="-120"/>
+              </a:rPr>
+              <a:t> in tempo </a:t>
+            </a:r>
+            <a:r>
+              <a:rPr lang="en-US" sz="950" dirty="0" err="1">
+                <a:solidFill>
+                  <a:srgbClr val="2B4150"/>
+                </a:solidFill>
+                <a:latin typeface="Source Sans 3" pitchFamily="34" charset="0"/>
+                <a:ea typeface="Source Sans 3" pitchFamily="34" charset="-122"/>
+                <a:cs typeface="Source Sans 3" pitchFamily="34" charset="-120"/>
+              </a:rPr>
+              <a:t>reale</a:t>
+            </a:r>
+            <a:r>
+              <a:rPr lang="en-US" sz="950" dirty="0">
+                <a:solidFill>
+                  <a:srgbClr val="2B4150"/>
+                </a:solidFill>
+                <a:latin typeface="Source Sans 3" pitchFamily="34" charset="0"/>
+                <a:ea typeface="Source Sans 3" pitchFamily="34" charset="-122"/>
+                <a:cs typeface="Source Sans 3" pitchFamily="34" charset="-120"/>
+              </a:rPr>
+              <a:t> </a:t>
+            </a:r>
+          </a:p>
+          <a:p>
+            <a:pPr>
+              <a:lnSpc>
+                <a:spcPct val="110000"/>
+              </a:lnSpc>
+            </a:pPr>
+            <a:r>
+              <a:rPr lang="en-US" sz="950" dirty="0">
+                <a:solidFill>
+                  <a:srgbClr val="2B4150"/>
+                </a:solidFill>
+                <a:latin typeface="Source Sans 3" pitchFamily="34" charset="0"/>
+                <a:ea typeface="Source Sans 3" pitchFamily="34" charset="-122"/>
+                <a:cs typeface="Source Sans 3" pitchFamily="34" charset="-120"/>
+              </a:rPr>
+              <a:t>e </a:t>
+            </a:r>
+            <a:r>
+              <a:rPr lang="en-US" sz="950" dirty="0" err="1">
+                <a:solidFill>
+                  <a:srgbClr val="2B4150"/>
+                </a:solidFill>
+                <a:latin typeface="Source Sans 3" pitchFamily="34" charset="0"/>
+                <a:ea typeface="Source Sans 3" pitchFamily="34" charset="-122"/>
+                <a:cs typeface="Source Sans 3" pitchFamily="34" charset="-120"/>
+              </a:rPr>
+              <a:t>riceve</a:t>
+            </a:r>
+            <a:r>
+              <a:rPr lang="en-US" sz="950" dirty="0">
+                <a:solidFill>
+                  <a:srgbClr val="2B4150"/>
+                </a:solidFill>
+                <a:latin typeface="Source Sans 3" pitchFamily="34" charset="0"/>
+                <a:ea typeface="Source Sans 3" pitchFamily="34" charset="-122"/>
+                <a:cs typeface="Source Sans 3" pitchFamily="34" charset="-120"/>
+              </a:rPr>
+              <a:t> </a:t>
+            </a:r>
+            <a:r>
+              <a:rPr lang="en-US" sz="950" dirty="0" err="1">
+                <a:solidFill>
+                  <a:srgbClr val="2B4150"/>
+                </a:solidFill>
+                <a:latin typeface="Source Sans 3" pitchFamily="34" charset="0"/>
+                <a:ea typeface="Source Sans 3" pitchFamily="34" charset="-122"/>
+                <a:cs typeface="Source Sans 3" pitchFamily="34" charset="-120"/>
+              </a:rPr>
+              <a:t>notifiche</a:t>
             </a:r>
             <a:endParaRPr lang="en-US" sz="950" dirty="0"/>
           </a:p>

--- a/presentation/Smart-Study-Rooms.pptx
+++ b/presentation/Smart-Study-Rooms.pptx
@@ -162,7 +162,7 @@
   <pc:docChgLst>
     <pc:chgData name="GIANLUCA CAVANI" userId="87922040f0d244e1" providerId="LiveId" clId="{D9E828B3-A941-4B93-80FD-F166EA6B65A7}"/>
     <pc:docChg chg="undo custSel addSld delSld modSld sldOrd">
-      <pc:chgData name="GIANLUCA CAVANI" userId="87922040f0d244e1" providerId="LiveId" clId="{D9E828B3-A941-4B93-80FD-F166EA6B65A7}" dt="2026-09-08T13:23:44.044" v="105" actId="2696"/>
+      <pc:chgData name="GIANLUCA CAVANI" userId="87922040f0d244e1" providerId="LiveId" clId="{D9E828B3-A941-4B93-80FD-F166EA6B65A7}" dt="2026-09-08T13:31:58.413" v="109" actId="113"/>
       <pc:docMkLst>
         <pc:docMk/>
       </pc:docMkLst>
@@ -346,11 +346,19 @@
         </pc:picChg>
       </pc:sldChg>
       <pc:sldChg chg="modSp mod">
-        <pc:chgData name="GIANLUCA CAVANI" userId="87922040f0d244e1" providerId="LiveId" clId="{D9E828B3-A941-4B93-80FD-F166EA6B65A7}" dt="2026-09-07T23:02:55.330" v="22" actId="1076"/>
+        <pc:chgData name="GIANLUCA CAVANI" userId="87922040f0d244e1" providerId="LiveId" clId="{D9E828B3-A941-4B93-80FD-F166EA6B65A7}" dt="2026-09-08T13:31:58.413" v="109" actId="113"/>
         <pc:sldMkLst>
           <pc:docMk/>
           <pc:sldMk cId="0" sldId="262"/>
         </pc:sldMkLst>
+        <pc:spChg chg="mod">
+          <ac:chgData name="GIANLUCA CAVANI" userId="87922040f0d244e1" providerId="LiveId" clId="{D9E828B3-A941-4B93-80FD-F166EA6B65A7}" dt="2026-09-08T13:31:58.413" v="109" actId="113"/>
+          <ac:spMkLst>
+            <pc:docMk/>
+            <pc:sldMk cId="0" sldId="262"/>
+            <ac:spMk id="3" creationId="{00000000-0000-0000-0000-000000000000}"/>
+          </ac:spMkLst>
+        </pc:spChg>
         <pc:picChg chg="mod">
           <ac:chgData name="GIANLUCA CAVANI" userId="87922040f0d244e1" providerId="LiveId" clId="{D9E828B3-A941-4B93-80FD-F166EA6B65A7}" dt="2026-09-07T23:02:55.330" v="22" actId="1076"/>
           <ac:picMkLst>
@@ -9642,11 +9650,11 @@
               <a:t>Firebase Realtime Database rappresenta il </a:t>
             </a:r>
             <a:r>
-              <a:rPr lang="en-US" sz="1400" b="1" dirty="0">
-                <a:solidFill>
-                  <a:srgbClr val="2B4150"/>
-                </a:solidFill>
-                <a:latin typeface="Source Sans 3 Bold" pitchFamily="34" charset="0"/>
+              <a:rPr lang="en-US" sz="1400" dirty="0">
+                <a:solidFill>
+                  <a:srgbClr val="2B4150"/>
+                </a:solidFill>
+                <a:latin typeface="Source Sans 3" panose="020B0604020202020204" charset="0"/>
                 <a:ea typeface="Source Sans 3 Bold" pitchFamily="34" charset="-122"/>
                 <a:cs typeface="Source Sans 3 Bold" pitchFamily="34" charset="-120"/>
               </a:rPr>
@@ -9657,11 +9665,22 @@
                 <a:solidFill>
                   <a:srgbClr val="2B4150"/>
                 </a:solidFill>
-                <a:latin typeface="Source Sans 3" pitchFamily="34" charset="0"/>
+                <a:latin typeface="Source Sans 3" panose="020B0604020202020204" charset="0"/>
                 <a:ea typeface="Source Sans 3" pitchFamily="34" charset="-122"/>
                 <a:cs typeface="Source Sans 3" pitchFamily="34" charset="-120"/>
               </a:rPr>
-              <a:t> delle aule: non solo dati grezzi, ma lo stato digitale completo dell'intero sistema.</a:t>
+              <a:t> </a:t>
+            </a:r>
+            <a:r>
+              <a:rPr lang="en-US" sz="1400" dirty="0">
+                <a:solidFill>
+                  <a:srgbClr val="2B4150"/>
+                </a:solidFill>
+                <a:latin typeface="Source Sans 3" pitchFamily="34" charset="0"/>
+                <a:ea typeface="Source Sans 3" pitchFamily="34" charset="-122"/>
+                <a:cs typeface="Source Sans 3" pitchFamily="34" charset="-120"/>
+              </a:rPr>
+              <a:t>delle aule: non solo dati grezzi, ma lo stato digitale completo dell'intero sistema.</a:t>
             </a:r>
             <a:endParaRPr lang="en-US" sz="1400" dirty="0"/>
           </a:p>

--- a/presentation/Smart-Study-Rooms.pptx
+++ b/presentation/Smart-Study-Rooms.pptx
@@ -152,7 +152,7 @@
 <file path=ppt/revisionInfo.xml><?xml version="1.0" encoding="utf-8"?>
 <p1510:revInfo xmlns:a="http://schemas.openxmlformats.org/drawingml/2006/main" xmlns:r="http://schemas.openxmlformats.org/officeDocument/2006/relationships" xmlns:p1510="http://schemas.microsoft.com/office/powerpoint/2015/10/main">
   <p1510:revLst>
-    <p1510:client id="{D7FB788E-8B80-4776-8146-9265B36569C0}" v="17" dt="2026-09-08T13:21:53.432"/>
+    <p1510:client id="{D7FB788E-8B80-4776-8146-9265B36569C0}" v="18" dt="2026-09-08T15:06:31.677"/>
   </p1510:revLst>
 </p1510:revInfo>
 </file>
@@ -162,7 +162,7 @@
   <pc:docChgLst>
     <pc:chgData name="GIANLUCA CAVANI" userId="87922040f0d244e1" providerId="LiveId" clId="{D9E828B3-A941-4B93-80FD-F166EA6B65A7}"/>
     <pc:docChg chg="undo custSel addSld delSld modSld sldOrd">
-      <pc:chgData name="GIANLUCA CAVANI" userId="87922040f0d244e1" providerId="LiveId" clId="{D9E828B3-A941-4B93-80FD-F166EA6B65A7}" dt="2026-09-08T13:31:58.413" v="109" actId="113"/>
+      <pc:chgData name="GIANLUCA CAVANI" userId="87922040f0d244e1" providerId="LiveId" clId="{D9E828B3-A941-4B93-80FD-F166EA6B65A7}" dt="2026-09-08T15:08:55.852" v="128" actId="14100"/>
       <pc:docMkLst>
         <pc:docMk/>
       </pc:docMkLst>
@@ -228,11 +228,19 @@
         </pc:spChg>
       </pc:sldChg>
       <pc:sldChg chg="modSp mod">
-        <pc:chgData name="GIANLUCA CAVANI" userId="87922040f0d244e1" providerId="LiveId" clId="{D9E828B3-A941-4B93-80FD-F166EA6B65A7}" dt="2026-09-07T23:02:08.698" v="18" actId="20577"/>
+        <pc:chgData name="GIANLUCA CAVANI" userId="87922040f0d244e1" providerId="LiveId" clId="{D9E828B3-A941-4B93-80FD-F166EA6B65A7}" dt="2026-09-08T15:06:27.858" v="114" actId="1076"/>
         <pc:sldMkLst>
           <pc:docMk/>
           <pc:sldMk cId="0" sldId="259"/>
         </pc:sldMkLst>
+        <pc:spChg chg="mod">
+          <ac:chgData name="GIANLUCA CAVANI" userId="87922040f0d244e1" providerId="LiveId" clId="{D9E828B3-A941-4B93-80FD-F166EA6B65A7}" dt="2026-09-08T15:06:27.858" v="114" actId="1076"/>
+          <ac:spMkLst>
+            <pc:docMk/>
+            <pc:sldMk cId="0" sldId="259"/>
+            <ac:spMk id="12" creationId="{00000000-0000-0000-0000-000000000000}"/>
+          </ac:spMkLst>
+        </pc:spChg>
         <pc:spChg chg="mod">
           <ac:chgData name="GIANLUCA CAVANI" userId="87922040f0d244e1" providerId="LiveId" clId="{D9E828B3-A941-4B93-80FD-F166EA6B65A7}" dt="2026-09-07T23:02:08.698" v="18" actId="20577"/>
           <ac:spMkLst>
@@ -243,7 +251,7 @@
         </pc:spChg>
       </pc:sldChg>
       <pc:sldChg chg="modSp mod">
-        <pc:chgData name="GIANLUCA CAVANI" userId="87922040f0d244e1" providerId="LiveId" clId="{D9E828B3-A941-4B93-80FD-F166EA6B65A7}" dt="2026-09-08T13:23:02.759" v="104" actId="14100"/>
+        <pc:chgData name="GIANLUCA CAVANI" userId="87922040f0d244e1" providerId="LiveId" clId="{D9E828B3-A941-4B93-80FD-F166EA6B65A7}" dt="2026-09-08T15:08:55.852" v="128" actId="14100"/>
         <pc:sldMkLst>
           <pc:docMk/>
           <pc:sldMk cId="0" sldId="261"/>
@@ -313,7 +321,7 @@
           </ac:spMkLst>
         </pc:spChg>
         <pc:spChg chg="mod">
-          <ac:chgData name="GIANLUCA CAVANI" userId="87922040f0d244e1" providerId="LiveId" clId="{D9E828B3-A941-4B93-80FD-F166EA6B65A7}" dt="2026-09-08T13:21:48.659" v="93"/>
+          <ac:chgData name="GIANLUCA CAVANI" userId="87922040f0d244e1" providerId="LiveId" clId="{D9E828B3-A941-4B93-80FD-F166EA6B65A7}" dt="2026-09-08T15:08:28.489" v="124" actId="1076"/>
           <ac:spMkLst>
             <pc:docMk/>
             <pc:sldMk cId="0" sldId="261"/>
@@ -321,11 +329,19 @@
           </ac:spMkLst>
         </pc:spChg>
         <pc:spChg chg="mod">
-          <ac:chgData name="GIANLUCA CAVANI" userId="87922040f0d244e1" providerId="LiveId" clId="{D9E828B3-A941-4B93-80FD-F166EA6B65A7}" dt="2026-09-08T13:22:49.395" v="101" actId="20577"/>
+          <ac:chgData name="GIANLUCA CAVANI" userId="87922040f0d244e1" providerId="LiveId" clId="{D9E828B3-A941-4B93-80FD-F166EA6B65A7}" dt="2026-09-08T15:08:31.346" v="125" actId="1076"/>
           <ac:spMkLst>
             <pc:docMk/>
             <pc:sldMk cId="0" sldId="261"/>
             <ac:spMk id="19" creationId="{00000000-0000-0000-0000-000000000000}"/>
+          </ac:spMkLst>
+        </pc:spChg>
+        <pc:spChg chg="mod">
+          <ac:chgData name="GIANLUCA CAVANI" userId="87922040f0d244e1" providerId="LiveId" clId="{D9E828B3-A941-4B93-80FD-F166EA6B65A7}" dt="2026-09-08T15:08:44.309" v="127" actId="1076"/>
+          <ac:spMkLst>
+            <pc:docMk/>
+            <pc:sldMk cId="0" sldId="261"/>
+            <ac:spMk id="21" creationId="{A21472C9-361B-D20B-6ED0-5A7B43C7B475}"/>
           </ac:spMkLst>
         </pc:spChg>
         <pc:picChg chg="mod">
@@ -337,7 +353,7 @@
           </ac:picMkLst>
         </pc:picChg>
         <pc:picChg chg="mod">
-          <ac:chgData name="GIANLUCA CAVANI" userId="87922040f0d244e1" providerId="LiveId" clId="{D9E828B3-A941-4B93-80FD-F166EA6B65A7}" dt="2026-09-08T13:23:02.759" v="104" actId="14100"/>
+          <ac:chgData name="GIANLUCA CAVANI" userId="87922040f0d244e1" providerId="LiveId" clId="{D9E828B3-A941-4B93-80FD-F166EA6B65A7}" dt="2026-09-08T15:08:55.852" v="128" actId="14100"/>
           <ac:picMkLst>
             <pc:docMk/>
             <pc:sldMk cId="0" sldId="261"/>
@@ -392,11 +408,19 @@
         </pc:spChg>
       </pc:sldChg>
       <pc:sldChg chg="addSp delSp modSp mod">
-        <pc:chgData name="GIANLUCA CAVANI" userId="87922040f0d244e1" providerId="LiveId" clId="{D9E828B3-A941-4B93-80FD-F166EA6B65A7}" dt="2026-09-08T12:15:10.469" v="58" actId="22"/>
+        <pc:chgData name="GIANLUCA CAVANI" userId="87922040f0d244e1" providerId="LiveId" clId="{D9E828B3-A941-4B93-80FD-F166EA6B65A7}" dt="2026-09-08T15:05:54.233" v="112" actId="20577"/>
         <pc:sldMkLst>
           <pc:docMk/>
           <pc:sldMk cId="0" sldId="266"/>
         </pc:sldMkLst>
+        <pc:spChg chg="mod">
+          <ac:chgData name="GIANLUCA CAVANI" userId="87922040f0d244e1" providerId="LiveId" clId="{D9E828B3-A941-4B93-80FD-F166EA6B65A7}" dt="2026-09-08T15:05:54.233" v="112" actId="20577"/>
+          <ac:spMkLst>
+            <pc:docMk/>
+            <pc:sldMk cId="0" sldId="266"/>
+            <ac:spMk id="9" creationId="{00000000-0000-0000-0000-000000000000}"/>
+          </ac:spMkLst>
+        </pc:spChg>
         <pc:spChg chg="del">
           <ac:chgData name="GIANLUCA CAVANI" userId="87922040f0d244e1" providerId="LiveId" clId="{D9E828B3-A941-4B93-80FD-F166EA6B65A7}" dt="2026-09-08T12:12:44.085" v="40" actId="478"/>
           <ac:spMkLst>
@@ -7920,29 +7944,7 @@
                 <a:ea typeface="Source Sans 3" pitchFamily="34" charset="-122"/>
                 <a:cs typeface="Source Sans 3" pitchFamily="34" charset="-120"/>
               </a:rPr>
-              <a:t> Smart Study Rooms non mostra solo numeri ma </a:t>
-            </a:r>
-            <a:r>
-              <a:rPr lang="en-US" sz="1450" dirty="0" err="1">
-                <a:solidFill>
-                  <a:srgbClr val="000000"/>
-                </a:solidFill>
-                <a:latin typeface="Source Sans 3" pitchFamily="34" charset="0"/>
-                <a:ea typeface="Source Sans 3" pitchFamily="34" charset="-122"/>
-                <a:cs typeface="Source Sans 3" pitchFamily="34" charset="-120"/>
-              </a:rPr>
-              <a:t>trasforma</a:t>
-            </a:r>
-            <a:r>
-              <a:rPr lang="en-US" sz="1450" dirty="0">
-                <a:solidFill>
-                  <a:srgbClr val="000000"/>
-                </a:solidFill>
-                <a:latin typeface="Source Sans 3" pitchFamily="34" charset="0"/>
-                <a:ea typeface="Source Sans 3" pitchFamily="34" charset="-122"/>
-                <a:cs typeface="Source Sans 3" pitchFamily="34" charset="-120"/>
-              </a:rPr>
-              <a:t> i dati in una decisione chiara e immediata.</a:t>
+              <a:t> Smart Study Rooms non mostra solo numeri ma trasforma i dati in una decisione chiara e immediata.</a:t>
             </a:r>
             <a:endParaRPr lang="en-US" sz="1450" dirty="0"/>
           </a:p>
@@ -9241,8 +9243,8 @@
         </p:blipFill>
         <p:spPr>
           <a:xfrm>
-            <a:off x="661475" y="5653980"/>
-            <a:ext cx="2657309" cy="835124"/>
+            <a:off x="4595775" y="5728960"/>
+            <a:ext cx="2883910" cy="858361"/>
           </a:xfrm>
           <a:prstGeom prst="rect">
             <a:avLst/>
@@ -9257,7 +9259,7 @@
         </p:nvSpPr>
         <p:spPr>
           <a:xfrm>
-            <a:off x="847803" y="5789513"/>
+            <a:off x="4778644" y="5882151"/>
             <a:ext cx="2335452" cy="191988"/>
           </a:xfrm>
           <a:prstGeom prst="rect">
@@ -9342,8 +9344,8 @@
         </p:nvSpPr>
         <p:spPr>
           <a:xfrm>
-            <a:off x="847802" y="6029325"/>
-            <a:ext cx="2026027" cy="191988"/>
+            <a:off x="4778644" y="6128709"/>
+            <a:ext cx="2026027" cy="380806"/>
           </a:xfrm>
           <a:prstGeom prst="rect">
             <a:avLst/>
@@ -9506,7 +9508,7 @@
         </p:nvSpPr>
         <p:spPr>
           <a:xfrm>
-            <a:off x="10291665" y="6326154"/>
+            <a:off x="10201516" y="6349391"/>
             <a:ext cx="1828532" cy="475863"/>
           </a:xfrm>
           <a:prstGeom prst="rect">
@@ -10916,13 +10918,22 @@
               </a:lnSpc>
             </a:pPr>
             <a:r>
+              <a:rPr lang="en-US" sz="1500" dirty="0" err="1">
+                <a:solidFill>
+                  <a:srgbClr val="2B4150"/>
+                </a:solidFill>
+                <a:latin typeface="Source Sans 3" pitchFamily="34" charset="0"/>
+              </a:rPr>
+              <a:t>Notifiche</a:t>
+            </a:r>
+            <a:r>
               <a:rPr lang="en-US" sz="1500" dirty="0">
                 <a:solidFill>
                   <a:srgbClr val="2B4150"/>
                 </a:solidFill>
                 <a:latin typeface="Source Sans 3" pitchFamily="34" charset="0"/>
               </a:rPr>
-              <a:t>Bridge cloud per accesso remoto e notifiche push via Firebase Cloud Messaging.</a:t>
+              <a:t> push via Firebase Cloud Messaging.</a:t>
             </a:r>
           </a:p>
         </p:txBody>

--- a/presentation/Smart-Study-Rooms.pptx
+++ b/presentation/Smart-Study-Rooms.pptx
@@ -162,7 +162,7 @@
   <pc:docChgLst>
     <pc:chgData name="GIANLUCA CAVANI" userId="87922040f0d244e1" providerId="LiveId" clId="{D9E828B3-A941-4B93-80FD-F166EA6B65A7}"/>
     <pc:docChg chg="undo custSel addSld delSld modSld sldOrd">
-      <pc:chgData name="GIANLUCA CAVANI" userId="87922040f0d244e1" providerId="LiveId" clId="{D9E828B3-A941-4B93-80FD-F166EA6B65A7}" dt="2026-09-08T15:08:55.852" v="128" actId="14100"/>
+      <pc:chgData name="GIANLUCA CAVANI" userId="87922040f0d244e1" providerId="LiveId" clId="{D9E828B3-A941-4B93-80FD-F166EA6B65A7}" dt="2026-09-08T15:18:36.071" v="129" actId="1076"/>
       <pc:docMkLst>
         <pc:docMk/>
       </pc:docMkLst>
@@ -251,7 +251,7 @@
         </pc:spChg>
       </pc:sldChg>
       <pc:sldChg chg="modSp mod">
-        <pc:chgData name="GIANLUCA CAVANI" userId="87922040f0d244e1" providerId="LiveId" clId="{D9E828B3-A941-4B93-80FD-F166EA6B65A7}" dt="2026-09-08T15:08:55.852" v="128" actId="14100"/>
+        <pc:chgData name="GIANLUCA CAVANI" userId="87922040f0d244e1" providerId="LiveId" clId="{D9E828B3-A941-4B93-80FD-F166EA6B65A7}" dt="2026-09-08T15:18:36.071" v="129" actId="1076"/>
         <pc:sldMkLst>
           <pc:docMk/>
           <pc:sldMk cId="0" sldId="261"/>
@@ -337,7 +337,7 @@
           </ac:spMkLst>
         </pc:spChg>
         <pc:spChg chg="mod">
-          <ac:chgData name="GIANLUCA CAVANI" userId="87922040f0d244e1" providerId="LiveId" clId="{D9E828B3-A941-4B93-80FD-F166EA6B65A7}" dt="2026-09-08T15:08:44.309" v="127" actId="1076"/>
+          <ac:chgData name="GIANLUCA CAVANI" userId="87922040f0d244e1" providerId="LiveId" clId="{D9E828B3-A941-4B93-80FD-F166EA6B65A7}" dt="2026-09-08T15:18:36.071" v="129" actId="1076"/>
           <ac:spMkLst>
             <pc:docMk/>
             <pc:sldMk cId="0" sldId="261"/>
@@ -9508,7 +9508,7 @@
         </p:nvSpPr>
         <p:spPr>
           <a:xfrm>
-            <a:off x="10201516" y="6349391"/>
+            <a:off x="10294822" y="6342348"/>
             <a:ext cx="1828532" cy="475863"/>
           </a:xfrm>
           <a:prstGeom prst="rect">

--- a/presentation/Smart-Study-Rooms.pptx
+++ b/presentation/Smart-Study-Rooms.pptx
@@ -162,7 +162,7 @@
   <pc:docChgLst>
     <pc:chgData name="GIANLUCA CAVANI" userId="87922040f0d244e1" providerId="LiveId" clId="{D9E828B3-A941-4B93-80FD-F166EA6B65A7}"/>
     <pc:docChg chg="undo custSel addSld delSld modSld sldOrd">
-      <pc:chgData name="GIANLUCA CAVANI" userId="87922040f0d244e1" providerId="LiveId" clId="{D9E828B3-A941-4B93-80FD-F166EA6B65A7}" dt="2026-09-08T15:18:36.071" v="129" actId="1076"/>
+      <pc:chgData name="GIANLUCA CAVANI" userId="87922040f0d244e1" providerId="LiveId" clId="{D9E828B3-A941-4B93-80FD-F166EA6B65A7}" dt="2026-09-08T18:49:49.170" v="146" actId="1076"/>
       <pc:docMkLst>
         <pc:docMk/>
       </pc:docMkLst>
@@ -181,18 +181,98 @@
           </ac:picMkLst>
         </pc:picChg>
       </pc:sldChg>
-      <pc:sldChg chg="modSp mod">
-        <pc:chgData name="GIANLUCA CAVANI" userId="87922040f0d244e1" providerId="LiveId" clId="{D9E828B3-A941-4B93-80FD-F166EA6B65A7}" dt="2026-09-07T23:01:04.810" v="13" actId="255"/>
+      <pc:sldChg chg="delSp modSp mod">
+        <pc:chgData name="GIANLUCA CAVANI" userId="87922040f0d244e1" providerId="LiveId" clId="{D9E828B3-A941-4B93-80FD-F166EA6B65A7}" dt="2026-09-08T18:49:49.170" v="146" actId="1076"/>
         <pc:sldMkLst>
           <pc:docMk/>
           <pc:sldMk cId="0" sldId="257"/>
         </pc:sldMkLst>
         <pc:spChg chg="mod">
-          <ac:chgData name="GIANLUCA CAVANI" userId="87922040f0d244e1" providerId="LiveId" clId="{D9E828B3-A941-4B93-80FD-F166EA6B65A7}" dt="2026-09-07T23:01:04.810" v="13" actId="255"/>
+          <ac:chgData name="GIANLUCA CAVANI" userId="87922040f0d244e1" providerId="LiveId" clId="{D9E828B3-A941-4B93-80FD-F166EA6B65A7}" dt="2026-09-08T18:49:49.170" v="146" actId="1076"/>
+          <ac:spMkLst>
+            <pc:docMk/>
+            <pc:sldMk cId="0" sldId="257"/>
+            <ac:spMk id="3" creationId="{00000000-0000-0000-0000-000000000000}"/>
+          </ac:spMkLst>
+        </pc:spChg>
+        <pc:spChg chg="mod">
+          <ac:chgData name="GIANLUCA CAVANI" userId="87922040f0d244e1" providerId="LiveId" clId="{D9E828B3-A941-4B93-80FD-F166EA6B65A7}" dt="2026-09-08T18:49:41.483" v="145" actId="1076"/>
           <ac:spMkLst>
             <pc:docMk/>
             <pc:sldMk cId="0" sldId="257"/>
             <ac:spMk id="4" creationId="{00000000-0000-0000-0000-000000000000}"/>
+          </ac:spMkLst>
+        </pc:spChg>
+        <pc:spChg chg="mod">
+          <ac:chgData name="GIANLUCA CAVANI" userId="87922040f0d244e1" providerId="LiveId" clId="{D9E828B3-A941-4B93-80FD-F166EA6B65A7}" dt="2026-09-08T18:49:28.349" v="143" actId="1076"/>
+          <ac:spMkLst>
+            <pc:docMk/>
+            <pc:sldMk cId="0" sldId="257"/>
+            <ac:spMk id="5" creationId="{00000000-0000-0000-0000-000000000000}"/>
+          </ac:spMkLst>
+        </pc:spChg>
+        <pc:spChg chg="mod">
+          <ac:chgData name="GIANLUCA CAVANI" userId="87922040f0d244e1" providerId="LiveId" clId="{D9E828B3-A941-4B93-80FD-F166EA6B65A7}" dt="2026-09-08T18:48:25.215" v="135" actId="1076"/>
+          <ac:spMkLst>
+            <pc:docMk/>
+            <pc:sldMk cId="0" sldId="257"/>
+            <ac:spMk id="6" creationId="{00000000-0000-0000-0000-000000000000}"/>
+          </ac:spMkLst>
+        </pc:spChg>
+        <pc:spChg chg="mod">
+          <ac:chgData name="GIANLUCA CAVANI" userId="87922040f0d244e1" providerId="LiveId" clId="{D9E828B3-A941-4B93-80FD-F166EA6B65A7}" dt="2026-09-08T18:48:16.309" v="134" actId="1076"/>
+          <ac:spMkLst>
+            <pc:docMk/>
+            <pc:sldMk cId="0" sldId="257"/>
+            <ac:spMk id="7" creationId="{00000000-0000-0000-0000-000000000000}"/>
+          </ac:spMkLst>
+        </pc:spChg>
+        <pc:spChg chg="mod">
+          <ac:chgData name="GIANLUCA CAVANI" userId="87922040f0d244e1" providerId="LiveId" clId="{D9E828B3-A941-4B93-80FD-F166EA6B65A7}" dt="2026-09-08T18:49:35.093" v="144" actId="1076"/>
+          <ac:spMkLst>
+            <pc:docMk/>
+            <pc:sldMk cId="0" sldId="257"/>
+            <ac:spMk id="8" creationId="{00000000-0000-0000-0000-000000000000}"/>
+          </ac:spMkLst>
+        </pc:spChg>
+        <pc:spChg chg="mod">
+          <ac:chgData name="GIANLUCA CAVANI" userId="87922040f0d244e1" providerId="LiveId" clId="{D9E828B3-A941-4B93-80FD-F166EA6B65A7}" dt="2026-09-08T18:49:21.650" v="142" actId="1076"/>
+          <ac:spMkLst>
+            <pc:docMk/>
+            <pc:sldMk cId="0" sldId="257"/>
+            <ac:spMk id="9" creationId="{00000000-0000-0000-0000-000000000000}"/>
+          </ac:spMkLst>
+        </pc:spChg>
+        <pc:spChg chg="mod">
+          <ac:chgData name="GIANLUCA CAVANI" userId="87922040f0d244e1" providerId="LiveId" clId="{D9E828B3-A941-4B93-80FD-F166EA6B65A7}" dt="2026-09-08T18:48:37.395" v="137" actId="1076"/>
+          <ac:spMkLst>
+            <pc:docMk/>
+            <pc:sldMk cId="0" sldId="257"/>
+            <ac:spMk id="10" creationId="{00000000-0000-0000-0000-000000000000}"/>
+          </ac:spMkLst>
+        </pc:spChg>
+        <pc:spChg chg="del">
+          <ac:chgData name="GIANLUCA CAVANI" userId="87922040f0d244e1" providerId="LiveId" clId="{D9E828B3-A941-4B93-80FD-F166EA6B65A7}" dt="2026-09-08T18:47:43.516" v="130" actId="21"/>
+          <ac:spMkLst>
+            <pc:docMk/>
+            <pc:sldMk cId="0" sldId="257"/>
+            <ac:spMk id="11" creationId="{00000000-0000-0000-0000-000000000000}"/>
+          </ac:spMkLst>
+        </pc:spChg>
+        <pc:spChg chg="del">
+          <ac:chgData name="GIANLUCA CAVANI" userId="87922040f0d244e1" providerId="LiveId" clId="{D9E828B3-A941-4B93-80FD-F166EA6B65A7}" dt="2026-09-08T18:47:49.784" v="131" actId="21"/>
+          <ac:spMkLst>
+            <pc:docMk/>
+            <pc:sldMk cId="0" sldId="257"/>
+            <ac:spMk id="12" creationId="{00000000-0000-0000-0000-000000000000}"/>
+          </ac:spMkLst>
+        </pc:spChg>
+        <pc:spChg chg="del">
+          <ac:chgData name="GIANLUCA CAVANI" userId="87922040f0d244e1" providerId="LiveId" clId="{D9E828B3-A941-4B93-80FD-F166EA6B65A7}" dt="2026-09-08T18:47:54.554" v="132" actId="21"/>
+          <ac:spMkLst>
+            <pc:docMk/>
+            <pc:sldMk cId="0" sldId="257"/>
+            <ac:spMk id="13" creationId="{00000000-0000-0000-0000-000000000000}"/>
           </ac:spMkLst>
         </pc:spChg>
       </pc:sldChg>
@@ -6224,7 +6304,7 @@
         </p:nvSpPr>
         <p:spPr>
           <a:xfrm>
-            <a:off x="661475" y="654149"/>
+            <a:off x="661475" y="803014"/>
             <a:ext cx="6296860" cy="1181298"/>
           </a:xfrm>
           <a:prstGeom prst="rect">
@@ -6268,7 +6348,7 @@
         </p:nvSpPr>
         <p:spPr>
           <a:xfrm>
-            <a:off x="661475" y="2118916"/>
+            <a:off x="661475" y="2429532"/>
             <a:ext cx="6296860" cy="907256"/>
           </a:xfrm>
           <a:prstGeom prst="rect">
@@ -6303,7 +6383,7 @@
         </p:nvSpPr>
         <p:spPr>
           <a:xfrm>
-            <a:off x="661475" y="3238798"/>
+            <a:off x="661474" y="3930873"/>
             <a:ext cx="3053877" cy="1686818"/>
           </a:xfrm>
           <a:prstGeom prst="roundRect">
@@ -6332,7 +6412,7 @@
         </p:nvSpPr>
         <p:spPr>
           <a:xfrm>
-            <a:off x="850482" y="3427809"/>
+            <a:off x="850479" y="4286547"/>
             <a:ext cx="2675863" cy="295275"/>
           </a:xfrm>
           <a:prstGeom prst="rect">
@@ -6385,7 +6465,7 @@
         </p:nvSpPr>
         <p:spPr>
           <a:xfrm>
-            <a:off x="850482" y="3836491"/>
+            <a:off x="850480" y="4690306"/>
             <a:ext cx="2675863" cy="604838"/>
           </a:xfrm>
           <a:prstGeom prst="rect">
@@ -6429,7 +6509,7 @@
         </p:nvSpPr>
         <p:spPr>
           <a:xfrm>
-            <a:off x="3904359" y="3238798"/>
+            <a:off x="3904356" y="3930873"/>
             <a:ext cx="3053976" cy="1686818"/>
           </a:xfrm>
           <a:prstGeom prst="roundRect">
@@ -6446,7 +6526,7 @@
           <a:bodyPr/>
           <a:lstStyle/>
           <a:p>
-            <a:endParaRPr lang="it-IT"/>
+            <a:endParaRPr lang="it-IT" dirty="0"/>
           </a:p>
         </p:txBody>
       </p:sp>
@@ -6458,7 +6538,7 @@
         </p:nvSpPr>
         <p:spPr>
           <a:xfrm>
-            <a:off x="4093366" y="3427809"/>
+            <a:off x="4093366" y="4286547"/>
             <a:ext cx="2675962" cy="590550"/>
           </a:xfrm>
           <a:prstGeom prst="rect">
@@ -6499,9 +6579,20 @@
                 <a:ea typeface="MuseoModerno Medium" pitchFamily="34" charset="-122"/>
                 <a:cs typeface="MuseoModerno Medium" pitchFamily="34" charset="-120"/>
               </a:rPr>
-              <a:t> Scelta Inconsapevole</a:t>
-            </a:r>
-            <a:endParaRPr lang="en-US" sz="1850" dirty="0"/>
+              <a:t> </a:t>
+            </a:r>
+            <a:r>
+              <a:rPr lang="en-US" sz="1700" dirty="0">
+                <a:solidFill>
+                  <a:srgbClr val="2B4150"/>
+                </a:solidFill>
+                <a:latin typeface="MuseoModerno Medium" pitchFamily="34" charset="0"/>
+                <a:ea typeface="MuseoModerno Medium" pitchFamily="34" charset="-122"/>
+                <a:cs typeface="MuseoModerno Medium" pitchFamily="34" charset="-120"/>
+              </a:rPr>
+              <a:t>Scelta Inconsapevole</a:t>
+            </a:r>
+            <a:endParaRPr lang="en-US" sz="1700" dirty="0"/>
           </a:p>
         </p:txBody>
       </p:sp>
@@ -6513,7 +6604,7 @@
         </p:nvSpPr>
         <p:spPr>
           <a:xfrm>
-            <a:off x="4093366" y="4131766"/>
+            <a:off x="4093366" y="4688611"/>
             <a:ext cx="2675962" cy="604838"/>
           </a:xfrm>
           <a:prstGeom prst="rect">
@@ -6544,130 +6635,6 @@
                 <a:cs typeface="Source Sans 3" pitchFamily="34" charset="-120"/>
               </a:rPr>
               <a:t>Senza dati oggettivi, si sceglie per comodità o fortuna.</a:t>
-            </a:r>
-            <a:endParaRPr lang="en-US" sz="1450" dirty="0"/>
-          </a:p>
-        </p:txBody>
-      </p:sp>
-      <p:sp>
-        <p:nvSpPr>
-          <p:cNvPr id="11" name="Shape 8"/>
-          <p:cNvSpPr/>
-          <p:nvPr/>
-        </p:nvSpPr>
-        <p:spPr>
-          <a:xfrm>
-            <a:off x="661475" y="5114627"/>
-            <a:ext cx="6296860" cy="1089124"/>
-          </a:xfrm>
-          <a:prstGeom prst="roundRect">
-            <a:avLst>
-              <a:gd name="adj" fmla="val 2603"/>
-            </a:avLst>
-          </a:prstGeom>
-          <a:solidFill>
-            <a:srgbClr val="F3EEE3"/>
-          </a:solidFill>
-          <a:ln/>
-        </p:spPr>
-        <p:txBody>
-          <a:bodyPr/>
-          <a:lstStyle/>
-          <a:p>
-            <a:endParaRPr lang="it-IT"/>
-          </a:p>
-        </p:txBody>
-      </p:sp>
-      <p:sp>
-        <p:nvSpPr>
-          <p:cNvPr id="12" name="Text 9"/>
-          <p:cNvSpPr/>
-          <p:nvPr/>
-        </p:nvSpPr>
-        <p:spPr>
-          <a:xfrm>
-            <a:off x="850482" y="5303639"/>
-            <a:ext cx="5918846" cy="295275"/>
-          </a:xfrm>
-          <a:prstGeom prst="rect">
-            <a:avLst/>
-          </a:prstGeom>
-          <a:noFill/>
-          <a:ln/>
-        </p:spPr>
-        <p:txBody>
-          <a:bodyPr wrap="none" lIns="0" tIns="0" rIns="0" bIns="0" rtlCol="0" anchor="t"/>
-          <a:lstStyle/>
-          <a:p>
-            <a:pPr marL="0" indent="0" algn="l">
-              <a:lnSpc>
-                <a:spcPct val="104000"/>
-              </a:lnSpc>
-              <a:buNone/>
-            </a:pPr>
-            <a:r>
-              <a:rPr lang="en-US" sz="1850" dirty="0">
-                <a:solidFill>
-                  <a:srgbClr val="000000"/>
-                </a:solidFill>
-                <a:latin typeface="Twemoji Mozilla" pitchFamily="34" charset="0"/>
-                <a:ea typeface="Twemoji Mozilla" pitchFamily="34" charset="-122"/>
-                <a:cs typeface="Twemoji Mozilla" pitchFamily="34" charset="-120"/>
-              </a:rPr>
-              <a:t>📊</a:t>
-            </a:r>
-            <a:r>
-              <a:rPr lang="en-US" sz="1850" dirty="0">
-                <a:solidFill>
-                  <a:srgbClr val="2B4150"/>
-                </a:solidFill>
-                <a:latin typeface="MuseoModerno Medium" pitchFamily="34" charset="0"/>
-                <a:ea typeface="MuseoModerno Medium" pitchFamily="34" charset="-122"/>
-                <a:cs typeface="MuseoModerno Medium" pitchFamily="34" charset="-120"/>
-              </a:rPr>
-              <a:t> Spazi Sottoutilizzati</a:t>
-            </a:r>
-            <a:endParaRPr lang="en-US" sz="1850" dirty="0"/>
-          </a:p>
-        </p:txBody>
-      </p:sp>
-      <p:sp>
-        <p:nvSpPr>
-          <p:cNvPr id="13" name="Text 10"/>
-          <p:cNvSpPr/>
-          <p:nvPr/>
-        </p:nvSpPr>
-        <p:spPr>
-          <a:xfrm>
-            <a:off x="850482" y="5712321"/>
-            <a:ext cx="5918846" cy="302419"/>
-          </a:xfrm>
-          <a:prstGeom prst="rect">
-            <a:avLst/>
-          </a:prstGeom>
-          <a:noFill/>
-          <a:ln/>
-        </p:spPr>
-        <p:txBody>
-          <a:bodyPr wrap="none" lIns="0" tIns="0" rIns="0" bIns="0" rtlCol="0" anchor="t"/>
-          <a:lstStyle/>
-          <a:p>
-            <a:pPr marL="0" indent="0" algn="l">
-              <a:lnSpc>
-                <a:spcPct val="133000"/>
-              </a:lnSpc>
-              <a:buNone/>
-            </a:pPr>
-            <a:r>
-              <a:rPr lang="en-US" sz="1450" dirty="0">
-                <a:solidFill>
-                  <a:srgbClr val="2B4150"/>
-                </a:solidFill>
-                <a:latin typeface="Source Sans 3" pitchFamily="34" charset="0"/>
-                <a:ea typeface="Source Sans 3" pitchFamily="34" charset="-122"/>
-                <a:cs typeface="Source Sans 3" pitchFamily="34" charset="-120"/>
-              </a:rPr>
-              <a:t>L'università non sa come vengono usati i suoi ambienti.</a:t>
             </a:r>
             <a:endParaRPr lang="en-US" sz="1450" dirty="0"/>
           </a:p>
